--- a/ppt/RasoolBashaDurbesula_X24205478_elevator-escalator-fleet-monitoring.pptx
+++ b/ppt/RasoolBashaDurbesula_X24205478_elevator-escalator-fleet-monitoring.pptx
@@ -1150,20 +1150,20 @@
         </p:nvSpPr>
         <p:spPr>
           <a:xfrm>
-            <a:off x="640080" y="914400"/>
-            <a:ext cx="10972800" cy="1280160"/>
-          </a:xfrm>
-          <a:prstGeom prst="rect">
-            <a:avLst/>
-          </a:prstGeom>
-          <a:noFill/>
-          <a:ln/>
-        </p:spPr>
-        <p:txBody>
-          <a:bodyPr wrap="square" rtlCol="0" anchor="t"/>
-          <a:lstStyle/>
-          <a:p>
-            <a:pPr algn="l" indent="0" marL="0">
+            <a:off x="548640" y="1051560"/>
+            <a:ext cx="11064240" cy="1188720"/>
+          </a:xfrm>
+          <a:prstGeom prst="rect">
+            <a:avLst/>
+          </a:prstGeom>
+          <a:noFill/>
+          <a:ln/>
+        </p:spPr>
+        <p:txBody>
+          <a:bodyPr wrap="square" rtlCol="0" anchor="ctr"/>
+          <a:lstStyle/>
+          <a:p>
+            <a:pPr algn="ctr" indent="0" marL="0">
               <a:buNone/>
             </a:pPr>
             <a:r>
@@ -1189,8 +1189,8 @@
         </p:nvSpPr>
         <p:spPr>
           <a:xfrm>
-            <a:off x="658368" y="2148840"/>
-            <a:ext cx="10972800" cy="365760"/>
+            <a:off x="548640" y="2286000"/>
+            <a:ext cx="11064240" cy="365760"/>
           </a:xfrm>
           <a:prstGeom prst="rect">
             <a:avLst/>
@@ -1202,7 +1202,7 @@
           <a:bodyPr wrap="square" rtlCol="0" anchor="ctr"/>
           <a:lstStyle/>
           <a:p>
-            <a:pPr indent="0" marL="0">
+            <a:pPr algn="ctr" indent="0" marL="0">
               <a:buNone/>
             </a:pPr>
             <a:r>
@@ -1228,8 +1228,8 @@
         </p:nvSpPr>
         <p:spPr>
           <a:xfrm>
-            <a:off x="658368" y="2697480"/>
-            <a:ext cx="10424160" cy="1371600"/>
+            <a:off x="1463040" y="2926080"/>
+            <a:ext cx="9235440" cy="1371600"/>
           </a:xfrm>
           <a:prstGeom prst="rect">
             <a:avLst/>
@@ -1241,7 +1241,7 @@
           <a:bodyPr wrap="square" rtlCol="0" anchor="ctr"/>
           <a:lstStyle/>
           <a:p>
-            <a:pPr indent="0" marL="0">
+            <a:pPr algn="ctr" indent="0" marL="0">
               <a:lnSpc>
                 <a:spcPct val="110000"/>
               </a:lnSpc>
@@ -1270,7 +1270,7 @@
         </p:nvSpPr>
         <p:spPr>
           <a:xfrm>
-            <a:off x="658368" y="4206240"/>
+            <a:off x="1889608" y="4526280"/>
             <a:ext cx="2651760" cy="566928"/>
           </a:xfrm>
           <a:prstGeom prst="roundRect">
@@ -1297,7 +1297,7 @@
         </p:nvSpPr>
         <p:spPr>
           <a:xfrm>
-            <a:off x="658368" y="4206240"/>
+            <a:off x="1889608" y="4526280"/>
             <a:ext cx="2651760" cy="566928"/>
           </a:xfrm>
           <a:prstGeom prst="rect">
@@ -1314,7 +1314,7 @@
               <a:buNone/>
             </a:pPr>
             <a:r>
-              <a:rPr lang="en-US" sz="1400" b="1" dirty="0">
+              <a:rPr lang="en-US" sz="1350" b="1" dirty="0">
                 <a:solidFill>
                   <a:srgbClr val="F0A500"/>
                 </a:solidFill>
@@ -1324,7 +1324,7 @@
               </a:rPr>
               <a:t>Motor &gt; 85 °C (avg)</a:t>
             </a:r>
-            <a:endParaRPr lang="en-US" sz="1400" dirty="0"/>
+            <a:endParaRPr lang="en-US" sz="1350" dirty="0"/>
           </a:p>
         </p:txBody>
       </p:sp>
@@ -1336,7 +1336,7 @@
         </p:nvSpPr>
         <p:spPr>
           <a:xfrm>
-            <a:off x="3538728" y="4206240"/>
+            <a:off x="4769968" y="4526280"/>
             <a:ext cx="2651760" cy="566928"/>
           </a:xfrm>
           <a:prstGeom prst="roundRect">
@@ -1363,7 +1363,7 @@
         </p:nvSpPr>
         <p:spPr>
           <a:xfrm>
-            <a:off x="3538728" y="4206240"/>
+            <a:off x="4769968" y="4526280"/>
             <a:ext cx="2651760" cy="566928"/>
           </a:xfrm>
           <a:prstGeom prst="rect">
@@ -1380,7 +1380,7 @@
               <a:buNone/>
             </a:pPr>
             <a:r>
-              <a:rPr lang="en-US" sz="1400" b="1" dirty="0">
+              <a:rPr lang="en-US" sz="1350" b="1" dirty="0">
                 <a:solidFill>
                   <a:srgbClr val="F0A500"/>
                 </a:solidFill>
@@ -1390,7 +1390,7 @@
               </a:rPr>
               <a:t>Overload &gt; 1,000 kg (peak)</a:t>
             </a:r>
-            <a:endParaRPr lang="en-US" sz="1400" dirty="0"/>
+            <a:endParaRPr lang="en-US" sz="1350" dirty="0"/>
           </a:p>
         </p:txBody>
       </p:sp>
@@ -1402,7 +1402,7 @@
         </p:nvSpPr>
         <p:spPr>
           <a:xfrm>
-            <a:off x="6419088" y="4206240"/>
+            <a:off x="7650328" y="4526280"/>
             <a:ext cx="2651760" cy="566928"/>
           </a:xfrm>
           <a:prstGeom prst="roundRect">
@@ -1429,7 +1429,7 @@
         </p:nvSpPr>
         <p:spPr>
           <a:xfrm>
-            <a:off x="6419088" y="4206240"/>
+            <a:off x="7650328" y="4526280"/>
             <a:ext cx="2651760" cy="566928"/>
           </a:xfrm>
           <a:prstGeom prst="rect">
@@ -1446,7 +1446,7 @@
               <a:buNone/>
             </a:pPr>
             <a:r>
-              <a:rPr lang="en-US" sz="1400" b="1" dirty="0">
+              <a:rPr lang="en-US" sz="1350" b="1" dirty="0">
                 <a:solidFill>
                   <a:srgbClr val="F0A500"/>
                 </a:solidFill>
@@ -1456,7 +1456,7 @@
               </a:rPr>
               <a:t>Stall &lt; 0.5 m/s</a:t>
             </a:r>
-            <a:endParaRPr lang="en-US" sz="1400" dirty="0"/>
+            <a:endParaRPr lang="en-US" sz="1350" dirty="0"/>
           </a:p>
         </p:txBody>
       </p:sp>
@@ -1468,8 +1468,8 @@
         </p:nvSpPr>
         <p:spPr>
           <a:xfrm>
-            <a:off x="658368" y="6126480"/>
-            <a:ext cx="10972800" cy="365760"/>
+            <a:off x="548640" y="6126480"/>
+            <a:ext cx="11064240" cy="365760"/>
           </a:xfrm>
           <a:prstGeom prst="rect">
             <a:avLst/>
@@ -1481,7 +1481,7 @@
           <a:bodyPr wrap="square" rtlCol="0" anchor="ctr"/>
           <a:lstStyle/>
           <a:p>
-            <a:pPr indent="0" marL="0">
+            <a:pPr algn="ctr" indent="0" marL="0">
               <a:buNone/>
             </a:pPr>
             <a:r>
@@ -1578,12 +1578,12 @@
         </p:nvSpPr>
         <p:spPr>
           <a:xfrm>
-            <a:off x="640080" y="2468880"/>
-            <a:ext cx="1572768" cy="1371600"/>
+            <a:off x="640080" y="1554480"/>
+            <a:ext cx="3200400" cy="3383280"/>
           </a:xfrm>
           <a:prstGeom prst="roundRect">
             <a:avLst>
-              <a:gd name="adj" fmla="val 6667"/>
+              <a:gd name="adj" fmla="val 2857"/>
             </a:avLst>
           </a:prstGeom>
           <a:solidFill>
@@ -1599,146 +1599,63 @@
       </p:sp>
       <p:sp>
         <p:nvSpPr>
-          <p:cNvPr id="4" name="Shape 2"/>
-          <p:cNvSpPr/>
-          <p:nvPr/>
-        </p:nvSpPr>
-        <p:spPr>
-          <a:xfrm>
-            <a:off x="1325880" y="2670048"/>
-            <a:ext cx="201168" cy="201168"/>
-          </a:xfrm>
-          <a:prstGeom prst="ellipse">
-            <a:avLst/>
-          </a:prstGeom>
-          <a:solidFill>
-            <a:srgbClr val="74889A"/>
-          </a:solidFill>
-          <a:ln/>
-        </p:spPr>
-      </p:sp>
-      <p:sp>
-        <p:nvSpPr>
-          <p:cNvPr id="5" name="Text 3"/>
-          <p:cNvSpPr/>
-          <p:nvPr/>
-        </p:nvSpPr>
-        <p:spPr>
-          <a:xfrm>
-            <a:off x="594360" y="2926080"/>
-            <a:ext cx="1664208" cy="411480"/>
-          </a:xfrm>
-          <a:prstGeom prst="rect">
-            <a:avLst/>
-          </a:prstGeom>
-          <a:noFill/>
-          <a:ln/>
-        </p:spPr>
-        <p:txBody>
-          <a:bodyPr wrap="square" lIns="0" tIns="0" rIns="0" bIns="0" rtlCol="0" anchor="ctr"/>
+          <p:cNvPr id="4" name="Text 2"/>
+          <p:cNvSpPr/>
+          <p:nvPr/>
+        </p:nvSpPr>
+        <p:spPr>
+          <a:xfrm>
+            <a:off x="640080" y="1691640"/>
+            <a:ext cx="3200400" cy="365760"/>
+          </a:xfrm>
+          <a:prstGeom prst="rect">
+            <a:avLst/>
+          </a:prstGeom>
+          <a:noFill/>
+          <a:ln/>
+        </p:spPr>
+        <p:txBody>
+          <a:bodyPr wrap="square" rtlCol="0" anchor="ctr"/>
           <a:lstStyle/>
           <a:p>
             <a:pPr algn="ctr" indent="0" marL="0">
               <a:buNone/>
             </a:pPr>
             <a:r>
-              <a:rPr lang="en-US" sz="1450" b="1" dirty="0">
-                <a:solidFill>
-                  <a:srgbClr val="1F272D"/>
+              <a:rPr lang="en-US" sz="1200" b="1" spc="300" kern="0" dirty="0">
+                <a:solidFill>
+                  <a:srgbClr val="74889A"/>
                 </a:solidFill>
                 <a:latin typeface="Calibri" pitchFamily="34" charset="0"/>
                 <a:ea typeface="Calibri" pitchFamily="34" charset="-122"/>
                 <a:cs typeface="Calibri" pitchFamily="34" charset="-120"/>
               </a:rPr>
-              <a:t>Cab sensors</a:t>
-            </a:r>
-            <a:endParaRPr lang="en-US" sz="1450" dirty="0"/>
-          </a:p>
-        </p:txBody>
-      </p:sp>
-      <p:sp>
-        <p:nvSpPr>
-          <p:cNvPr id="6" name="Text 4"/>
-          <p:cNvSpPr/>
-          <p:nvPr/>
-        </p:nvSpPr>
-        <p:spPr>
-          <a:xfrm>
-            <a:off x="621792" y="3310128"/>
-            <a:ext cx="1609344" cy="457200"/>
-          </a:xfrm>
-          <a:prstGeom prst="rect">
-            <a:avLst/>
-          </a:prstGeom>
-          <a:noFill/>
-          <a:ln/>
-        </p:spPr>
-        <p:txBody>
-          <a:bodyPr wrap="square" lIns="0" tIns="0" rIns="0" bIns="0" rtlCol="0" anchor="t"/>
-          <a:lstStyle/>
-          <a:p>
-            <a:pPr algn="ctr" indent="0" marL="0">
-              <a:buNone/>
-            </a:pPr>
-            <a:r>
-              <a:rPr lang="en-US" sz="1050" dirty="0">
-                <a:solidFill>
-                  <a:srgbClr val="626E78"/>
-                </a:solidFill>
-                <a:latin typeface="Calibri" pitchFamily="34" charset="0"/>
-                <a:ea typeface="Calibri" pitchFamily="34" charset="-122"/>
-                <a:cs typeface="Calibri" pitchFamily="34" charset="-120"/>
-              </a:rPr>
-              <a:t>10 · 2 towers</a:t>
-            </a:r>
-            <a:endParaRPr lang="en-US" sz="1050" dirty="0"/>
-          </a:p>
-        </p:txBody>
-      </p:sp>
-      <p:sp>
-        <p:nvSpPr>
-          <p:cNvPr id="7" name="Shape 5"/>
-          <p:cNvSpPr/>
-          <p:nvPr/>
-        </p:nvSpPr>
-        <p:spPr>
-          <a:xfrm>
-            <a:off x="2231136" y="3154680"/>
-            <a:ext cx="258409" cy="0"/>
-          </a:xfrm>
-          <a:prstGeom prst="line">
-            <a:avLst/>
-          </a:prstGeom>
-          <a:noFill/>
-          <a:ln w="25400">
-            <a:solidFill>
-              <a:srgbClr val="74889A"/>
-            </a:solidFill>
-            <a:prstDash val="solid"/>
-            <a:tailEnd type="triangle"/>
-          </a:ln>
-        </p:spPr>
-      </p:sp>
-      <p:sp>
-        <p:nvSpPr>
-          <p:cNvPr id="8" name="Shape 6"/>
-          <p:cNvSpPr/>
-          <p:nvPr/>
-        </p:nvSpPr>
-        <p:spPr>
-          <a:xfrm>
-            <a:off x="2507833" y="2468880"/>
-            <a:ext cx="1572768" cy="1371600"/>
+              <a:t>EDGE</a:t>
+            </a:r>
+            <a:endParaRPr lang="en-US" sz="1200" dirty="0"/>
+          </a:p>
+        </p:txBody>
+      </p:sp>
+      <p:sp>
+        <p:nvSpPr>
+          <p:cNvPr id="5" name="Shape 3"/>
+          <p:cNvSpPr/>
+          <p:nvPr/>
+        </p:nvSpPr>
+        <p:spPr>
+          <a:xfrm>
+            <a:off x="914400" y="2286000"/>
+            <a:ext cx="2651760" cy="1005840"/>
           </a:xfrm>
           <a:prstGeom prst="roundRect">
             <a:avLst>
-              <a:gd name="adj" fmla="val 6667"/>
+              <a:gd name="adj" fmla="val 7273"/>
             </a:avLst>
           </a:prstGeom>
           <a:solidFill>
-            <a:srgbClr val="EFF2F4"/>
+            <a:srgbClr val="FFFFFF"/>
           </a:solidFill>
-          <a:ln w="19050">
+          <a:ln w="15240">
             <a:solidFill>
               <a:srgbClr val="74889A"/>
             </a:solidFill>
@@ -1748,34 +1665,14 @@
       </p:sp>
       <p:sp>
         <p:nvSpPr>
-          <p:cNvPr id="9" name="Shape 7"/>
-          <p:cNvSpPr/>
-          <p:nvPr/>
-        </p:nvSpPr>
-        <p:spPr>
-          <a:xfrm>
-            <a:off x="3193633" y="2670048"/>
-            <a:ext cx="201168" cy="201168"/>
-          </a:xfrm>
-          <a:prstGeom prst="ellipse">
-            <a:avLst/>
-          </a:prstGeom>
-          <a:solidFill>
-            <a:srgbClr val="74889A"/>
-          </a:solidFill>
-          <a:ln/>
-        </p:spPr>
-      </p:sp>
-      <p:sp>
-        <p:nvSpPr>
-          <p:cNvPr id="10" name="Text 8"/>
-          <p:cNvSpPr/>
-          <p:nvPr/>
-        </p:nvSpPr>
-        <p:spPr>
-          <a:xfrm>
-            <a:off x="2462113" y="2926080"/>
-            <a:ext cx="1664208" cy="411480"/>
+          <p:cNvPr id="6" name="Text 4"/>
+          <p:cNvSpPr/>
+          <p:nvPr/>
+        </p:nvSpPr>
+        <p:spPr>
+          <a:xfrm>
+            <a:off x="914400" y="2432304"/>
+            <a:ext cx="2651760" cy="365760"/>
           </a:xfrm>
           <a:prstGeom prst="rect">
             <a:avLst/>
@@ -1791,7 +1688,7 @@
               <a:buNone/>
             </a:pPr>
             <a:r>
-              <a:rPr lang="en-US" sz="1450" b="1" dirty="0">
+              <a:rPr lang="en-US" sz="1400" b="1" dirty="0">
                 <a:solidFill>
                   <a:srgbClr val="1F272D"/>
                 </a:solidFill>
@@ -1799,38 +1696,38 @@
                 <a:ea typeface="Calibri" pitchFamily="34" charset="-122"/>
                 <a:cs typeface="Calibri" pitchFamily="34" charset="-120"/>
               </a:rPr>
-              <a:t>Fog node</a:t>
-            </a:r>
-            <a:endParaRPr lang="en-US" sz="1450" dirty="0"/>
-          </a:p>
-        </p:txBody>
-      </p:sp>
-      <p:sp>
-        <p:nvSpPr>
-          <p:cNvPr id="11" name="Text 9"/>
-          <p:cNvSpPr/>
-          <p:nvPr/>
-        </p:nvSpPr>
-        <p:spPr>
-          <a:xfrm>
-            <a:off x="2489545" y="3310128"/>
-            <a:ext cx="1609344" cy="457200"/>
-          </a:xfrm>
-          <a:prstGeom prst="rect">
-            <a:avLst/>
-          </a:prstGeom>
-          <a:noFill/>
-          <a:ln/>
-        </p:spPr>
-        <p:txBody>
-          <a:bodyPr wrap="square" lIns="0" tIns="0" rIns="0" bIns="0" rtlCol="0" anchor="t"/>
+              <a:t>Cab sensors</a:t>
+            </a:r>
+            <a:endParaRPr lang="en-US" sz="1400" dirty="0"/>
+          </a:p>
+        </p:txBody>
+      </p:sp>
+      <p:sp>
+        <p:nvSpPr>
+          <p:cNvPr id="7" name="Text 5"/>
+          <p:cNvSpPr/>
+          <p:nvPr/>
+        </p:nvSpPr>
+        <p:spPr>
+          <a:xfrm>
+            <a:off x="914400" y="2816352"/>
+            <a:ext cx="2651760" cy="365760"/>
+          </a:xfrm>
+          <a:prstGeom prst="rect">
+            <a:avLst/>
+          </a:prstGeom>
+          <a:noFill/>
+          <a:ln/>
+        </p:spPr>
+        <p:txBody>
+          <a:bodyPr wrap="square" lIns="0" tIns="0" rIns="0" bIns="0" rtlCol="0" anchor="ctr"/>
           <a:lstStyle/>
           <a:p>
             <a:pPr algn="ctr" indent="0" marL="0">
               <a:buNone/>
             </a:pPr>
             <a:r>
-              <a:rPr lang="en-US" sz="1050" dirty="0">
+              <a:rPr lang="en-US" sz="1000" dirty="0">
                 <a:solidFill>
                   <a:srgbClr val="626E78"/>
                 </a:solidFill>
@@ -1838,50 +1735,155 @@
                 <a:ea typeface="Calibri" pitchFamily="34" charset="-122"/>
                 <a:cs typeface="Calibri" pitchFamily="34" charset="-120"/>
               </a:rPr>
-              <a:t>window · aggregate · alert</a:t>
-            </a:r>
-            <a:endParaRPr lang="en-US" sz="1050" dirty="0"/>
-          </a:p>
-        </p:txBody>
-      </p:sp>
-      <p:sp>
-        <p:nvSpPr>
-          <p:cNvPr id="12" name="Shape 10"/>
-          <p:cNvSpPr/>
-          <p:nvPr/>
-        </p:nvSpPr>
-        <p:spPr>
-          <a:xfrm>
-            <a:off x="4098889" y="3154680"/>
-            <a:ext cx="258409" cy="0"/>
-          </a:xfrm>
-          <a:prstGeom prst="line">
-            <a:avLst/>
-          </a:prstGeom>
-          <a:noFill/>
-          <a:ln w="25400">
+              <a:t>10 · 2 towers</a:t>
+            </a:r>
+            <a:endParaRPr lang="en-US" sz="1000" dirty="0"/>
+          </a:p>
+        </p:txBody>
+      </p:sp>
+      <p:sp>
+        <p:nvSpPr>
+          <p:cNvPr id="8" name="Shape 6"/>
+          <p:cNvSpPr/>
+          <p:nvPr/>
+        </p:nvSpPr>
+        <p:spPr>
+          <a:xfrm>
+            <a:off x="914400" y="3520440"/>
+            <a:ext cx="2651760" cy="1005840"/>
+          </a:xfrm>
+          <a:prstGeom prst="roundRect">
+            <a:avLst>
+              <a:gd name="adj" fmla="val 7273"/>
+            </a:avLst>
+          </a:prstGeom>
+          <a:solidFill>
+            <a:srgbClr val="FFFFFF"/>
+          </a:solidFill>
+          <a:ln w="15240">
             <a:solidFill>
               <a:srgbClr val="74889A"/>
             </a:solidFill>
             <a:prstDash val="solid"/>
+          </a:ln>
+        </p:spPr>
+      </p:sp>
+      <p:sp>
+        <p:nvSpPr>
+          <p:cNvPr id="9" name="Text 7"/>
+          <p:cNvSpPr/>
+          <p:nvPr/>
+        </p:nvSpPr>
+        <p:spPr>
+          <a:xfrm>
+            <a:off x="914400" y="3666744"/>
+            <a:ext cx="2651760" cy="365760"/>
+          </a:xfrm>
+          <a:prstGeom prst="rect">
+            <a:avLst/>
+          </a:prstGeom>
+          <a:noFill/>
+          <a:ln/>
+        </p:spPr>
+        <p:txBody>
+          <a:bodyPr wrap="square" lIns="0" tIns="0" rIns="0" bIns="0" rtlCol="0" anchor="ctr"/>
+          <a:lstStyle/>
+          <a:p>
+            <a:pPr algn="ctr" indent="0" marL="0">
+              <a:buNone/>
+            </a:pPr>
+            <a:r>
+              <a:rPr lang="en-US" sz="1400" b="1" dirty="0">
+                <a:solidFill>
+                  <a:srgbClr val="1F272D"/>
+                </a:solidFill>
+                <a:latin typeface="Calibri" pitchFamily="34" charset="0"/>
+                <a:ea typeface="Calibri" pitchFamily="34" charset="-122"/>
+                <a:cs typeface="Calibri" pitchFamily="34" charset="-120"/>
+              </a:rPr>
+              <a:t>Fog node</a:t>
+            </a:r>
+            <a:endParaRPr lang="en-US" sz="1400" dirty="0"/>
+          </a:p>
+        </p:txBody>
+      </p:sp>
+      <p:sp>
+        <p:nvSpPr>
+          <p:cNvPr id="10" name="Text 8"/>
+          <p:cNvSpPr/>
+          <p:nvPr/>
+        </p:nvSpPr>
+        <p:spPr>
+          <a:xfrm>
+            <a:off x="914400" y="4050792"/>
+            <a:ext cx="2651760" cy="365760"/>
+          </a:xfrm>
+          <a:prstGeom prst="rect">
+            <a:avLst/>
+          </a:prstGeom>
+          <a:noFill/>
+          <a:ln/>
+        </p:spPr>
+        <p:txBody>
+          <a:bodyPr wrap="square" lIns="0" tIns="0" rIns="0" bIns="0" rtlCol="0" anchor="ctr"/>
+          <a:lstStyle/>
+          <a:p>
+            <a:pPr algn="ctr" indent="0" marL="0">
+              <a:buNone/>
+            </a:pPr>
+            <a:r>
+              <a:rPr lang="en-US" sz="1000" dirty="0">
+                <a:solidFill>
+                  <a:srgbClr val="626E78"/>
+                </a:solidFill>
+                <a:latin typeface="Calibri" pitchFamily="34" charset="0"/>
+                <a:ea typeface="Calibri" pitchFamily="34" charset="-122"/>
+                <a:cs typeface="Calibri" pitchFamily="34" charset="-120"/>
+              </a:rPr>
+              <a:t>window · aggregate · alert</a:t>
+            </a:r>
+            <a:endParaRPr lang="en-US" sz="1000" dirty="0"/>
+          </a:p>
+        </p:txBody>
+      </p:sp>
+      <p:sp>
+        <p:nvSpPr>
+          <p:cNvPr id="11" name="Shape 9"/>
+          <p:cNvSpPr/>
+          <p:nvPr/>
+        </p:nvSpPr>
+        <p:spPr>
+          <a:xfrm>
+            <a:off x="3886200" y="3246120"/>
+            <a:ext cx="502920" cy="0"/>
+          </a:xfrm>
+          <a:prstGeom prst="line">
+            <a:avLst/>
+          </a:prstGeom>
+          <a:noFill/>
+          <a:ln w="31750">
+            <a:solidFill>
+              <a:srgbClr val="37474F"/>
+            </a:solidFill>
+            <a:prstDash val="solid"/>
             <a:tailEnd type="triangle"/>
           </a:ln>
         </p:spPr>
       </p:sp>
       <p:sp>
         <p:nvSpPr>
-          <p:cNvPr id="13" name="Shape 11"/>
-          <p:cNvSpPr/>
-          <p:nvPr/>
-        </p:nvSpPr>
-        <p:spPr>
-          <a:xfrm>
-            <a:off x="4375587" y="2468880"/>
-            <a:ext cx="1572768" cy="1371600"/>
+          <p:cNvPr id="12" name="Shape 10"/>
+          <p:cNvSpPr/>
+          <p:nvPr/>
+        </p:nvSpPr>
+        <p:spPr>
+          <a:xfrm>
+            <a:off x="4572000" y="1554480"/>
+            <a:ext cx="6949440" cy="3383280"/>
           </a:xfrm>
           <a:prstGeom prst="roundRect">
             <a:avLst>
-              <a:gd name="adj" fmla="val 6667"/>
+              <a:gd name="adj" fmla="val 2703"/>
             </a:avLst>
           </a:prstGeom>
           <a:solidFill>
@@ -1897,99 +1899,145 @@
       </p:sp>
       <p:sp>
         <p:nvSpPr>
-          <p:cNvPr id="14" name="Shape 12"/>
-          <p:cNvSpPr/>
-          <p:nvPr/>
-        </p:nvSpPr>
-        <p:spPr>
-          <a:xfrm>
-            <a:off x="5061387" y="2670048"/>
-            <a:ext cx="201168" cy="201168"/>
-          </a:xfrm>
-          <a:prstGeom prst="ellipse">
-            <a:avLst/>
-          </a:prstGeom>
-          <a:solidFill>
-            <a:srgbClr val="37474F"/>
-          </a:solidFill>
-          <a:ln/>
-        </p:spPr>
-      </p:sp>
-      <p:sp>
-        <p:nvSpPr>
-          <p:cNvPr id="15" name="Text 13"/>
-          <p:cNvSpPr/>
-          <p:nvPr/>
-        </p:nvSpPr>
-        <p:spPr>
-          <a:xfrm>
-            <a:off x="4329867" y="2926080"/>
-            <a:ext cx="1664208" cy="411480"/>
-          </a:xfrm>
-          <a:prstGeom prst="rect">
-            <a:avLst/>
-          </a:prstGeom>
-          <a:noFill/>
-          <a:ln/>
-        </p:spPr>
-        <p:txBody>
-          <a:bodyPr wrap="square" lIns="0" tIns="0" rIns="0" bIns="0" rtlCol="0" anchor="ctr"/>
+          <p:cNvPr id="13" name="Text 11"/>
+          <p:cNvSpPr/>
+          <p:nvPr/>
+        </p:nvSpPr>
+        <p:spPr>
+          <a:xfrm>
+            <a:off x="4572000" y="1691640"/>
+            <a:ext cx="6949440" cy="365760"/>
+          </a:xfrm>
+          <a:prstGeom prst="rect">
+            <a:avLst/>
+          </a:prstGeom>
+          <a:noFill/>
+          <a:ln/>
+        </p:spPr>
+        <p:txBody>
+          <a:bodyPr wrap="square" rtlCol="0" anchor="ctr"/>
           <a:lstStyle/>
           <a:p>
             <a:pPr algn="ctr" indent="0" marL="0">
               <a:buNone/>
             </a:pPr>
             <a:r>
-              <a:rPr lang="en-US" sz="1450" b="1" dirty="0">
-                <a:solidFill>
-                  <a:srgbClr val="1F272D"/>
+              <a:rPr lang="en-US" sz="1200" b="1" spc="200" kern="0" dirty="0">
+                <a:solidFill>
+                  <a:srgbClr val="37474F"/>
                 </a:solidFill>
                 <a:latin typeface="Calibri" pitchFamily="34" charset="0"/>
                 <a:ea typeface="Calibri" pitchFamily="34" charset="-122"/>
                 <a:cs typeface="Calibri" pitchFamily="34" charset="-120"/>
               </a:rPr>
-              <a:t>Amazon SQS</a:t>
-            </a:r>
-            <a:endParaRPr lang="en-US" sz="1450" dirty="0"/>
-          </a:p>
-        </p:txBody>
-      </p:sp>
-      <p:sp>
-        <p:nvSpPr>
-          <p:cNvPr id="16" name="Text 14"/>
-          <p:cNvSpPr/>
-          <p:nvPr/>
-        </p:nvSpPr>
-        <p:spPr>
-          <a:xfrm>
-            <a:off x="4357299" y="3310128"/>
-            <a:ext cx="1609344" cy="457200"/>
-          </a:xfrm>
-          <a:prstGeom prst="rect">
-            <a:avLst/>
-          </a:prstGeom>
-          <a:noFill/>
-          <a:ln/>
-        </p:spPr>
-        <p:txBody>
-          <a:bodyPr wrap="square" lIns="0" tIns="0" rIns="0" bIns="0" rtlCol="0" anchor="t"/>
+              <a:t>CLOUD (serverless)</a:t>
+            </a:r>
+            <a:endParaRPr lang="en-US" sz="1200" dirty="0"/>
+          </a:p>
+        </p:txBody>
+      </p:sp>
+      <p:sp>
+        <p:nvSpPr>
+          <p:cNvPr id="14" name="Shape 12"/>
+          <p:cNvSpPr/>
+          <p:nvPr/>
+        </p:nvSpPr>
+        <p:spPr>
+          <a:xfrm>
+            <a:off x="4846320" y="2651760"/>
+            <a:ext cx="1463040" cy="1371600"/>
+          </a:xfrm>
+          <a:prstGeom prst="roundRect">
+            <a:avLst>
+              <a:gd name="adj" fmla="val 5333"/>
+            </a:avLst>
+          </a:prstGeom>
+          <a:solidFill>
+            <a:srgbClr val="FFFFFF"/>
+          </a:solidFill>
+          <a:ln w="15240">
+            <a:solidFill>
+              <a:srgbClr val="37474F"/>
+            </a:solidFill>
+            <a:prstDash val="solid"/>
+          </a:ln>
+        </p:spPr>
+      </p:sp>
+      <p:sp>
+        <p:nvSpPr>
+          <p:cNvPr id="15" name="Text 13"/>
+          <p:cNvSpPr/>
+          <p:nvPr/>
+        </p:nvSpPr>
+        <p:spPr>
+          <a:xfrm>
+            <a:off x="4800600" y="2907792"/>
+            <a:ext cx="1554480" cy="457200"/>
+          </a:xfrm>
+          <a:prstGeom prst="rect">
+            <a:avLst/>
+          </a:prstGeom>
+          <a:noFill/>
+          <a:ln/>
+        </p:spPr>
+        <p:txBody>
+          <a:bodyPr wrap="square" lIns="0" tIns="0" rIns="0" bIns="0" rtlCol="0" anchor="ctr"/>
           <a:lstStyle/>
           <a:p>
             <a:pPr algn="ctr" indent="0" marL="0">
               <a:buNone/>
             </a:pPr>
             <a:r>
-              <a:rPr lang="en-US" sz="1050" dirty="0">
-                <a:solidFill>
-                  <a:srgbClr val="626E78"/>
+              <a:rPr lang="en-US" sz="1250" b="1" dirty="0">
+                <a:solidFill>
+                  <a:srgbClr val="1F272D"/>
                 </a:solidFill>
                 <a:latin typeface="Calibri" pitchFamily="34" charset="0"/>
                 <a:ea typeface="Calibri" pitchFamily="34" charset="-122"/>
                 <a:cs typeface="Calibri" pitchFamily="34" charset="-120"/>
               </a:rPr>
+              <a:t>Amazon SQS</a:t>
+            </a:r>
+            <a:endParaRPr lang="en-US" sz="1250" dirty="0"/>
+          </a:p>
+        </p:txBody>
+      </p:sp>
+      <p:sp>
+        <p:nvSpPr>
+          <p:cNvPr id="16" name="Text 14"/>
+          <p:cNvSpPr/>
+          <p:nvPr/>
+        </p:nvSpPr>
+        <p:spPr>
+          <a:xfrm>
+            <a:off x="4828032" y="3401568"/>
+            <a:ext cx="1499616" cy="457200"/>
+          </a:xfrm>
+          <a:prstGeom prst="rect">
+            <a:avLst/>
+          </a:prstGeom>
+          <a:noFill/>
+          <a:ln/>
+        </p:spPr>
+        <p:txBody>
+          <a:bodyPr wrap="square" lIns="0" tIns="0" rIns="0" bIns="0" rtlCol="0" anchor="ctr"/>
+          <a:lstStyle/>
+          <a:p>
+            <a:pPr algn="ctr" indent="0" marL="0">
+              <a:buNone/>
+            </a:pPr>
+            <a:r>
+              <a:rPr lang="en-US" sz="900" dirty="0">
+                <a:solidFill>
+                  <a:srgbClr val="626E78"/>
+                </a:solidFill>
+                <a:latin typeface="Calibri" pitchFamily="34" charset="0"/>
+                <a:ea typeface="Calibri" pitchFamily="34" charset="-122"/>
+                <a:cs typeface="Calibri" pitchFamily="34" charset="-120"/>
+              </a:rPr>
               <a:t>aggregate queue</a:t>
             </a:r>
-            <a:endParaRPr lang="en-US" sz="1050" dirty="0"/>
+            <a:endParaRPr lang="en-US" sz="900" dirty="0"/>
           </a:p>
         </p:txBody>
       </p:sp>
@@ -2001,14 +2049,14 @@
         </p:nvSpPr>
         <p:spPr>
           <a:xfrm>
-            <a:off x="5966643" y="3154680"/>
-            <a:ext cx="258409" cy="0"/>
+            <a:off x="6318504" y="3337560"/>
+            <a:ext cx="164592" cy="0"/>
           </a:xfrm>
           <a:prstGeom prst="line">
             <a:avLst/>
           </a:prstGeom>
           <a:noFill/>
-          <a:ln w="25400">
+          <a:ln w="20320">
             <a:solidFill>
               <a:srgbClr val="74889A"/>
             </a:solidFill>
@@ -2025,18 +2073,18 @@
         </p:nvSpPr>
         <p:spPr>
           <a:xfrm>
-            <a:off x="6243340" y="2468880"/>
-            <a:ext cx="1572768" cy="1371600"/>
+            <a:off x="6492240" y="2651760"/>
+            <a:ext cx="1463040" cy="1371600"/>
           </a:xfrm>
           <a:prstGeom prst="roundRect">
             <a:avLst>
-              <a:gd name="adj" fmla="val 6667"/>
+              <a:gd name="adj" fmla="val 5333"/>
             </a:avLst>
           </a:prstGeom>
           <a:solidFill>
-            <a:srgbClr val="EFF2F4"/>
+            <a:srgbClr val="FFFFFF"/>
           </a:solidFill>
-          <a:ln w="19050">
+          <a:ln w="15240">
             <a:solidFill>
               <a:srgbClr val="37474F"/>
             </a:solidFill>
@@ -2046,34 +2094,14 @@
       </p:sp>
       <p:sp>
         <p:nvSpPr>
-          <p:cNvPr id="19" name="Shape 17"/>
-          <p:cNvSpPr/>
-          <p:nvPr/>
-        </p:nvSpPr>
-        <p:spPr>
-          <a:xfrm>
-            <a:off x="6929140" y="2670048"/>
-            <a:ext cx="201168" cy="201168"/>
-          </a:xfrm>
-          <a:prstGeom prst="ellipse">
-            <a:avLst/>
-          </a:prstGeom>
-          <a:solidFill>
-            <a:srgbClr val="37474F"/>
-          </a:solidFill>
-          <a:ln/>
-        </p:spPr>
-      </p:sp>
-      <p:sp>
-        <p:nvSpPr>
-          <p:cNvPr id="20" name="Text 18"/>
-          <p:cNvSpPr/>
-          <p:nvPr/>
-        </p:nvSpPr>
-        <p:spPr>
-          <a:xfrm>
-            <a:off x="6197620" y="2926080"/>
-            <a:ext cx="1664208" cy="411480"/>
+          <p:cNvPr id="19" name="Text 17"/>
+          <p:cNvSpPr/>
+          <p:nvPr/>
+        </p:nvSpPr>
+        <p:spPr>
+          <a:xfrm>
+            <a:off x="6446520" y="2907792"/>
+            <a:ext cx="1554480" cy="457200"/>
           </a:xfrm>
           <a:prstGeom prst="rect">
             <a:avLst/>
@@ -2089,7 +2117,7 @@
               <a:buNone/>
             </a:pPr>
             <a:r>
-              <a:rPr lang="en-US" sz="1450" b="1" dirty="0">
+              <a:rPr lang="en-US" sz="1250" b="1" dirty="0">
                 <a:solidFill>
                   <a:srgbClr val="1F272D"/>
                 </a:solidFill>
@@ -2099,36 +2127,36 @@
               </a:rPr>
               <a:t>AWS Lambda</a:t>
             </a:r>
-            <a:endParaRPr lang="en-US" sz="1450" dirty="0"/>
-          </a:p>
-        </p:txBody>
-      </p:sp>
-      <p:sp>
-        <p:nvSpPr>
-          <p:cNvPr id="21" name="Text 19"/>
-          <p:cNvSpPr/>
-          <p:nvPr/>
-        </p:nvSpPr>
-        <p:spPr>
-          <a:xfrm>
-            <a:off x="6225052" y="3310128"/>
-            <a:ext cx="1609344" cy="457200"/>
-          </a:xfrm>
-          <a:prstGeom prst="rect">
-            <a:avLst/>
-          </a:prstGeom>
-          <a:noFill/>
-          <a:ln/>
-        </p:spPr>
-        <p:txBody>
-          <a:bodyPr wrap="square" lIns="0" tIns="0" rIns="0" bIns="0" rtlCol="0" anchor="t"/>
+            <a:endParaRPr lang="en-US" sz="1250" dirty="0"/>
+          </a:p>
+        </p:txBody>
+      </p:sp>
+      <p:sp>
+        <p:nvSpPr>
+          <p:cNvPr id="20" name="Text 18"/>
+          <p:cNvSpPr/>
+          <p:nvPr/>
+        </p:nvSpPr>
+        <p:spPr>
+          <a:xfrm>
+            <a:off x="6473952" y="3401568"/>
+            <a:ext cx="1499616" cy="457200"/>
+          </a:xfrm>
+          <a:prstGeom prst="rect">
+            <a:avLst/>
+          </a:prstGeom>
+          <a:noFill/>
+          <a:ln/>
+        </p:spPr>
+        <p:txBody>
+          <a:bodyPr wrap="square" lIns="0" tIns="0" rIns="0" bIns="0" rtlCol="0" anchor="ctr"/>
           <a:lstStyle/>
           <a:p>
             <a:pPr algn="ctr" indent="0" marL="0">
               <a:buNone/>
             </a:pPr>
             <a:r>
-              <a:rPr lang="en-US" sz="1050" dirty="0">
+              <a:rPr lang="en-US" sz="900" dirty="0">
                 <a:solidFill>
                   <a:srgbClr val="626E78"/>
                 </a:solidFill>
@@ -2138,26 +2166,26 @@
               </a:rPr>
               <a:t>nodejs20 ingest</a:t>
             </a:r>
-            <a:endParaRPr lang="en-US" sz="1050" dirty="0"/>
-          </a:p>
-        </p:txBody>
-      </p:sp>
-      <p:sp>
-        <p:nvSpPr>
-          <p:cNvPr id="22" name="Shape 20"/>
-          <p:cNvSpPr/>
-          <p:nvPr/>
-        </p:nvSpPr>
-        <p:spPr>
-          <a:xfrm>
-            <a:off x="7834396" y="3154680"/>
-            <a:ext cx="258409" cy="0"/>
+            <a:endParaRPr lang="en-US" sz="900" dirty="0"/>
+          </a:p>
+        </p:txBody>
+      </p:sp>
+      <p:sp>
+        <p:nvSpPr>
+          <p:cNvPr id="21" name="Shape 19"/>
+          <p:cNvSpPr/>
+          <p:nvPr/>
+        </p:nvSpPr>
+        <p:spPr>
+          <a:xfrm>
+            <a:off x="7964424" y="3337560"/>
+            <a:ext cx="164592" cy="0"/>
           </a:xfrm>
           <a:prstGeom prst="line">
             <a:avLst/>
           </a:prstGeom>
           <a:noFill/>
-          <a:ln w="25400">
+          <a:ln w="20320">
             <a:solidFill>
               <a:srgbClr val="74889A"/>
             </a:solidFill>
@@ -2168,24 +2196,24 @@
       </p:sp>
       <p:sp>
         <p:nvSpPr>
-          <p:cNvPr id="23" name="Shape 21"/>
-          <p:cNvSpPr/>
-          <p:nvPr/>
-        </p:nvSpPr>
-        <p:spPr>
-          <a:xfrm>
-            <a:off x="8111094" y="2468880"/>
-            <a:ext cx="1572768" cy="1371600"/>
+          <p:cNvPr id="22" name="Shape 20"/>
+          <p:cNvSpPr/>
+          <p:nvPr/>
+        </p:nvSpPr>
+        <p:spPr>
+          <a:xfrm>
+            <a:off x="8138160" y="2651760"/>
+            <a:ext cx="1463040" cy="1371600"/>
           </a:xfrm>
           <a:prstGeom prst="roundRect">
             <a:avLst>
-              <a:gd name="adj" fmla="val 6667"/>
+              <a:gd name="adj" fmla="val 5333"/>
             </a:avLst>
           </a:prstGeom>
           <a:solidFill>
-            <a:srgbClr val="EFF2F4"/>
+            <a:srgbClr val="FFFFFF"/>
           </a:solidFill>
-          <a:ln w="19050">
+          <a:ln w="15240">
             <a:solidFill>
               <a:srgbClr val="37474F"/>
             </a:solidFill>
@@ -2195,34 +2223,14 @@
       </p:sp>
       <p:sp>
         <p:nvSpPr>
-          <p:cNvPr id="24" name="Shape 22"/>
-          <p:cNvSpPr/>
-          <p:nvPr/>
-        </p:nvSpPr>
-        <p:spPr>
-          <a:xfrm>
-            <a:off x="8796894" y="2670048"/>
-            <a:ext cx="201168" cy="201168"/>
-          </a:xfrm>
-          <a:prstGeom prst="ellipse">
-            <a:avLst/>
-          </a:prstGeom>
-          <a:solidFill>
-            <a:srgbClr val="37474F"/>
-          </a:solidFill>
-          <a:ln/>
-        </p:spPr>
-      </p:sp>
-      <p:sp>
-        <p:nvSpPr>
-          <p:cNvPr id="25" name="Text 23"/>
-          <p:cNvSpPr/>
-          <p:nvPr/>
-        </p:nvSpPr>
-        <p:spPr>
-          <a:xfrm>
-            <a:off x="8065374" y="2926080"/>
-            <a:ext cx="1664208" cy="411480"/>
+          <p:cNvPr id="23" name="Text 21"/>
+          <p:cNvSpPr/>
+          <p:nvPr/>
+        </p:nvSpPr>
+        <p:spPr>
+          <a:xfrm>
+            <a:off x="8092440" y="2907792"/>
+            <a:ext cx="1554480" cy="457200"/>
           </a:xfrm>
           <a:prstGeom prst="rect">
             <a:avLst/>
@@ -2238,7 +2246,7 @@
               <a:buNone/>
             </a:pPr>
             <a:r>
-              <a:rPr lang="en-US" sz="1450" b="1" dirty="0">
+              <a:rPr lang="en-US" sz="1250" b="1" dirty="0">
                 <a:solidFill>
                   <a:srgbClr val="1F272D"/>
                 </a:solidFill>
@@ -2248,36 +2256,36 @@
               </a:rPr>
               <a:t>DynamoDB</a:t>
             </a:r>
-            <a:endParaRPr lang="en-US" sz="1450" dirty="0"/>
-          </a:p>
-        </p:txBody>
-      </p:sp>
-      <p:sp>
-        <p:nvSpPr>
-          <p:cNvPr id="26" name="Text 24"/>
-          <p:cNvSpPr/>
-          <p:nvPr/>
-        </p:nvSpPr>
-        <p:spPr>
-          <a:xfrm>
-            <a:off x="8092806" y="3310128"/>
-            <a:ext cx="1609344" cy="457200"/>
-          </a:xfrm>
-          <a:prstGeom prst="rect">
-            <a:avLst/>
-          </a:prstGeom>
-          <a:noFill/>
-          <a:ln/>
-        </p:spPr>
-        <p:txBody>
-          <a:bodyPr wrap="square" lIns="0" tIns="0" rIns="0" bIns="0" rtlCol="0" anchor="t"/>
+            <a:endParaRPr lang="en-US" sz="1250" dirty="0"/>
+          </a:p>
+        </p:txBody>
+      </p:sp>
+      <p:sp>
+        <p:nvSpPr>
+          <p:cNvPr id="24" name="Text 22"/>
+          <p:cNvSpPr/>
+          <p:nvPr/>
+        </p:nvSpPr>
+        <p:spPr>
+          <a:xfrm>
+            <a:off x="8119872" y="3401568"/>
+            <a:ext cx="1499616" cy="457200"/>
+          </a:xfrm>
+          <a:prstGeom prst="rect">
+            <a:avLst/>
+          </a:prstGeom>
+          <a:noFill/>
+          <a:ln/>
+        </p:spPr>
+        <p:txBody>
+          <a:bodyPr wrap="square" lIns="0" tIns="0" rIns="0" bIns="0" rtlCol="0" anchor="ctr"/>
           <a:lstStyle/>
           <a:p>
             <a:pPr algn="ctr" indent="0" marL="0">
               <a:buNone/>
             </a:pPr>
             <a:r>
-              <a:rPr lang="en-US" sz="1050" dirty="0">
+              <a:rPr lang="en-US" sz="900" dirty="0">
                 <a:solidFill>
                   <a:srgbClr val="626E78"/>
                 </a:solidFill>
@@ -2287,26 +2295,26 @@
               </a:rPr>
               <a:t>window store</a:t>
             </a:r>
-            <a:endParaRPr lang="en-US" sz="1050" dirty="0"/>
-          </a:p>
-        </p:txBody>
-      </p:sp>
-      <p:sp>
-        <p:nvSpPr>
-          <p:cNvPr id="27" name="Shape 25"/>
-          <p:cNvSpPr/>
-          <p:nvPr/>
-        </p:nvSpPr>
-        <p:spPr>
-          <a:xfrm>
-            <a:off x="9702150" y="3154680"/>
-            <a:ext cx="258409" cy="0"/>
+            <a:endParaRPr lang="en-US" sz="900" dirty="0"/>
+          </a:p>
+        </p:txBody>
+      </p:sp>
+      <p:sp>
+        <p:nvSpPr>
+          <p:cNvPr id="25" name="Shape 23"/>
+          <p:cNvSpPr/>
+          <p:nvPr/>
+        </p:nvSpPr>
+        <p:spPr>
+          <a:xfrm>
+            <a:off x="9610344" y="3337560"/>
+            <a:ext cx="164592" cy="0"/>
           </a:xfrm>
           <a:prstGeom prst="line">
             <a:avLst/>
           </a:prstGeom>
           <a:noFill/>
-          <a:ln w="25400">
+          <a:ln w="20320">
             <a:solidFill>
               <a:srgbClr val="74889A"/>
             </a:solidFill>
@@ -2317,24 +2325,24 @@
       </p:sp>
       <p:sp>
         <p:nvSpPr>
-          <p:cNvPr id="28" name="Shape 26"/>
-          <p:cNvSpPr/>
-          <p:nvPr/>
-        </p:nvSpPr>
-        <p:spPr>
-          <a:xfrm>
-            <a:off x="9978847" y="2468880"/>
-            <a:ext cx="1572768" cy="1371600"/>
+          <p:cNvPr id="26" name="Shape 24"/>
+          <p:cNvSpPr/>
+          <p:nvPr/>
+        </p:nvSpPr>
+        <p:spPr>
+          <a:xfrm>
+            <a:off x="9784080" y="2651760"/>
+            <a:ext cx="1463040" cy="1371600"/>
           </a:xfrm>
           <a:prstGeom prst="roundRect">
             <a:avLst>
-              <a:gd name="adj" fmla="val 6667"/>
+              <a:gd name="adj" fmla="val 5333"/>
             </a:avLst>
           </a:prstGeom>
           <a:solidFill>
-            <a:srgbClr val="EFF2F4"/>
+            <a:srgbClr val="FFFFFF"/>
           </a:solidFill>
-          <a:ln w="19050">
+          <a:ln w="15240">
             <a:solidFill>
               <a:srgbClr val="4E6270"/>
             </a:solidFill>
@@ -2344,34 +2352,14 @@
       </p:sp>
       <p:sp>
         <p:nvSpPr>
-          <p:cNvPr id="29" name="Shape 27"/>
-          <p:cNvSpPr/>
-          <p:nvPr/>
-        </p:nvSpPr>
-        <p:spPr>
-          <a:xfrm>
-            <a:off x="10664647" y="2670048"/>
-            <a:ext cx="201168" cy="201168"/>
-          </a:xfrm>
-          <a:prstGeom prst="ellipse">
-            <a:avLst/>
-          </a:prstGeom>
-          <a:solidFill>
-            <a:srgbClr val="4E6270"/>
-          </a:solidFill>
-          <a:ln/>
-        </p:spPr>
-      </p:sp>
-      <p:sp>
-        <p:nvSpPr>
-          <p:cNvPr id="30" name="Text 28"/>
-          <p:cNvSpPr/>
-          <p:nvPr/>
-        </p:nvSpPr>
-        <p:spPr>
-          <a:xfrm>
-            <a:off x="9933127" y="2926080"/>
-            <a:ext cx="1664208" cy="411480"/>
+          <p:cNvPr id="27" name="Text 25"/>
+          <p:cNvSpPr/>
+          <p:nvPr/>
+        </p:nvSpPr>
+        <p:spPr>
+          <a:xfrm>
+            <a:off x="9738360" y="2907792"/>
+            <a:ext cx="1554480" cy="457200"/>
           </a:xfrm>
           <a:prstGeom prst="rect">
             <a:avLst/>
@@ -2387,7 +2375,7 @@
               <a:buNone/>
             </a:pPr>
             <a:r>
-              <a:rPr lang="en-US" sz="1450" b="1" dirty="0">
+              <a:rPr lang="en-US" sz="1250" b="1" dirty="0">
                 <a:solidFill>
                   <a:srgbClr val="1F272D"/>
                 </a:solidFill>
@@ -2397,36 +2385,36 @@
               </a:rPr>
               <a:t>API GW + S3</a:t>
             </a:r>
-            <a:endParaRPr lang="en-US" sz="1450" dirty="0"/>
-          </a:p>
-        </p:txBody>
-      </p:sp>
-      <p:sp>
-        <p:nvSpPr>
-          <p:cNvPr id="31" name="Text 29"/>
-          <p:cNvSpPr/>
-          <p:nvPr/>
-        </p:nvSpPr>
-        <p:spPr>
-          <a:xfrm>
-            <a:off x="9960559" y="3310128"/>
-            <a:ext cx="1609344" cy="457200"/>
-          </a:xfrm>
-          <a:prstGeom prst="rect">
-            <a:avLst/>
-          </a:prstGeom>
-          <a:noFill/>
-          <a:ln/>
-        </p:spPr>
-        <p:txBody>
-          <a:bodyPr wrap="square" lIns="0" tIns="0" rIns="0" bIns="0" rtlCol="0" anchor="t"/>
+            <a:endParaRPr lang="en-US" sz="1250" dirty="0"/>
+          </a:p>
+        </p:txBody>
+      </p:sp>
+      <p:sp>
+        <p:nvSpPr>
+          <p:cNvPr id="28" name="Text 26"/>
+          <p:cNvSpPr/>
+          <p:nvPr/>
+        </p:nvSpPr>
+        <p:spPr>
+          <a:xfrm>
+            <a:off x="9765792" y="3401568"/>
+            <a:ext cx="1499616" cy="457200"/>
+          </a:xfrm>
+          <a:prstGeom prst="rect">
+            <a:avLst/>
+          </a:prstGeom>
+          <a:noFill/>
+          <a:ln/>
+        </p:spPr>
+        <p:txBody>
+          <a:bodyPr wrap="square" lIns="0" tIns="0" rIns="0" bIns="0" rtlCol="0" anchor="ctr"/>
           <a:lstStyle/>
           <a:p>
             <a:pPr algn="ctr" indent="0" marL="0">
               <a:buNone/>
             </a:pPr>
             <a:r>
-              <a:rPr lang="en-US" sz="1050" dirty="0">
+              <a:rPr lang="en-US" sz="900" dirty="0">
                 <a:solidFill>
                   <a:srgbClr val="626E78"/>
                 </a:solidFill>
@@ -2436,98 +2424,20 @@
               </a:rPr>
               <a:t>fleet dashboard</a:t>
             </a:r>
-            <a:endParaRPr lang="en-US" sz="1050" dirty="0"/>
-          </a:p>
-        </p:txBody>
-      </p:sp>
-      <p:sp>
-        <p:nvSpPr>
-          <p:cNvPr id="32" name="Text 30"/>
-          <p:cNvSpPr/>
-          <p:nvPr/>
-        </p:nvSpPr>
-        <p:spPr>
-          <a:xfrm>
-            <a:off x="640080" y="3977640"/>
-            <a:ext cx="3440521" cy="274320"/>
-          </a:xfrm>
-          <a:prstGeom prst="rect">
-            <a:avLst/>
-          </a:prstGeom>
-          <a:noFill/>
-          <a:ln/>
-        </p:spPr>
-        <p:txBody>
-          <a:bodyPr wrap="square" rtlCol="0" anchor="ctr"/>
-          <a:lstStyle/>
-          <a:p>
-            <a:pPr algn="ctr" indent="0" marL="0">
-              <a:buNone/>
-            </a:pPr>
-            <a:r>
-              <a:rPr lang="en-US" sz="1100" b="1" spc="200" kern="0" dirty="0">
-                <a:solidFill>
-                  <a:srgbClr val="74889A"/>
-                </a:solidFill>
-                <a:latin typeface="Calibri" pitchFamily="34" charset="0"/>
-                <a:ea typeface="Calibri" pitchFamily="34" charset="-122"/>
-                <a:cs typeface="Calibri" pitchFamily="34" charset="-120"/>
-              </a:rPr>
-              <a:t>EDGE</a:t>
-            </a:r>
-            <a:endParaRPr lang="en-US" sz="1100" dirty="0"/>
-          </a:p>
-        </p:txBody>
-      </p:sp>
-      <p:sp>
-        <p:nvSpPr>
-          <p:cNvPr id="33" name="Text 31"/>
-          <p:cNvSpPr/>
-          <p:nvPr/>
-        </p:nvSpPr>
-        <p:spPr>
-          <a:xfrm>
-            <a:off x="4375587" y="3977640"/>
-            <a:ext cx="7176028" cy="274320"/>
-          </a:xfrm>
-          <a:prstGeom prst="rect">
-            <a:avLst/>
-          </a:prstGeom>
-          <a:noFill/>
-          <a:ln/>
-        </p:spPr>
-        <p:txBody>
-          <a:bodyPr wrap="square" rtlCol="0" anchor="ctr"/>
-          <a:lstStyle/>
-          <a:p>
-            <a:pPr algn="ctr" indent="0" marL="0">
-              <a:buNone/>
-            </a:pPr>
-            <a:r>
-              <a:rPr lang="en-US" sz="1100" b="1" spc="200" kern="0" dirty="0">
-                <a:solidFill>
-                  <a:srgbClr val="37474F"/>
-                </a:solidFill>
-                <a:latin typeface="Calibri" pitchFamily="34" charset="0"/>
-                <a:ea typeface="Calibri" pitchFamily="34" charset="-122"/>
-                <a:cs typeface="Calibri" pitchFamily="34" charset="-120"/>
-              </a:rPr>
-              <a:t>CLOUD</a:t>
-            </a:r>
-            <a:endParaRPr lang="en-US" sz="1100" dirty="0"/>
-          </a:p>
-        </p:txBody>
-      </p:sp>
-      <p:sp>
-        <p:nvSpPr>
-          <p:cNvPr id="34" name="Text 32"/>
-          <p:cNvSpPr/>
-          <p:nvPr/>
-        </p:nvSpPr>
-        <p:spPr>
-          <a:xfrm>
-            <a:off x="640080" y="5212080"/>
-            <a:ext cx="10972800" cy="640080"/>
+            <a:endParaRPr lang="en-US" sz="900" dirty="0"/>
+          </a:p>
+        </p:txBody>
+      </p:sp>
+      <p:sp>
+        <p:nvSpPr>
+          <p:cNvPr id="29" name="Text 27"/>
+          <p:cNvSpPr/>
+          <p:nvPr/>
+        </p:nvSpPr>
+        <p:spPr>
+          <a:xfrm>
+            <a:off x="640080" y="5257800"/>
+            <a:ext cx="10972800" cy="731520"/>
           </a:xfrm>
           <a:prstGeom prst="rect">
             <a:avLst/>
@@ -2669,34 +2579,14 @@
       </p:sp>
       <p:sp>
         <p:nvSpPr>
-          <p:cNvPr id="4" name="Shape 2"/>
-          <p:cNvSpPr/>
-          <p:nvPr/>
-        </p:nvSpPr>
-        <p:spPr>
-          <a:xfrm>
-            <a:off x="731520" y="1965960"/>
-            <a:ext cx="685800" cy="685800"/>
-          </a:xfrm>
-          <a:prstGeom prst="ellipse">
-            <a:avLst/>
-          </a:prstGeom>
-          <a:solidFill>
-            <a:srgbClr val="37474F"/>
-          </a:solidFill>
-          <a:ln/>
-        </p:spPr>
-      </p:sp>
-      <p:sp>
-        <p:nvSpPr>
-          <p:cNvPr id="5" name="Text 3"/>
-          <p:cNvSpPr/>
-          <p:nvPr/>
-        </p:nvSpPr>
-        <p:spPr>
-          <a:xfrm>
-            <a:off x="731520" y="1965960"/>
-            <a:ext cx="685800" cy="685800"/>
+          <p:cNvPr id="4" name="Text 2"/>
+          <p:cNvSpPr/>
+          <p:nvPr/>
+        </p:nvSpPr>
+        <p:spPr>
+          <a:xfrm>
+            <a:off x="640080" y="1737360"/>
+            <a:ext cx="1097280" cy="1097280"/>
           </a:xfrm>
           <a:prstGeom prst="rect">
             <a:avLst/>
@@ -2708,13 +2598,13 @@
           <a:bodyPr wrap="square" lIns="0" tIns="0" rIns="0" bIns="0" rtlCol="0" anchor="ctr"/>
           <a:lstStyle/>
           <a:p>
-            <a:pPr algn="ctr" indent="0" marL="0">
-              <a:buNone/>
-            </a:pPr>
-            <a:r>
-              <a:rPr lang="en-US" sz="2600" b="1" dirty="0">
-                <a:solidFill>
-                  <a:srgbClr val="FFFFFF"/>
+            <a:pPr indent="0" marL="0">
+              <a:buNone/>
+            </a:pPr>
+            <a:r>
+              <a:rPr lang="en-US" sz="5400" b="1" dirty="0">
+                <a:solidFill>
+                  <a:srgbClr val="EFF2F4"/>
                 </a:solidFill>
                 <a:latin typeface="Century Schoolbook" pitchFamily="34" charset="0"/>
                 <a:ea typeface="Century Schoolbook" pitchFamily="34" charset="-122"/>
@@ -2722,9 +2612,32 @@
               </a:rPr>
               <a:t>1</a:t>
             </a:r>
-            <a:endParaRPr lang="en-US" sz="2600" dirty="0"/>
-          </a:p>
-        </p:txBody>
+            <a:endParaRPr lang="en-US" sz="5400" dirty="0"/>
+          </a:p>
+        </p:txBody>
+      </p:sp>
+      <p:sp>
+        <p:nvSpPr>
+          <p:cNvPr id="5" name="Shape 3"/>
+          <p:cNvSpPr/>
+          <p:nvPr/>
+        </p:nvSpPr>
+        <p:spPr>
+          <a:xfrm>
+            <a:off x="1828800" y="1920240"/>
+            <a:ext cx="0" cy="1051560"/>
+          </a:xfrm>
+          <a:prstGeom prst="line">
+            <a:avLst/>
+          </a:prstGeom>
+          <a:noFill/>
+          <a:ln w="25400">
+            <a:solidFill>
+              <a:srgbClr val="4E6270"/>
+            </a:solidFill>
+            <a:prstDash val="solid"/>
+          </a:ln>
+        </p:spPr>
       </p:sp>
       <p:sp>
         <p:nvSpPr>
@@ -2734,8 +2647,8 @@
         </p:nvSpPr>
         <p:spPr>
           <a:xfrm>
-            <a:off x="1691640" y="1920240"/>
-            <a:ext cx="9875520" cy="411480"/>
+            <a:off x="2057400" y="1874520"/>
+            <a:ext cx="9509760" cy="411480"/>
           </a:xfrm>
           <a:prstGeom prst="rect">
             <a:avLst/>
@@ -2759,7 +2672,7 @@
                 <a:ea typeface="Calibri" pitchFamily="34" charset="-122"/>
                 <a:cs typeface="Calibri" pitchFamily="34" charset="-120"/>
               </a:rPr>
-              <a:t>Pipeline health, all green</a:t>
+              <a:t>A meter card per signal, per tower</a:t>
             </a:r>
             <a:endParaRPr lang="en-US" sz="1800" dirty="0"/>
           </a:p>
@@ -2773,8 +2686,8 @@
         </p:nvSpPr>
         <p:spPr>
           <a:xfrm>
-            <a:off x="1691640" y="2340864"/>
-            <a:ext cx="9875520" cy="640080"/>
+            <a:off x="2057400" y="2313432"/>
+            <a:ext cx="9509760" cy="822960"/>
           </a:xfrm>
           <a:prstGeom prst="rect">
             <a:avLst/>
@@ -2798,7 +2711,7 @@
                 <a:ea typeface="Calibri" pitchFamily="34" charset="-122"/>
                 <a:cs typeface="Calibri" pitchFamily="34" charset="-120"/>
               </a:rPr>
-              <a:t>Gateway, queue, Lambda and pipeline all green on the live deployment.</a:t>
+              <a:t>Motor temperature, door cycles, cab vibration, load weight and travel speed live for both towers with native meter bars.</a:t>
             </a:r>
             <a:endParaRPr lang="en-US" sz="1350" dirty="0"/>
           </a:p>
@@ -2806,34 +2719,14 @@
       </p:sp>
       <p:sp>
         <p:nvSpPr>
-          <p:cNvPr id="8" name="Shape 6"/>
-          <p:cNvSpPr/>
-          <p:nvPr/>
-        </p:nvSpPr>
-        <p:spPr>
-          <a:xfrm>
-            <a:off x="731520" y="3383280"/>
-            <a:ext cx="685800" cy="685800"/>
-          </a:xfrm>
-          <a:prstGeom prst="ellipse">
-            <a:avLst/>
-          </a:prstGeom>
-          <a:solidFill>
-            <a:srgbClr val="37474F"/>
-          </a:solidFill>
-          <a:ln/>
-        </p:spPr>
-      </p:sp>
-      <p:sp>
-        <p:nvSpPr>
-          <p:cNvPr id="9" name="Text 7"/>
-          <p:cNvSpPr/>
-          <p:nvPr/>
-        </p:nvSpPr>
-        <p:spPr>
-          <a:xfrm>
-            <a:off x="731520" y="3383280"/>
-            <a:ext cx="685800" cy="685800"/>
+          <p:cNvPr id="8" name="Text 6"/>
+          <p:cNvSpPr/>
+          <p:nvPr/>
+        </p:nvSpPr>
+        <p:spPr>
+          <a:xfrm>
+            <a:off x="640080" y="3200400"/>
+            <a:ext cx="1097280" cy="1097280"/>
           </a:xfrm>
           <a:prstGeom prst="rect">
             <a:avLst/>
@@ -2845,13 +2738,13 @@
           <a:bodyPr wrap="square" lIns="0" tIns="0" rIns="0" bIns="0" rtlCol="0" anchor="ctr"/>
           <a:lstStyle/>
           <a:p>
-            <a:pPr algn="ctr" indent="0" marL="0">
-              <a:buNone/>
-            </a:pPr>
-            <a:r>
-              <a:rPr lang="en-US" sz="2600" b="1" dirty="0">
-                <a:solidFill>
-                  <a:srgbClr val="FFFFFF"/>
+            <a:pPr indent="0" marL="0">
+              <a:buNone/>
+            </a:pPr>
+            <a:r>
+              <a:rPr lang="en-US" sz="5400" b="1" dirty="0">
+                <a:solidFill>
+                  <a:srgbClr val="EFF2F4"/>
                 </a:solidFill>
                 <a:latin typeface="Century Schoolbook" pitchFamily="34" charset="0"/>
                 <a:ea typeface="Century Schoolbook" pitchFamily="34" charset="-122"/>
@@ -2859,9 +2752,32 @@
               </a:rPr>
               <a:t>2</a:t>
             </a:r>
-            <a:endParaRPr lang="en-US" sz="2600" dirty="0"/>
-          </a:p>
-        </p:txBody>
+            <a:endParaRPr lang="en-US" sz="5400" dirty="0"/>
+          </a:p>
+        </p:txBody>
+      </p:sp>
+      <p:sp>
+        <p:nvSpPr>
+          <p:cNvPr id="9" name="Shape 7"/>
+          <p:cNvSpPr/>
+          <p:nvPr/>
+        </p:nvSpPr>
+        <p:spPr>
+          <a:xfrm>
+            <a:off x="1828800" y="3383280"/>
+            <a:ext cx="0" cy="1051560"/>
+          </a:xfrm>
+          <a:prstGeom prst="line">
+            <a:avLst/>
+          </a:prstGeom>
+          <a:noFill/>
+          <a:ln w="25400">
+            <a:solidFill>
+              <a:srgbClr val="4E6270"/>
+            </a:solidFill>
+            <a:prstDash val="solid"/>
+          </a:ln>
+        </p:spPr>
       </p:sp>
       <p:sp>
         <p:nvSpPr>
@@ -2871,8 +2787,8 @@
         </p:nvSpPr>
         <p:spPr>
           <a:xfrm>
-            <a:off x="1691640" y="3337560"/>
-            <a:ext cx="9875520" cy="411480"/>
+            <a:off x="2057400" y="3337560"/>
+            <a:ext cx="9509760" cy="411480"/>
           </a:xfrm>
           <a:prstGeom prst="rect">
             <a:avLst/>
@@ -2896,7 +2812,7 @@
                 <a:ea typeface="Calibri" pitchFamily="34" charset="-122"/>
                 <a:cs typeface="Calibri" pitchFamily="34" charset="-120"/>
               </a:rPr>
-              <a:t>Both towers, live</a:t>
+              <a:t>Two faults at opposite ends of time</a:t>
             </a:r>
             <a:endParaRPr lang="en-US" sz="1800" dirty="0"/>
           </a:p>
@@ -2910,8 +2826,8 @@
         </p:nvSpPr>
         <p:spPr>
           <a:xfrm>
-            <a:off x="1691640" y="3758184"/>
-            <a:ext cx="9875520" cy="640080"/>
+            <a:off x="2057400" y="3776472"/>
+            <a:ext cx="9509760" cy="822960"/>
           </a:xfrm>
           <a:prstGeom prst="rect">
             <a:avLst/>
@@ -2935,7 +2851,7 @@
                 <a:ea typeface="Calibri" pitchFamily="34" charset="-122"/>
                 <a:cs typeface="Calibri" pitchFamily="34" charset="-120"/>
               </a:rPr>
-              <a:t>Five signals per tower, with one tower alerting on a ride-quality fault and an overload warning at once.</a:t>
+              <a:t>Tower-B is firing a ride-quality fault (a drift, read on the average) and an overload warning (an instant, read on the peak) at once.</a:t>
             </a:r>
             <a:endParaRPr lang="en-US" sz="1350" dirty="0"/>
           </a:p>
@@ -2943,34 +2859,14 @@
       </p:sp>
       <p:sp>
         <p:nvSpPr>
-          <p:cNvPr id="12" name="Shape 10"/>
-          <p:cNvSpPr/>
-          <p:nvPr/>
-        </p:nvSpPr>
-        <p:spPr>
-          <a:xfrm>
-            <a:off x="731520" y="4800600"/>
-            <a:ext cx="685800" cy="685800"/>
-          </a:xfrm>
-          <a:prstGeom prst="ellipse">
-            <a:avLst/>
-          </a:prstGeom>
-          <a:solidFill>
-            <a:srgbClr val="37474F"/>
-          </a:solidFill>
-          <a:ln/>
-        </p:spPr>
-      </p:sp>
-      <p:sp>
-        <p:nvSpPr>
-          <p:cNvPr id="13" name="Text 11"/>
-          <p:cNvSpPr/>
-          <p:nvPr/>
-        </p:nvSpPr>
-        <p:spPr>
-          <a:xfrm>
-            <a:off x="731520" y="4800600"/>
-            <a:ext cx="685800" cy="685800"/>
+          <p:cNvPr id="12" name="Text 10"/>
+          <p:cNvSpPr/>
+          <p:nvPr/>
+        </p:nvSpPr>
+        <p:spPr>
+          <a:xfrm>
+            <a:off x="640080" y="4663440"/>
+            <a:ext cx="1097280" cy="1097280"/>
           </a:xfrm>
           <a:prstGeom prst="rect">
             <a:avLst/>
@@ -2982,13 +2878,13 @@
           <a:bodyPr wrap="square" lIns="0" tIns="0" rIns="0" bIns="0" rtlCol="0" anchor="ctr"/>
           <a:lstStyle/>
           <a:p>
-            <a:pPr algn="ctr" indent="0" marL="0">
-              <a:buNone/>
-            </a:pPr>
-            <a:r>
-              <a:rPr lang="en-US" sz="2600" b="1" dirty="0">
-                <a:solidFill>
-                  <a:srgbClr val="FFFFFF"/>
+            <a:pPr indent="0" marL="0">
+              <a:buNone/>
+            </a:pPr>
+            <a:r>
+              <a:rPr lang="en-US" sz="5400" b="1" dirty="0">
+                <a:solidFill>
+                  <a:srgbClr val="EFF2F4"/>
                 </a:solidFill>
                 <a:latin typeface="Century Schoolbook" pitchFamily="34" charset="0"/>
                 <a:ea typeface="Century Schoolbook" pitchFamily="34" charset="-122"/>
@@ -2996,9 +2892,32 @@
               </a:rPr>
               <a:t>3</a:t>
             </a:r>
-            <a:endParaRPr lang="en-US" sz="2600" dirty="0"/>
-          </a:p>
-        </p:txBody>
+            <a:endParaRPr lang="en-US" sz="5400" dirty="0"/>
+          </a:p>
+        </p:txBody>
+      </p:sp>
+      <p:sp>
+        <p:nvSpPr>
+          <p:cNvPr id="13" name="Shape 11"/>
+          <p:cNvSpPr/>
+          <p:nvPr/>
+        </p:nvSpPr>
+        <p:spPr>
+          <a:xfrm>
+            <a:off x="1828800" y="4846320"/>
+            <a:ext cx="0" cy="1051560"/>
+          </a:xfrm>
+          <a:prstGeom prst="line">
+            <a:avLst/>
+          </a:prstGeom>
+          <a:noFill/>
+          <a:ln w="25400">
+            <a:solidFill>
+              <a:srgbClr val="4E6270"/>
+            </a:solidFill>
+            <a:prstDash val="solid"/>
+          </a:ln>
+        </p:spPr>
       </p:sp>
       <p:sp>
         <p:nvSpPr>
@@ -3008,8 +2927,8 @@
         </p:nvSpPr>
         <p:spPr>
           <a:xfrm>
-            <a:off x="1691640" y="4754880"/>
-            <a:ext cx="9875520" cy="411480"/>
+            <a:off x="2057400" y="4800600"/>
+            <a:ext cx="9509760" cy="411480"/>
           </a:xfrm>
           <a:prstGeom prst="rect">
             <a:avLst/>
@@ -3033,7 +2952,7 @@
                 <a:ea typeface="Calibri" pitchFamily="34" charset="-122"/>
                 <a:cs typeface="Calibri" pitchFamily="34" charset="-120"/>
               </a:rPr>
-              <a:t>Tested and scales</a:t>
+              <a:t>Window-average trend charts</a:t>
             </a:r>
             <a:endParaRPr lang="en-US" sz="1800" dirty="0"/>
           </a:p>
@@ -3047,8 +2966,8 @@
         </p:nvSpPr>
         <p:spPr>
           <a:xfrm>
-            <a:off x="1691640" y="5175504"/>
-            <a:ext cx="9875520" cy="640080"/>
+            <a:off x="2057400" y="5239512"/>
+            <a:ext cx="9509760" cy="822960"/>
           </a:xfrm>
           <a:prstGeom prst="rect">
             <a:avLst/>
@@ -3072,7 +2991,7 @@
                 <a:ea typeface="Calibri" pitchFamily="34" charset="-122"/>
                 <a:cs typeface="Calibri" pitchFamily="34" charset="-120"/>
               </a:rPr>
-              <a:t>122 automated tests pass across sensor, fog, processor and dashboard; a 2,000-message burst from 32 senders absorbed and drained.</a:t>
+              <a:t>Five trend charts run per tower, so a slowly overheating motor is visible on the trend well before it alarms.</a:t>
             </a:r>
             <a:endParaRPr lang="en-US" sz="1350" dirty="0"/>
           </a:p>
@@ -3086,7 +3005,7 @@
         </p:nvSpPr>
         <p:spPr>
           <a:xfrm>
-            <a:off x="640080" y="6263640"/>
+            <a:off x="640080" y="6309360"/>
             <a:ext cx="10972800" cy="365760"/>
           </a:xfrm>
           <a:prstGeom prst="rect">
@@ -3157,24 +3076,24 @@
         </p:nvSpPr>
         <p:spPr>
           <a:xfrm>
-            <a:off x="640080" y="640080"/>
-            <a:ext cx="10972800" cy="640080"/>
-          </a:xfrm>
-          <a:prstGeom prst="rect">
-            <a:avLst/>
-          </a:prstGeom>
-          <a:noFill/>
-          <a:ln/>
-        </p:spPr>
-        <p:txBody>
-          <a:bodyPr wrap="square" rtlCol="0" anchor="ctr"/>
+            <a:off x="640080" y="594360"/>
+            <a:ext cx="10972800" cy="822960"/>
+          </a:xfrm>
+          <a:prstGeom prst="rect">
+            <a:avLst/>
+          </a:prstGeom>
+          <a:noFill/>
+          <a:ln/>
+        </p:spPr>
+        <p:txBody>
+          <a:bodyPr wrap="square" rtlCol="0" anchor="t"/>
           <a:lstStyle/>
           <a:p>
             <a:pPr indent="0" marL="0">
               <a:buNone/>
             </a:pPr>
             <a:r>
-              <a:rPr lang="en-US" sz="3000" b="1" dirty="0">
+              <a:rPr lang="en-US" sz="2800" b="1" dirty="0">
                 <a:solidFill>
                   <a:srgbClr val="FFFFFF"/>
                 </a:solidFill>
@@ -3184,7 +3103,7 @@
               </a:rPr>
               <a:t>Hardest Part — peak or trend</a:t>
             </a:r>
-            <a:endParaRPr lang="en-US" sz="3000" dirty="0"/>
+            <a:endParaRPr lang="en-US" sz="2800" dirty="0"/>
           </a:p>
         </p:txBody>
       </p:sp>

--- a/ppt/RasoolBashaDurbesula_X24205478_elevator-escalator-fleet-monitoring.pptx
+++ b/ppt/RasoolBashaDurbesula_X24205478_elevator-escalator-fleet-monitoring.pptx
@@ -3050,7 +3050,7 @@
     <p:bg>
       <p:bgPr>
         <a:solidFill>
-          <a:srgbClr val="222A30"/>
+          <a:srgbClr val="FFFFFF"/>
         </a:solidFill>
       </p:bgPr>
     </p:bg>
@@ -3076,7 +3076,7 @@
         </p:nvSpPr>
         <p:spPr>
           <a:xfrm>
-            <a:off x="640080" y="594360"/>
+            <a:off x="640080" y="502920"/>
             <a:ext cx="10972800" cy="822960"/>
           </a:xfrm>
           <a:prstGeom prst="rect">
@@ -3095,7 +3095,7 @@
             <a:r>
               <a:rPr lang="en-US" sz="2800" b="1" dirty="0">
                 <a:solidFill>
-                  <a:srgbClr val="FFFFFF"/>
+                  <a:srgbClr val="1F272D"/>
                 </a:solidFill>
                 <a:latin typeface="Century Schoolbook" pitchFamily="34" charset="0"/>
                 <a:ea typeface="Century Schoolbook" pitchFamily="34" charset="-122"/>
@@ -3124,9 +3124,9 @@
             </a:avLst>
           </a:prstGeom>
           <a:solidFill>
-            <a:srgbClr val="2E3941"/>
+            <a:srgbClr val="EFF2F4"/>
           </a:solidFill>
-          <a:ln w="15875">
+          <a:ln w="19050">
             <a:solidFill>
               <a:srgbClr val="F0A500"/>
             </a:solidFill>
@@ -3203,7 +3203,7 @@
             <a:r>
               <a:rPr lang="en-US" sz="1300" dirty="0">
                 <a:solidFill>
-                  <a:srgbClr val="D3DBE0"/>
+                  <a:srgbClr val="1F272D"/>
                 </a:solidFill>
                 <a:latin typeface="Calibri" pitchFamily="34" charset="0"/>
                 <a:ea typeface="Calibri" pitchFamily="34" charset="-122"/>
@@ -3232,11 +3232,11 @@
             </a:avLst>
           </a:prstGeom>
           <a:solidFill>
-            <a:srgbClr val="2E3941"/>
+            <a:srgbClr val="EFF2F4"/>
           </a:solidFill>
-          <a:ln w="15875">
+          <a:ln w="19050">
             <a:solidFill>
-              <a:srgbClr val="74889A"/>
+              <a:srgbClr val="4E6270"/>
             </a:solidFill>
             <a:prstDash val="solid"/>
           </a:ln>
@@ -3269,7 +3269,7 @@
             <a:r>
               <a:rPr lang="en-US" sz="1900" b="1" dirty="0">
                 <a:solidFill>
-                  <a:srgbClr val="74889A"/>
+                  <a:srgbClr val="4E6270"/>
                 </a:solidFill>
                 <a:latin typeface="Century Schoolbook" pitchFamily="34" charset="0"/>
                 <a:ea typeface="Century Schoolbook" pitchFamily="34" charset="-122"/>
@@ -3311,7 +3311,7 @@
             <a:r>
               <a:rPr lang="en-US" sz="1300" dirty="0">
                 <a:solidFill>
-                  <a:srgbClr val="D3DBE0"/>
+                  <a:srgbClr val="1F272D"/>
                 </a:solidFill>
                 <a:latin typeface="Calibri" pitchFamily="34" charset="0"/>
                 <a:ea typeface="Calibri" pitchFamily="34" charset="-122"/>

--- a/ppt/RasoolBashaDurbesula_X24205478_elevator-escalator-fleet-monitoring.pptx
+++ b/ppt/RasoolBashaDurbesula_X24205478_elevator-escalator-fleet-monitoring.pptx
@@ -1578,12 +1578,12 @@
         </p:nvSpPr>
         <p:spPr>
           <a:xfrm>
-            <a:off x="640080" y="1554480"/>
-            <a:ext cx="3200400" cy="3383280"/>
+            <a:off x="640080" y="1874520"/>
+            <a:ext cx="2286000" cy="1280160"/>
           </a:xfrm>
           <a:prstGeom prst="roundRect">
             <a:avLst>
-              <a:gd name="adj" fmla="val 2857"/>
+              <a:gd name="adj" fmla="val 7143"/>
             </a:avLst>
           </a:prstGeom>
           <a:solidFill>
@@ -1599,63 +1599,147 @@
       </p:sp>
       <p:sp>
         <p:nvSpPr>
-          <p:cNvPr id="4" name="Text 2"/>
-          <p:cNvSpPr/>
-          <p:nvPr/>
-        </p:nvSpPr>
-        <p:spPr>
-          <a:xfrm>
-            <a:off x="640080" y="1691640"/>
-            <a:ext cx="3200400" cy="365760"/>
-          </a:xfrm>
-          <a:prstGeom prst="rect">
-            <a:avLst/>
-          </a:prstGeom>
-          <a:noFill/>
-          <a:ln/>
-        </p:spPr>
-        <p:txBody>
-          <a:bodyPr wrap="square" rtlCol="0" anchor="ctr"/>
+          <p:cNvPr id="4" name="Shape 2"/>
+          <p:cNvSpPr/>
+          <p:nvPr/>
+        </p:nvSpPr>
+        <p:spPr>
+          <a:xfrm>
+            <a:off x="1691640" y="2039112"/>
+            <a:ext cx="182880" cy="182880"/>
+          </a:xfrm>
+          <a:prstGeom prst="ellipse">
+            <a:avLst/>
+          </a:prstGeom>
+          <a:solidFill>
+            <a:srgbClr val="74889A"/>
+          </a:solidFill>
+          <a:ln/>
+        </p:spPr>
+      </p:sp>
+      <p:sp>
+        <p:nvSpPr>
+          <p:cNvPr id="5" name="Text 3"/>
+          <p:cNvSpPr/>
+          <p:nvPr/>
+        </p:nvSpPr>
+        <p:spPr>
+          <a:xfrm>
+            <a:off x="612648" y="2258568"/>
+            <a:ext cx="2340864" cy="365760"/>
+          </a:xfrm>
+          <a:prstGeom prst="rect">
+            <a:avLst/>
+          </a:prstGeom>
+          <a:noFill/>
+          <a:ln/>
+        </p:spPr>
+        <p:txBody>
+          <a:bodyPr wrap="square" lIns="0" tIns="0" rIns="0" bIns="0" rtlCol="0" anchor="ctr"/>
           <a:lstStyle/>
           <a:p>
             <a:pPr algn="ctr" indent="0" marL="0">
               <a:buNone/>
             </a:pPr>
             <a:r>
-              <a:rPr lang="en-US" sz="1200" b="1" spc="300" kern="0" dirty="0">
-                <a:solidFill>
-                  <a:srgbClr val="74889A"/>
+              <a:rPr lang="en-US" sz="1450" b="1" dirty="0">
+                <a:solidFill>
+                  <a:srgbClr val="1F272D"/>
                 </a:solidFill>
                 <a:latin typeface="Calibri" pitchFamily="34" charset="0"/>
                 <a:ea typeface="Calibri" pitchFamily="34" charset="-122"/>
                 <a:cs typeface="Calibri" pitchFamily="34" charset="-120"/>
               </a:rPr>
-              <a:t>EDGE</a:t>
-            </a:r>
-            <a:endParaRPr lang="en-US" sz="1200" dirty="0"/>
-          </a:p>
-        </p:txBody>
-      </p:sp>
-      <p:sp>
-        <p:nvSpPr>
-          <p:cNvPr id="5" name="Shape 3"/>
-          <p:cNvSpPr/>
-          <p:nvPr/>
-        </p:nvSpPr>
-        <p:spPr>
-          <a:xfrm>
-            <a:off x="914400" y="2286000"/>
-            <a:ext cx="2651760" cy="1005840"/>
+              <a:t>Cab sensors</a:t>
+            </a:r>
+            <a:endParaRPr lang="en-US" sz="1450" dirty="0"/>
+          </a:p>
+        </p:txBody>
+      </p:sp>
+      <p:sp>
+        <p:nvSpPr>
+          <p:cNvPr id="6" name="Text 4"/>
+          <p:cNvSpPr/>
+          <p:nvPr/>
+        </p:nvSpPr>
+        <p:spPr>
+          <a:xfrm>
+            <a:off x="640080" y="2606040"/>
+            <a:ext cx="2286000" cy="411480"/>
+          </a:xfrm>
+          <a:prstGeom prst="rect">
+            <a:avLst/>
+          </a:prstGeom>
+          <a:noFill/>
+          <a:ln/>
+        </p:spPr>
+        <p:txBody>
+          <a:bodyPr wrap="square" lIns="0" tIns="0" rIns="0" bIns="0" rtlCol="0" anchor="t"/>
+          <a:lstStyle/>
+          <a:p>
+            <a:pPr algn="ctr" indent="0" marL="0">
+              <a:buNone/>
+            </a:pPr>
+            <a:r>
+              <a:rPr lang="en-US" sz="1050" dirty="0">
+                <a:solidFill>
+                  <a:srgbClr val="626E78"/>
+                </a:solidFill>
+                <a:latin typeface="Calibri" pitchFamily="34" charset="0"/>
+                <a:ea typeface="Calibri" pitchFamily="34" charset="-122"/>
+                <a:cs typeface="Calibri" pitchFamily="34" charset="-120"/>
+              </a:rPr>
+              <a:t>10 · 2 towers</a:t>
+            </a:r>
+            <a:endParaRPr lang="en-US" sz="1050" dirty="0"/>
+          </a:p>
+        </p:txBody>
+      </p:sp>
+      <p:sp>
+        <p:nvSpPr>
+          <p:cNvPr id="7" name="Shape 5"/>
+          <p:cNvSpPr/>
+          <p:nvPr/>
+        </p:nvSpPr>
+        <p:spPr>
+          <a:xfrm>
+            <a:off x="2944368" y="2514600"/>
+            <a:ext cx="1975104" cy="0"/>
+          </a:xfrm>
+          <a:prstGeom prst="line">
+            <a:avLst/>
+          </a:prstGeom>
+          <a:noFill/>
+          <a:ln w="25400">
+            <a:solidFill>
+              <a:srgbClr val="74889A"/>
+            </a:solidFill>
+            <a:prstDash val="solid"/>
+            <a:headEnd type="none"/>
+            <a:tailEnd type="triangle"/>
+          </a:ln>
+        </p:spPr>
+      </p:sp>
+      <p:sp>
+        <p:nvSpPr>
+          <p:cNvPr id="8" name="Shape 6"/>
+          <p:cNvSpPr/>
+          <p:nvPr/>
+        </p:nvSpPr>
+        <p:spPr>
+          <a:xfrm>
+            <a:off x="4937760" y="1874520"/>
+            <a:ext cx="2286000" cy="1280160"/>
           </a:xfrm>
           <a:prstGeom prst="roundRect">
             <a:avLst>
-              <a:gd name="adj" fmla="val 7273"/>
+              <a:gd name="adj" fmla="val 7143"/>
             </a:avLst>
           </a:prstGeom>
           <a:solidFill>
-            <a:srgbClr val="FFFFFF"/>
+            <a:srgbClr val="EFF2F4"/>
           </a:solidFill>
-          <a:ln w="15240">
+          <a:ln w="19050">
             <a:solidFill>
               <a:srgbClr val="74889A"/>
             </a:solidFill>
@@ -1665,14 +1749,34 @@
       </p:sp>
       <p:sp>
         <p:nvSpPr>
-          <p:cNvPr id="6" name="Text 4"/>
-          <p:cNvSpPr/>
-          <p:nvPr/>
-        </p:nvSpPr>
-        <p:spPr>
-          <a:xfrm>
-            <a:off x="914400" y="2432304"/>
-            <a:ext cx="2651760" cy="365760"/>
+          <p:cNvPr id="9" name="Shape 7"/>
+          <p:cNvSpPr/>
+          <p:nvPr/>
+        </p:nvSpPr>
+        <p:spPr>
+          <a:xfrm>
+            <a:off x="5989320" y="2039112"/>
+            <a:ext cx="182880" cy="182880"/>
+          </a:xfrm>
+          <a:prstGeom prst="ellipse">
+            <a:avLst/>
+          </a:prstGeom>
+          <a:solidFill>
+            <a:srgbClr val="74889A"/>
+          </a:solidFill>
+          <a:ln/>
+        </p:spPr>
+      </p:sp>
+      <p:sp>
+        <p:nvSpPr>
+          <p:cNvPr id="10" name="Text 8"/>
+          <p:cNvSpPr/>
+          <p:nvPr/>
+        </p:nvSpPr>
+        <p:spPr>
+          <a:xfrm>
+            <a:off x="4910328" y="2258568"/>
+            <a:ext cx="2340864" cy="365760"/>
           </a:xfrm>
           <a:prstGeom prst="rect">
             <a:avLst/>
@@ -1688,7 +1792,7 @@
               <a:buNone/>
             </a:pPr>
             <a:r>
-              <a:rPr lang="en-US" sz="1400" b="1" dirty="0">
+              <a:rPr lang="en-US" sz="1450" b="1" dirty="0">
                 <a:solidFill>
                   <a:srgbClr val="1F272D"/>
                 </a:solidFill>
@@ -1696,38 +1800,38 @@
                 <a:ea typeface="Calibri" pitchFamily="34" charset="-122"/>
                 <a:cs typeface="Calibri" pitchFamily="34" charset="-120"/>
               </a:rPr>
-              <a:t>Cab sensors</a:t>
-            </a:r>
-            <a:endParaRPr lang="en-US" sz="1400" dirty="0"/>
-          </a:p>
-        </p:txBody>
-      </p:sp>
-      <p:sp>
-        <p:nvSpPr>
-          <p:cNvPr id="7" name="Text 5"/>
-          <p:cNvSpPr/>
-          <p:nvPr/>
-        </p:nvSpPr>
-        <p:spPr>
-          <a:xfrm>
-            <a:off x="914400" y="2816352"/>
-            <a:ext cx="2651760" cy="365760"/>
-          </a:xfrm>
-          <a:prstGeom prst="rect">
-            <a:avLst/>
-          </a:prstGeom>
-          <a:noFill/>
-          <a:ln/>
-        </p:spPr>
-        <p:txBody>
-          <a:bodyPr wrap="square" lIns="0" tIns="0" rIns="0" bIns="0" rtlCol="0" anchor="ctr"/>
+              <a:t>Fog node</a:t>
+            </a:r>
+            <a:endParaRPr lang="en-US" sz="1450" dirty="0"/>
+          </a:p>
+        </p:txBody>
+      </p:sp>
+      <p:sp>
+        <p:nvSpPr>
+          <p:cNvPr id="11" name="Text 9"/>
+          <p:cNvSpPr/>
+          <p:nvPr/>
+        </p:nvSpPr>
+        <p:spPr>
+          <a:xfrm>
+            <a:off x="4937760" y="2606040"/>
+            <a:ext cx="2286000" cy="411480"/>
+          </a:xfrm>
+          <a:prstGeom prst="rect">
+            <a:avLst/>
+          </a:prstGeom>
+          <a:noFill/>
+          <a:ln/>
+        </p:spPr>
+        <p:txBody>
+          <a:bodyPr wrap="square" lIns="0" tIns="0" rIns="0" bIns="0" rtlCol="0" anchor="t"/>
           <a:lstStyle/>
           <a:p>
             <a:pPr algn="ctr" indent="0" marL="0">
               <a:buNone/>
             </a:pPr>
             <a:r>
-              <a:rPr lang="en-US" sz="1000" dirty="0">
+              <a:rPr lang="en-US" sz="1050" dirty="0">
                 <a:solidFill>
                   <a:srgbClr val="626E78"/>
                 </a:solidFill>
@@ -1735,155 +1839,51 @@
                 <a:ea typeface="Calibri" pitchFamily="34" charset="-122"/>
                 <a:cs typeface="Calibri" pitchFamily="34" charset="-120"/>
               </a:rPr>
-              <a:t>10 · 2 towers</a:t>
-            </a:r>
-            <a:endParaRPr lang="en-US" sz="1000" dirty="0"/>
-          </a:p>
-        </p:txBody>
-      </p:sp>
-      <p:sp>
-        <p:nvSpPr>
-          <p:cNvPr id="8" name="Shape 6"/>
-          <p:cNvSpPr/>
-          <p:nvPr/>
-        </p:nvSpPr>
-        <p:spPr>
-          <a:xfrm>
-            <a:off x="914400" y="3520440"/>
-            <a:ext cx="2651760" cy="1005840"/>
-          </a:xfrm>
-          <a:prstGeom prst="roundRect">
-            <a:avLst>
-              <a:gd name="adj" fmla="val 7273"/>
-            </a:avLst>
-          </a:prstGeom>
-          <a:solidFill>
-            <a:srgbClr val="FFFFFF"/>
-          </a:solidFill>
-          <a:ln w="15240">
+              <a:t>window · aggregate · alert</a:t>
+            </a:r>
+            <a:endParaRPr lang="en-US" sz="1050" dirty="0"/>
+          </a:p>
+        </p:txBody>
+      </p:sp>
+      <p:sp>
+        <p:nvSpPr>
+          <p:cNvPr id="12" name="Shape 10"/>
+          <p:cNvSpPr/>
+          <p:nvPr/>
+        </p:nvSpPr>
+        <p:spPr>
+          <a:xfrm>
+            <a:off x="7242048" y="2514600"/>
+            <a:ext cx="1975104" cy="0"/>
+          </a:xfrm>
+          <a:prstGeom prst="line">
+            <a:avLst/>
+          </a:prstGeom>
+          <a:noFill/>
+          <a:ln w="25400">
             <a:solidFill>
               <a:srgbClr val="74889A"/>
             </a:solidFill>
             <a:prstDash val="solid"/>
-          </a:ln>
-        </p:spPr>
-      </p:sp>
-      <p:sp>
-        <p:nvSpPr>
-          <p:cNvPr id="9" name="Text 7"/>
-          <p:cNvSpPr/>
-          <p:nvPr/>
-        </p:nvSpPr>
-        <p:spPr>
-          <a:xfrm>
-            <a:off x="914400" y="3666744"/>
-            <a:ext cx="2651760" cy="365760"/>
-          </a:xfrm>
-          <a:prstGeom prst="rect">
-            <a:avLst/>
-          </a:prstGeom>
-          <a:noFill/>
-          <a:ln/>
-        </p:spPr>
-        <p:txBody>
-          <a:bodyPr wrap="square" lIns="0" tIns="0" rIns="0" bIns="0" rtlCol="0" anchor="ctr"/>
-          <a:lstStyle/>
-          <a:p>
-            <a:pPr algn="ctr" indent="0" marL="0">
-              <a:buNone/>
-            </a:pPr>
-            <a:r>
-              <a:rPr lang="en-US" sz="1400" b="1" dirty="0">
-                <a:solidFill>
-                  <a:srgbClr val="1F272D"/>
-                </a:solidFill>
-                <a:latin typeface="Calibri" pitchFamily="34" charset="0"/>
-                <a:ea typeface="Calibri" pitchFamily="34" charset="-122"/>
-                <a:cs typeface="Calibri" pitchFamily="34" charset="-120"/>
-              </a:rPr>
-              <a:t>Fog node</a:t>
-            </a:r>
-            <a:endParaRPr lang="en-US" sz="1400" dirty="0"/>
-          </a:p>
-        </p:txBody>
-      </p:sp>
-      <p:sp>
-        <p:nvSpPr>
-          <p:cNvPr id="10" name="Text 8"/>
-          <p:cNvSpPr/>
-          <p:nvPr/>
-        </p:nvSpPr>
-        <p:spPr>
-          <a:xfrm>
-            <a:off x="914400" y="4050792"/>
-            <a:ext cx="2651760" cy="365760"/>
-          </a:xfrm>
-          <a:prstGeom prst="rect">
-            <a:avLst/>
-          </a:prstGeom>
-          <a:noFill/>
-          <a:ln/>
-        </p:spPr>
-        <p:txBody>
-          <a:bodyPr wrap="square" lIns="0" tIns="0" rIns="0" bIns="0" rtlCol="0" anchor="ctr"/>
-          <a:lstStyle/>
-          <a:p>
-            <a:pPr algn="ctr" indent="0" marL="0">
-              <a:buNone/>
-            </a:pPr>
-            <a:r>
-              <a:rPr lang="en-US" sz="1000" dirty="0">
-                <a:solidFill>
-                  <a:srgbClr val="626E78"/>
-                </a:solidFill>
-                <a:latin typeface="Calibri" pitchFamily="34" charset="0"/>
-                <a:ea typeface="Calibri" pitchFamily="34" charset="-122"/>
-                <a:cs typeface="Calibri" pitchFamily="34" charset="-120"/>
-              </a:rPr>
-              <a:t>window · aggregate · alert</a:t>
-            </a:r>
-            <a:endParaRPr lang="en-US" sz="1000" dirty="0"/>
-          </a:p>
-        </p:txBody>
-      </p:sp>
-      <p:sp>
-        <p:nvSpPr>
-          <p:cNvPr id="11" name="Shape 9"/>
-          <p:cNvSpPr/>
-          <p:nvPr/>
-        </p:nvSpPr>
-        <p:spPr>
-          <a:xfrm>
-            <a:off x="3886200" y="3246120"/>
-            <a:ext cx="502920" cy="0"/>
-          </a:xfrm>
-          <a:prstGeom prst="line">
-            <a:avLst/>
-          </a:prstGeom>
-          <a:noFill/>
-          <a:ln w="31750">
-            <a:solidFill>
-              <a:srgbClr val="37474F"/>
-            </a:solidFill>
-            <a:prstDash val="solid"/>
+            <a:headEnd type="none"/>
             <a:tailEnd type="triangle"/>
           </a:ln>
         </p:spPr>
       </p:sp>
       <p:sp>
         <p:nvSpPr>
-          <p:cNvPr id="12" name="Shape 10"/>
-          <p:cNvSpPr/>
-          <p:nvPr/>
-        </p:nvSpPr>
-        <p:spPr>
-          <a:xfrm>
-            <a:off x="4572000" y="1554480"/>
-            <a:ext cx="6949440" cy="3383280"/>
+          <p:cNvPr id="13" name="Shape 11"/>
+          <p:cNvSpPr/>
+          <p:nvPr/>
+        </p:nvSpPr>
+        <p:spPr>
+          <a:xfrm>
+            <a:off x="9235440" y="1874520"/>
+            <a:ext cx="2286000" cy="1280160"/>
           </a:xfrm>
           <a:prstGeom prst="roundRect">
             <a:avLst>
-              <a:gd name="adj" fmla="val 2703"/>
+              <a:gd name="adj" fmla="val 7143"/>
             </a:avLst>
           </a:prstGeom>
           <a:solidFill>
@@ -1899,63 +1899,122 @@
       </p:sp>
       <p:sp>
         <p:nvSpPr>
-          <p:cNvPr id="13" name="Text 11"/>
-          <p:cNvSpPr/>
-          <p:nvPr/>
-        </p:nvSpPr>
-        <p:spPr>
-          <a:xfrm>
-            <a:off x="4572000" y="1691640"/>
-            <a:ext cx="6949440" cy="365760"/>
-          </a:xfrm>
-          <a:prstGeom prst="rect">
-            <a:avLst/>
-          </a:prstGeom>
-          <a:noFill/>
-          <a:ln/>
-        </p:spPr>
-        <p:txBody>
-          <a:bodyPr wrap="square" rtlCol="0" anchor="ctr"/>
+          <p:cNvPr id="14" name="Shape 12"/>
+          <p:cNvSpPr/>
+          <p:nvPr/>
+        </p:nvSpPr>
+        <p:spPr>
+          <a:xfrm>
+            <a:off x="10287000" y="2039112"/>
+            <a:ext cx="182880" cy="182880"/>
+          </a:xfrm>
+          <a:prstGeom prst="ellipse">
+            <a:avLst/>
+          </a:prstGeom>
+          <a:solidFill>
+            <a:srgbClr val="37474F"/>
+          </a:solidFill>
+          <a:ln/>
+        </p:spPr>
+      </p:sp>
+      <p:sp>
+        <p:nvSpPr>
+          <p:cNvPr id="15" name="Text 13"/>
+          <p:cNvSpPr/>
+          <p:nvPr/>
+        </p:nvSpPr>
+        <p:spPr>
+          <a:xfrm>
+            <a:off x="9208008" y="2258568"/>
+            <a:ext cx="2340864" cy="365760"/>
+          </a:xfrm>
+          <a:prstGeom prst="rect">
+            <a:avLst/>
+          </a:prstGeom>
+          <a:noFill/>
+          <a:ln/>
+        </p:spPr>
+        <p:txBody>
+          <a:bodyPr wrap="square" lIns="0" tIns="0" rIns="0" bIns="0" rtlCol="0" anchor="ctr"/>
           <a:lstStyle/>
           <a:p>
             <a:pPr algn="ctr" indent="0" marL="0">
               <a:buNone/>
             </a:pPr>
             <a:r>
-              <a:rPr lang="en-US" sz="1200" b="1" spc="200" kern="0" dirty="0">
-                <a:solidFill>
-                  <a:srgbClr val="37474F"/>
+              <a:rPr lang="en-US" sz="1450" b="1" dirty="0">
+                <a:solidFill>
+                  <a:srgbClr val="1F272D"/>
                 </a:solidFill>
                 <a:latin typeface="Calibri" pitchFamily="34" charset="0"/>
                 <a:ea typeface="Calibri" pitchFamily="34" charset="-122"/>
                 <a:cs typeface="Calibri" pitchFamily="34" charset="-120"/>
               </a:rPr>
-              <a:t>CLOUD (serverless)</a:t>
-            </a:r>
-            <a:endParaRPr lang="en-US" sz="1200" dirty="0"/>
-          </a:p>
-        </p:txBody>
-      </p:sp>
-      <p:sp>
-        <p:nvSpPr>
-          <p:cNvPr id="14" name="Shape 12"/>
-          <p:cNvSpPr/>
-          <p:nvPr/>
-        </p:nvSpPr>
-        <p:spPr>
-          <a:xfrm>
-            <a:off x="4846320" y="2651760"/>
-            <a:ext cx="1463040" cy="1371600"/>
+              <a:t>Amazon SQS</a:t>
+            </a:r>
+            <a:endParaRPr lang="en-US" sz="1450" dirty="0"/>
+          </a:p>
+        </p:txBody>
+      </p:sp>
+      <p:sp>
+        <p:nvSpPr>
+          <p:cNvPr id="16" name="Text 14"/>
+          <p:cNvSpPr/>
+          <p:nvPr/>
+        </p:nvSpPr>
+        <p:spPr>
+          <a:xfrm>
+            <a:off x="9235440" y="2606040"/>
+            <a:ext cx="2286000" cy="411480"/>
+          </a:xfrm>
+          <a:prstGeom prst="rect">
+            <a:avLst/>
+          </a:prstGeom>
+          <a:noFill/>
+          <a:ln/>
+        </p:spPr>
+        <p:txBody>
+          <a:bodyPr wrap="square" lIns="0" tIns="0" rIns="0" bIns="0" rtlCol="0" anchor="t"/>
+          <a:lstStyle/>
+          <a:p>
+            <a:pPr algn="ctr" indent="0" marL="0">
+              <a:buNone/>
+            </a:pPr>
+            <a:r>
+              <a:rPr lang="en-US" sz="1050" dirty="0">
+                <a:solidFill>
+                  <a:srgbClr val="626E78"/>
+                </a:solidFill>
+                <a:latin typeface="Calibri" pitchFamily="34" charset="0"/>
+                <a:ea typeface="Calibri" pitchFamily="34" charset="-122"/>
+                <a:cs typeface="Calibri" pitchFamily="34" charset="-120"/>
+              </a:rPr>
+              <a:t>aggregate queue</a:t>
+            </a:r>
+            <a:endParaRPr lang="en-US" sz="1050" dirty="0"/>
+          </a:p>
+        </p:txBody>
+      </p:sp>
+      <p:sp>
+        <p:nvSpPr>
+          <p:cNvPr id="17" name="Shape 15"/>
+          <p:cNvSpPr/>
+          <p:nvPr/>
+        </p:nvSpPr>
+        <p:spPr>
+          <a:xfrm>
+            <a:off x="9235440" y="3520440"/>
+            <a:ext cx="2286000" cy="1280160"/>
           </a:xfrm>
           <a:prstGeom prst="roundRect">
             <a:avLst>
-              <a:gd name="adj" fmla="val 5333"/>
+              <a:gd name="adj" fmla="val 7143"/>
             </a:avLst>
           </a:prstGeom>
           <a:solidFill>
-            <a:srgbClr val="FFFFFF"/>
+            <a:srgbClr val="EFF2F4"/>
           </a:solidFill>
-          <a:ln w="15240">
+          <a:ln w="19050">
             <a:solidFill>
               <a:srgbClr val="37474F"/>
             </a:solidFill>
@@ -1965,14 +2024,34 @@
       </p:sp>
       <p:sp>
         <p:nvSpPr>
-          <p:cNvPr id="15" name="Text 13"/>
-          <p:cNvSpPr/>
-          <p:nvPr/>
-        </p:nvSpPr>
-        <p:spPr>
-          <a:xfrm>
-            <a:off x="4800600" y="2907792"/>
-            <a:ext cx="1554480" cy="457200"/>
+          <p:cNvPr id="18" name="Shape 16"/>
+          <p:cNvSpPr/>
+          <p:nvPr/>
+        </p:nvSpPr>
+        <p:spPr>
+          <a:xfrm>
+            <a:off x="10287000" y="3685032"/>
+            <a:ext cx="182880" cy="182880"/>
+          </a:xfrm>
+          <a:prstGeom prst="ellipse">
+            <a:avLst/>
+          </a:prstGeom>
+          <a:solidFill>
+            <a:srgbClr val="37474F"/>
+          </a:solidFill>
+          <a:ln/>
+        </p:spPr>
+      </p:sp>
+      <p:sp>
+        <p:nvSpPr>
+          <p:cNvPr id="19" name="Text 17"/>
+          <p:cNvSpPr/>
+          <p:nvPr/>
+        </p:nvSpPr>
+        <p:spPr>
+          <a:xfrm>
+            <a:off x="9208008" y="3904488"/>
+            <a:ext cx="2340864" cy="365760"/>
           </a:xfrm>
           <a:prstGeom prst="rect">
             <a:avLst/>
@@ -1988,7 +2067,7 @@
               <a:buNone/>
             </a:pPr>
             <a:r>
-              <a:rPr lang="en-US" sz="1250" b="1" dirty="0">
+              <a:rPr lang="en-US" sz="1450" b="1" dirty="0">
                 <a:solidFill>
                   <a:srgbClr val="1F272D"/>
                 </a:solidFill>
@@ -1996,38 +2075,38 @@
                 <a:ea typeface="Calibri" pitchFamily="34" charset="-122"/>
                 <a:cs typeface="Calibri" pitchFamily="34" charset="-120"/>
               </a:rPr>
-              <a:t>Amazon SQS</a:t>
-            </a:r>
-            <a:endParaRPr lang="en-US" sz="1250" dirty="0"/>
-          </a:p>
-        </p:txBody>
-      </p:sp>
-      <p:sp>
-        <p:nvSpPr>
-          <p:cNvPr id="16" name="Text 14"/>
-          <p:cNvSpPr/>
-          <p:nvPr/>
-        </p:nvSpPr>
-        <p:spPr>
-          <a:xfrm>
-            <a:off x="4828032" y="3401568"/>
-            <a:ext cx="1499616" cy="457200"/>
-          </a:xfrm>
-          <a:prstGeom prst="rect">
-            <a:avLst/>
-          </a:prstGeom>
-          <a:noFill/>
-          <a:ln/>
-        </p:spPr>
-        <p:txBody>
-          <a:bodyPr wrap="square" lIns="0" tIns="0" rIns="0" bIns="0" rtlCol="0" anchor="ctr"/>
+              <a:t>AWS Lambda</a:t>
+            </a:r>
+            <a:endParaRPr lang="en-US" sz="1450" dirty="0"/>
+          </a:p>
+        </p:txBody>
+      </p:sp>
+      <p:sp>
+        <p:nvSpPr>
+          <p:cNvPr id="20" name="Text 18"/>
+          <p:cNvSpPr/>
+          <p:nvPr/>
+        </p:nvSpPr>
+        <p:spPr>
+          <a:xfrm>
+            <a:off x="9235440" y="4251960"/>
+            <a:ext cx="2286000" cy="411480"/>
+          </a:xfrm>
+          <a:prstGeom prst="rect">
+            <a:avLst/>
+          </a:prstGeom>
+          <a:noFill/>
+          <a:ln/>
+        </p:spPr>
+        <p:txBody>
+          <a:bodyPr wrap="square" lIns="0" tIns="0" rIns="0" bIns="0" rtlCol="0" anchor="t"/>
           <a:lstStyle/>
           <a:p>
             <a:pPr algn="ctr" indent="0" marL="0">
               <a:buNone/>
             </a:pPr>
             <a:r>
-              <a:rPr lang="en-US" sz="900" dirty="0">
+              <a:rPr lang="en-US" sz="1050" dirty="0">
                 <a:solidFill>
                   <a:srgbClr val="626E78"/>
                 </a:solidFill>
@@ -2035,28 +2114,328 @@
                 <a:ea typeface="Calibri" pitchFamily="34" charset="-122"/>
                 <a:cs typeface="Calibri" pitchFamily="34" charset="-120"/>
               </a:rPr>
-              <a:t>aggregate queue</a:t>
-            </a:r>
-            <a:endParaRPr lang="en-US" sz="900" dirty="0"/>
-          </a:p>
-        </p:txBody>
-      </p:sp>
-      <p:sp>
-        <p:nvSpPr>
-          <p:cNvPr id="17" name="Shape 15"/>
-          <p:cNvSpPr/>
-          <p:nvPr/>
-        </p:nvSpPr>
-        <p:spPr>
-          <a:xfrm>
-            <a:off x="6318504" y="3337560"/>
-            <a:ext cx="164592" cy="0"/>
+              <a:t>nodejs20 ingest</a:t>
+            </a:r>
+            <a:endParaRPr lang="en-US" sz="1050" dirty="0"/>
+          </a:p>
+        </p:txBody>
+      </p:sp>
+      <p:sp>
+        <p:nvSpPr>
+          <p:cNvPr id="21" name="Shape 19"/>
+          <p:cNvSpPr/>
+          <p:nvPr/>
+        </p:nvSpPr>
+        <p:spPr>
+          <a:xfrm>
+            <a:off x="7242048" y="4160520"/>
+            <a:ext cx="1975104" cy="0"/>
           </a:xfrm>
           <a:prstGeom prst="line">
             <a:avLst/>
           </a:prstGeom>
           <a:noFill/>
-          <a:ln w="20320">
+          <a:ln w="25400">
+            <a:solidFill>
+              <a:srgbClr val="74889A"/>
+            </a:solidFill>
+            <a:prstDash val="solid"/>
+            <a:headEnd type="triangle"/>
+            <a:tailEnd type="oval"/>
+          </a:ln>
+        </p:spPr>
+      </p:sp>
+      <p:sp>
+        <p:nvSpPr>
+          <p:cNvPr id="22" name="Shape 20"/>
+          <p:cNvSpPr/>
+          <p:nvPr/>
+        </p:nvSpPr>
+        <p:spPr>
+          <a:xfrm>
+            <a:off x="4937760" y="3520440"/>
+            <a:ext cx="2286000" cy="1280160"/>
+          </a:xfrm>
+          <a:prstGeom prst="roundRect">
+            <a:avLst>
+              <a:gd name="adj" fmla="val 7143"/>
+            </a:avLst>
+          </a:prstGeom>
+          <a:solidFill>
+            <a:srgbClr val="EFF2F4"/>
+          </a:solidFill>
+          <a:ln w="19050">
+            <a:solidFill>
+              <a:srgbClr val="37474F"/>
+            </a:solidFill>
+            <a:prstDash val="solid"/>
+          </a:ln>
+        </p:spPr>
+      </p:sp>
+      <p:sp>
+        <p:nvSpPr>
+          <p:cNvPr id="23" name="Shape 21"/>
+          <p:cNvSpPr/>
+          <p:nvPr/>
+        </p:nvSpPr>
+        <p:spPr>
+          <a:xfrm>
+            <a:off x="5989320" y="3685032"/>
+            <a:ext cx="182880" cy="182880"/>
+          </a:xfrm>
+          <a:prstGeom prst="ellipse">
+            <a:avLst/>
+          </a:prstGeom>
+          <a:solidFill>
+            <a:srgbClr val="37474F"/>
+          </a:solidFill>
+          <a:ln/>
+        </p:spPr>
+      </p:sp>
+      <p:sp>
+        <p:nvSpPr>
+          <p:cNvPr id="24" name="Text 22"/>
+          <p:cNvSpPr/>
+          <p:nvPr/>
+        </p:nvSpPr>
+        <p:spPr>
+          <a:xfrm>
+            <a:off x="4910328" y="3904488"/>
+            <a:ext cx="2340864" cy="365760"/>
+          </a:xfrm>
+          <a:prstGeom prst="rect">
+            <a:avLst/>
+          </a:prstGeom>
+          <a:noFill/>
+          <a:ln/>
+        </p:spPr>
+        <p:txBody>
+          <a:bodyPr wrap="square" lIns="0" tIns="0" rIns="0" bIns="0" rtlCol="0" anchor="ctr"/>
+          <a:lstStyle/>
+          <a:p>
+            <a:pPr algn="ctr" indent="0" marL="0">
+              <a:buNone/>
+            </a:pPr>
+            <a:r>
+              <a:rPr lang="en-US" sz="1450" b="1" dirty="0">
+                <a:solidFill>
+                  <a:srgbClr val="1F272D"/>
+                </a:solidFill>
+                <a:latin typeface="Calibri" pitchFamily="34" charset="0"/>
+                <a:ea typeface="Calibri" pitchFamily="34" charset="-122"/>
+                <a:cs typeface="Calibri" pitchFamily="34" charset="-120"/>
+              </a:rPr>
+              <a:t>DynamoDB</a:t>
+            </a:r>
+            <a:endParaRPr lang="en-US" sz="1450" dirty="0"/>
+          </a:p>
+        </p:txBody>
+      </p:sp>
+      <p:sp>
+        <p:nvSpPr>
+          <p:cNvPr id="25" name="Text 23"/>
+          <p:cNvSpPr/>
+          <p:nvPr/>
+        </p:nvSpPr>
+        <p:spPr>
+          <a:xfrm>
+            <a:off x="4937760" y="4251960"/>
+            <a:ext cx="2286000" cy="411480"/>
+          </a:xfrm>
+          <a:prstGeom prst="rect">
+            <a:avLst/>
+          </a:prstGeom>
+          <a:noFill/>
+          <a:ln/>
+        </p:spPr>
+        <p:txBody>
+          <a:bodyPr wrap="square" lIns="0" tIns="0" rIns="0" bIns="0" rtlCol="0" anchor="t"/>
+          <a:lstStyle/>
+          <a:p>
+            <a:pPr algn="ctr" indent="0" marL="0">
+              <a:buNone/>
+            </a:pPr>
+            <a:r>
+              <a:rPr lang="en-US" sz="1050" dirty="0">
+                <a:solidFill>
+                  <a:srgbClr val="626E78"/>
+                </a:solidFill>
+                <a:latin typeface="Calibri" pitchFamily="34" charset="0"/>
+                <a:ea typeface="Calibri" pitchFamily="34" charset="-122"/>
+                <a:cs typeface="Calibri" pitchFamily="34" charset="-120"/>
+              </a:rPr>
+              <a:t>window store</a:t>
+            </a:r>
+            <a:endParaRPr lang="en-US" sz="1050" dirty="0"/>
+          </a:p>
+        </p:txBody>
+      </p:sp>
+      <p:sp>
+        <p:nvSpPr>
+          <p:cNvPr id="26" name="Shape 24"/>
+          <p:cNvSpPr/>
+          <p:nvPr/>
+        </p:nvSpPr>
+        <p:spPr>
+          <a:xfrm>
+            <a:off x="2944368" y="4160520"/>
+            <a:ext cx="1975104" cy="0"/>
+          </a:xfrm>
+          <a:prstGeom prst="line">
+            <a:avLst/>
+          </a:prstGeom>
+          <a:noFill/>
+          <a:ln w="25400">
+            <a:solidFill>
+              <a:srgbClr val="74889A"/>
+            </a:solidFill>
+            <a:prstDash val="solid"/>
+            <a:headEnd type="triangle"/>
+            <a:tailEnd type="oval"/>
+          </a:ln>
+        </p:spPr>
+      </p:sp>
+      <p:sp>
+        <p:nvSpPr>
+          <p:cNvPr id="27" name="Shape 25"/>
+          <p:cNvSpPr/>
+          <p:nvPr/>
+        </p:nvSpPr>
+        <p:spPr>
+          <a:xfrm>
+            <a:off x="640080" y="3520440"/>
+            <a:ext cx="2286000" cy="1280160"/>
+          </a:xfrm>
+          <a:prstGeom prst="roundRect">
+            <a:avLst>
+              <a:gd name="adj" fmla="val 7143"/>
+            </a:avLst>
+          </a:prstGeom>
+          <a:solidFill>
+            <a:srgbClr val="EFF2F4"/>
+          </a:solidFill>
+          <a:ln w="19050">
+            <a:solidFill>
+              <a:srgbClr val="4E6270"/>
+            </a:solidFill>
+            <a:prstDash val="solid"/>
+          </a:ln>
+        </p:spPr>
+      </p:sp>
+      <p:sp>
+        <p:nvSpPr>
+          <p:cNvPr id="28" name="Shape 26"/>
+          <p:cNvSpPr/>
+          <p:nvPr/>
+        </p:nvSpPr>
+        <p:spPr>
+          <a:xfrm>
+            <a:off x="1691640" y="3685032"/>
+            <a:ext cx="182880" cy="182880"/>
+          </a:xfrm>
+          <a:prstGeom prst="ellipse">
+            <a:avLst/>
+          </a:prstGeom>
+          <a:solidFill>
+            <a:srgbClr val="4E6270"/>
+          </a:solidFill>
+          <a:ln/>
+        </p:spPr>
+      </p:sp>
+      <p:sp>
+        <p:nvSpPr>
+          <p:cNvPr id="29" name="Text 27"/>
+          <p:cNvSpPr/>
+          <p:nvPr/>
+        </p:nvSpPr>
+        <p:spPr>
+          <a:xfrm>
+            <a:off x="612648" y="3904488"/>
+            <a:ext cx="2340864" cy="365760"/>
+          </a:xfrm>
+          <a:prstGeom prst="rect">
+            <a:avLst/>
+          </a:prstGeom>
+          <a:noFill/>
+          <a:ln/>
+        </p:spPr>
+        <p:txBody>
+          <a:bodyPr wrap="square" lIns="0" tIns="0" rIns="0" bIns="0" rtlCol="0" anchor="ctr"/>
+          <a:lstStyle/>
+          <a:p>
+            <a:pPr algn="ctr" indent="0" marL="0">
+              <a:buNone/>
+            </a:pPr>
+            <a:r>
+              <a:rPr lang="en-US" sz="1450" b="1" dirty="0">
+                <a:solidFill>
+                  <a:srgbClr val="1F272D"/>
+                </a:solidFill>
+                <a:latin typeface="Calibri" pitchFamily="34" charset="0"/>
+                <a:ea typeface="Calibri" pitchFamily="34" charset="-122"/>
+                <a:cs typeface="Calibri" pitchFamily="34" charset="-120"/>
+              </a:rPr>
+              <a:t>API GW + S3</a:t>
+            </a:r>
+            <a:endParaRPr lang="en-US" sz="1450" dirty="0"/>
+          </a:p>
+        </p:txBody>
+      </p:sp>
+      <p:sp>
+        <p:nvSpPr>
+          <p:cNvPr id="30" name="Text 28"/>
+          <p:cNvSpPr/>
+          <p:nvPr/>
+        </p:nvSpPr>
+        <p:spPr>
+          <a:xfrm>
+            <a:off x="640080" y="4251960"/>
+            <a:ext cx="2286000" cy="411480"/>
+          </a:xfrm>
+          <a:prstGeom prst="rect">
+            <a:avLst/>
+          </a:prstGeom>
+          <a:noFill/>
+          <a:ln/>
+        </p:spPr>
+        <p:txBody>
+          <a:bodyPr wrap="square" lIns="0" tIns="0" rIns="0" bIns="0" rtlCol="0" anchor="t"/>
+          <a:lstStyle/>
+          <a:p>
+            <a:pPr algn="ctr" indent="0" marL="0">
+              <a:buNone/>
+            </a:pPr>
+            <a:r>
+              <a:rPr lang="en-US" sz="1050" dirty="0">
+                <a:solidFill>
+                  <a:srgbClr val="626E78"/>
+                </a:solidFill>
+                <a:latin typeface="Calibri" pitchFamily="34" charset="0"/>
+                <a:ea typeface="Calibri" pitchFamily="34" charset="-122"/>
+                <a:cs typeface="Calibri" pitchFamily="34" charset="-120"/>
+              </a:rPr>
+              <a:t>fleet dashboard</a:t>
+            </a:r>
+            <a:endParaRPr lang="en-US" sz="1050" dirty="0"/>
+          </a:p>
+        </p:txBody>
+      </p:sp>
+      <p:sp>
+        <p:nvSpPr>
+          <p:cNvPr id="31" name="Shape 29"/>
+          <p:cNvSpPr/>
+          <p:nvPr/>
+        </p:nvSpPr>
+        <p:spPr>
+          <a:xfrm>
+            <a:off x="10378440" y="3154680"/>
+            <a:ext cx="0" cy="365760"/>
+          </a:xfrm>
+          <a:prstGeom prst="line">
+            <a:avLst/>
+          </a:prstGeom>
+          <a:noFill/>
+          <a:ln w="25400">
             <a:solidFill>
               <a:srgbClr val="74889A"/>
             </a:solidFill>
@@ -2067,370 +2446,7 @@
       </p:sp>
       <p:sp>
         <p:nvSpPr>
-          <p:cNvPr id="18" name="Shape 16"/>
-          <p:cNvSpPr/>
-          <p:nvPr/>
-        </p:nvSpPr>
-        <p:spPr>
-          <a:xfrm>
-            <a:off x="6492240" y="2651760"/>
-            <a:ext cx="1463040" cy="1371600"/>
-          </a:xfrm>
-          <a:prstGeom prst="roundRect">
-            <a:avLst>
-              <a:gd name="adj" fmla="val 5333"/>
-            </a:avLst>
-          </a:prstGeom>
-          <a:solidFill>
-            <a:srgbClr val="FFFFFF"/>
-          </a:solidFill>
-          <a:ln w="15240">
-            <a:solidFill>
-              <a:srgbClr val="37474F"/>
-            </a:solidFill>
-            <a:prstDash val="solid"/>
-          </a:ln>
-        </p:spPr>
-      </p:sp>
-      <p:sp>
-        <p:nvSpPr>
-          <p:cNvPr id="19" name="Text 17"/>
-          <p:cNvSpPr/>
-          <p:nvPr/>
-        </p:nvSpPr>
-        <p:spPr>
-          <a:xfrm>
-            <a:off x="6446520" y="2907792"/>
-            <a:ext cx="1554480" cy="457200"/>
-          </a:xfrm>
-          <a:prstGeom prst="rect">
-            <a:avLst/>
-          </a:prstGeom>
-          <a:noFill/>
-          <a:ln/>
-        </p:spPr>
-        <p:txBody>
-          <a:bodyPr wrap="square" lIns="0" tIns="0" rIns="0" bIns="0" rtlCol="0" anchor="ctr"/>
-          <a:lstStyle/>
-          <a:p>
-            <a:pPr algn="ctr" indent="0" marL="0">
-              <a:buNone/>
-            </a:pPr>
-            <a:r>
-              <a:rPr lang="en-US" sz="1250" b="1" dirty="0">
-                <a:solidFill>
-                  <a:srgbClr val="1F272D"/>
-                </a:solidFill>
-                <a:latin typeface="Calibri" pitchFamily="34" charset="0"/>
-                <a:ea typeface="Calibri" pitchFamily="34" charset="-122"/>
-                <a:cs typeface="Calibri" pitchFamily="34" charset="-120"/>
-              </a:rPr>
-              <a:t>AWS Lambda</a:t>
-            </a:r>
-            <a:endParaRPr lang="en-US" sz="1250" dirty="0"/>
-          </a:p>
-        </p:txBody>
-      </p:sp>
-      <p:sp>
-        <p:nvSpPr>
-          <p:cNvPr id="20" name="Text 18"/>
-          <p:cNvSpPr/>
-          <p:nvPr/>
-        </p:nvSpPr>
-        <p:spPr>
-          <a:xfrm>
-            <a:off x="6473952" y="3401568"/>
-            <a:ext cx="1499616" cy="457200"/>
-          </a:xfrm>
-          <a:prstGeom prst="rect">
-            <a:avLst/>
-          </a:prstGeom>
-          <a:noFill/>
-          <a:ln/>
-        </p:spPr>
-        <p:txBody>
-          <a:bodyPr wrap="square" lIns="0" tIns="0" rIns="0" bIns="0" rtlCol="0" anchor="ctr"/>
-          <a:lstStyle/>
-          <a:p>
-            <a:pPr algn="ctr" indent="0" marL="0">
-              <a:buNone/>
-            </a:pPr>
-            <a:r>
-              <a:rPr lang="en-US" sz="900" dirty="0">
-                <a:solidFill>
-                  <a:srgbClr val="626E78"/>
-                </a:solidFill>
-                <a:latin typeface="Calibri" pitchFamily="34" charset="0"/>
-                <a:ea typeface="Calibri" pitchFamily="34" charset="-122"/>
-                <a:cs typeface="Calibri" pitchFamily="34" charset="-120"/>
-              </a:rPr>
-              <a:t>nodejs20 ingest</a:t>
-            </a:r>
-            <a:endParaRPr lang="en-US" sz="900" dirty="0"/>
-          </a:p>
-        </p:txBody>
-      </p:sp>
-      <p:sp>
-        <p:nvSpPr>
-          <p:cNvPr id="21" name="Shape 19"/>
-          <p:cNvSpPr/>
-          <p:nvPr/>
-        </p:nvSpPr>
-        <p:spPr>
-          <a:xfrm>
-            <a:off x="7964424" y="3337560"/>
-            <a:ext cx="164592" cy="0"/>
-          </a:xfrm>
-          <a:prstGeom prst="line">
-            <a:avLst/>
-          </a:prstGeom>
-          <a:noFill/>
-          <a:ln w="20320">
-            <a:solidFill>
-              <a:srgbClr val="74889A"/>
-            </a:solidFill>
-            <a:prstDash val="solid"/>
-            <a:tailEnd type="triangle"/>
-          </a:ln>
-        </p:spPr>
-      </p:sp>
-      <p:sp>
-        <p:nvSpPr>
-          <p:cNvPr id="22" name="Shape 20"/>
-          <p:cNvSpPr/>
-          <p:nvPr/>
-        </p:nvSpPr>
-        <p:spPr>
-          <a:xfrm>
-            <a:off x="8138160" y="2651760"/>
-            <a:ext cx="1463040" cy="1371600"/>
-          </a:xfrm>
-          <a:prstGeom prst="roundRect">
-            <a:avLst>
-              <a:gd name="adj" fmla="val 5333"/>
-            </a:avLst>
-          </a:prstGeom>
-          <a:solidFill>
-            <a:srgbClr val="FFFFFF"/>
-          </a:solidFill>
-          <a:ln w="15240">
-            <a:solidFill>
-              <a:srgbClr val="37474F"/>
-            </a:solidFill>
-            <a:prstDash val="solid"/>
-          </a:ln>
-        </p:spPr>
-      </p:sp>
-      <p:sp>
-        <p:nvSpPr>
-          <p:cNvPr id="23" name="Text 21"/>
-          <p:cNvSpPr/>
-          <p:nvPr/>
-        </p:nvSpPr>
-        <p:spPr>
-          <a:xfrm>
-            <a:off x="8092440" y="2907792"/>
-            <a:ext cx="1554480" cy="457200"/>
-          </a:xfrm>
-          <a:prstGeom prst="rect">
-            <a:avLst/>
-          </a:prstGeom>
-          <a:noFill/>
-          <a:ln/>
-        </p:spPr>
-        <p:txBody>
-          <a:bodyPr wrap="square" lIns="0" tIns="0" rIns="0" bIns="0" rtlCol="0" anchor="ctr"/>
-          <a:lstStyle/>
-          <a:p>
-            <a:pPr algn="ctr" indent="0" marL="0">
-              <a:buNone/>
-            </a:pPr>
-            <a:r>
-              <a:rPr lang="en-US" sz="1250" b="1" dirty="0">
-                <a:solidFill>
-                  <a:srgbClr val="1F272D"/>
-                </a:solidFill>
-                <a:latin typeface="Calibri" pitchFamily="34" charset="0"/>
-                <a:ea typeface="Calibri" pitchFamily="34" charset="-122"/>
-                <a:cs typeface="Calibri" pitchFamily="34" charset="-120"/>
-              </a:rPr>
-              <a:t>DynamoDB</a:t>
-            </a:r>
-            <a:endParaRPr lang="en-US" sz="1250" dirty="0"/>
-          </a:p>
-        </p:txBody>
-      </p:sp>
-      <p:sp>
-        <p:nvSpPr>
-          <p:cNvPr id="24" name="Text 22"/>
-          <p:cNvSpPr/>
-          <p:nvPr/>
-        </p:nvSpPr>
-        <p:spPr>
-          <a:xfrm>
-            <a:off x="8119872" y="3401568"/>
-            <a:ext cx="1499616" cy="457200"/>
-          </a:xfrm>
-          <a:prstGeom prst="rect">
-            <a:avLst/>
-          </a:prstGeom>
-          <a:noFill/>
-          <a:ln/>
-        </p:spPr>
-        <p:txBody>
-          <a:bodyPr wrap="square" lIns="0" tIns="0" rIns="0" bIns="0" rtlCol="0" anchor="ctr"/>
-          <a:lstStyle/>
-          <a:p>
-            <a:pPr algn="ctr" indent="0" marL="0">
-              <a:buNone/>
-            </a:pPr>
-            <a:r>
-              <a:rPr lang="en-US" sz="900" dirty="0">
-                <a:solidFill>
-                  <a:srgbClr val="626E78"/>
-                </a:solidFill>
-                <a:latin typeface="Calibri" pitchFamily="34" charset="0"/>
-                <a:ea typeface="Calibri" pitchFamily="34" charset="-122"/>
-                <a:cs typeface="Calibri" pitchFamily="34" charset="-120"/>
-              </a:rPr>
-              <a:t>window store</a:t>
-            </a:r>
-            <a:endParaRPr lang="en-US" sz="900" dirty="0"/>
-          </a:p>
-        </p:txBody>
-      </p:sp>
-      <p:sp>
-        <p:nvSpPr>
-          <p:cNvPr id="25" name="Shape 23"/>
-          <p:cNvSpPr/>
-          <p:nvPr/>
-        </p:nvSpPr>
-        <p:spPr>
-          <a:xfrm>
-            <a:off x="9610344" y="3337560"/>
-            <a:ext cx="164592" cy="0"/>
-          </a:xfrm>
-          <a:prstGeom prst="line">
-            <a:avLst/>
-          </a:prstGeom>
-          <a:noFill/>
-          <a:ln w="20320">
-            <a:solidFill>
-              <a:srgbClr val="74889A"/>
-            </a:solidFill>
-            <a:prstDash val="solid"/>
-            <a:tailEnd type="triangle"/>
-          </a:ln>
-        </p:spPr>
-      </p:sp>
-      <p:sp>
-        <p:nvSpPr>
-          <p:cNvPr id="26" name="Shape 24"/>
-          <p:cNvSpPr/>
-          <p:nvPr/>
-        </p:nvSpPr>
-        <p:spPr>
-          <a:xfrm>
-            <a:off x="9784080" y="2651760"/>
-            <a:ext cx="1463040" cy="1371600"/>
-          </a:xfrm>
-          <a:prstGeom prst="roundRect">
-            <a:avLst>
-              <a:gd name="adj" fmla="val 5333"/>
-            </a:avLst>
-          </a:prstGeom>
-          <a:solidFill>
-            <a:srgbClr val="FFFFFF"/>
-          </a:solidFill>
-          <a:ln w="15240">
-            <a:solidFill>
-              <a:srgbClr val="4E6270"/>
-            </a:solidFill>
-            <a:prstDash val="solid"/>
-          </a:ln>
-        </p:spPr>
-      </p:sp>
-      <p:sp>
-        <p:nvSpPr>
-          <p:cNvPr id="27" name="Text 25"/>
-          <p:cNvSpPr/>
-          <p:nvPr/>
-        </p:nvSpPr>
-        <p:spPr>
-          <a:xfrm>
-            <a:off x="9738360" y="2907792"/>
-            <a:ext cx="1554480" cy="457200"/>
-          </a:xfrm>
-          <a:prstGeom prst="rect">
-            <a:avLst/>
-          </a:prstGeom>
-          <a:noFill/>
-          <a:ln/>
-        </p:spPr>
-        <p:txBody>
-          <a:bodyPr wrap="square" lIns="0" tIns="0" rIns="0" bIns="0" rtlCol="0" anchor="ctr"/>
-          <a:lstStyle/>
-          <a:p>
-            <a:pPr algn="ctr" indent="0" marL="0">
-              <a:buNone/>
-            </a:pPr>
-            <a:r>
-              <a:rPr lang="en-US" sz="1250" b="1" dirty="0">
-                <a:solidFill>
-                  <a:srgbClr val="1F272D"/>
-                </a:solidFill>
-                <a:latin typeface="Calibri" pitchFamily="34" charset="0"/>
-                <a:ea typeface="Calibri" pitchFamily="34" charset="-122"/>
-                <a:cs typeface="Calibri" pitchFamily="34" charset="-120"/>
-              </a:rPr>
-              <a:t>API GW + S3</a:t>
-            </a:r>
-            <a:endParaRPr lang="en-US" sz="1250" dirty="0"/>
-          </a:p>
-        </p:txBody>
-      </p:sp>
-      <p:sp>
-        <p:nvSpPr>
-          <p:cNvPr id="28" name="Text 26"/>
-          <p:cNvSpPr/>
-          <p:nvPr/>
-        </p:nvSpPr>
-        <p:spPr>
-          <a:xfrm>
-            <a:off x="9765792" y="3401568"/>
-            <a:ext cx="1499616" cy="457200"/>
-          </a:xfrm>
-          <a:prstGeom prst="rect">
-            <a:avLst/>
-          </a:prstGeom>
-          <a:noFill/>
-          <a:ln/>
-        </p:spPr>
-        <p:txBody>
-          <a:bodyPr wrap="square" lIns="0" tIns="0" rIns="0" bIns="0" rtlCol="0" anchor="ctr"/>
-          <a:lstStyle/>
-          <a:p>
-            <a:pPr algn="ctr" indent="0" marL="0">
-              <a:buNone/>
-            </a:pPr>
-            <a:r>
-              <a:rPr lang="en-US" sz="900" dirty="0">
-                <a:solidFill>
-                  <a:srgbClr val="626E78"/>
-                </a:solidFill>
-                <a:latin typeface="Calibri" pitchFamily="34" charset="0"/>
-                <a:ea typeface="Calibri" pitchFamily="34" charset="-122"/>
-                <a:cs typeface="Calibri" pitchFamily="34" charset="-120"/>
-              </a:rPr>
-              <a:t>fleet dashboard</a:t>
-            </a:r>
-            <a:endParaRPr lang="en-US" sz="900" dirty="0"/>
-          </a:p>
-        </p:txBody>
-      </p:sp>
-      <p:sp>
-        <p:nvSpPr>
-          <p:cNvPr id="29" name="Text 27"/>
+          <p:cNvPr id="32" name="Text 30"/>
           <p:cNvSpPr/>
           <p:nvPr/>
         </p:nvSpPr>
@@ -3109,24 +3125,59 @@
       </p:sp>
       <p:sp>
         <p:nvSpPr>
-          <p:cNvPr id="3" name="Shape 1"/>
-          <p:cNvSpPr/>
-          <p:nvPr/>
-        </p:nvSpPr>
-        <p:spPr>
-          <a:xfrm>
-            <a:off x="731520" y="1920240"/>
-            <a:ext cx="10698480" cy="1965960"/>
-          </a:xfrm>
-          <a:prstGeom prst="roundRect">
-            <a:avLst>
-              <a:gd name="adj" fmla="val 4651"/>
-            </a:avLst>
-          </a:prstGeom>
-          <a:solidFill>
-            <a:srgbClr val="EFF2F4"/>
-          </a:solidFill>
-          <a:ln w="19050">
+          <p:cNvPr id="3" name="Text 1"/>
+          <p:cNvSpPr/>
+          <p:nvPr/>
+        </p:nvSpPr>
+        <p:spPr>
+          <a:xfrm>
+            <a:off x="731520" y="1965960"/>
+            <a:ext cx="2377440" cy="548640"/>
+          </a:xfrm>
+          <a:prstGeom prst="rect">
+            <a:avLst/>
+          </a:prstGeom>
+          <a:noFill/>
+          <a:ln/>
+        </p:spPr>
+        <p:txBody>
+          <a:bodyPr wrap="square" lIns="0" tIns="0" rIns="0" bIns="0" rtlCol="0" anchor="ctr"/>
+          <a:lstStyle/>
+          <a:p>
+            <a:pPr indent="0" marL="0">
+              <a:buNone/>
+            </a:pPr>
+            <a:r>
+              <a:rPr lang="en-US" sz="2300" b="1" dirty="0">
+                <a:solidFill>
+                  <a:srgbClr val="F0A500"/>
+                </a:solidFill>
+                <a:latin typeface="Century Schoolbook" pitchFamily="34" charset="0"/>
+                <a:ea typeface="Century Schoolbook" pitchFamily="34" charset="-122"/>
+                <a:cs typeface="Century Schoolbook" pitchFamily="34" charset="-120"/>
+              </a:rPr>
+              <a:t>Problem</a:t>
+            </a:r>
+            <a:endParaRPr lang="en-US" sz="2300" dirty="0"/>
+          </a:p>
+        </p:txBody>
+      </p:sp>
+      <p:sp>
+        <p:nvSpPr>
+          <p:cNvPr id="4" name="Shape 2"/>
+          <p:cNvSpPr/>
+          <p:nvPr/>
+        </p:nvSpPr>
+        <p:spPr>
+          <a:xfrm>
+            <a:off x="3200400" y="1920240"/>
+            <a:ext cx="0" cy="1783080"/>
+          </a:xfrm>
+          <a:prstGeom prst="line">
+            <a:avLst/>
+          </a:prstGeom>
+          <a:noFill/>
+          <a:ln w="31750">
             <a:solidFill>
               <a:srgbClr val="F0A500"/>
             </a:solidFill>
@@ -3136,14 +3187,14 @@
       </p:sp>
       <p:sp>
         <p:nvSpPr>
-          <p:cNvPr id="4" name="Text 2"/>
-          <p:cNvSpPr/>
-          <p:nvPr/>
-        </p:nvSpPr>
-        <p:spPr>
-          <a:xfrm>
-            <a:off x="1005840" y="2103120"/>
-            <a:ext cx="3657600" cy="457200"/>
+          <p:cNvPr id="5" name="Text 3"/>
+          <p:cNvSpPr/>
+          <p:nvPr/>
+        </p:nvSpPr>
+        <p:spPr>
+          <a:xfrm>
+            <a:off x="3474720" y="1920240"/>
+            <a:ext cx="7955280" cy="1920240"/>
           </a:xfrm>
           <a:prstGeom prst="rect">
             <a:avLst/>
@@ -3156,85 +3207,81 @@
           <a:lstStyle/>
           <a:p>
             <a:pPr indent="0" marL="0">
-              <a:buNone/>
-            </a:pPr>
-            <a:r>
-              <a:rPr lang="en-US" sz="1900" b="1" dirty="0">
-                <a:solidFill>
-                  <a:srgbClr val="F0A500"/>
+              <a:lnSpc>
+                <a:spcPct val="112000"/>
+              </a:lnSpc>
+              <a:buNone/>
+            </a:pPr>
+            <a:r>
+              <a:rPr lang="en-US" sz="1450" dirty="0">
+                <a:solidFill>
+                  <a:srgbClr val="1F272D"/>
+                </a:solidFill>
+                <a:latin typeface="Calibri" pitchFamily="34" charset="0"/>
+                <a:ea typeface="Calibri" pitchFamily="34" charset="-122"/>
+                <a:cs typeface="Calibri" pitchFamily="34" charset="-120"/>
+              </a:rPr>
+              <a:t>Every window becomes the same five numbers: count, min, max, average, latest. If every rule read the average, the overload would slip through — one overweight trip among nine ordinary ones averages out below the limit while the car is genuinely overloaded.</a:t>
+            </a:r>
+            <a:endParaRPr lang="en-US" sz="1450" dirty="0"/>
+          </a:p>
+        </p:txBody>
+      </p:sp>
+      <p:sp>
+        <p:nvSpPr>
+          <p:cNvPr id="6" name="Text 4"/>
+          <p:cNvSpPr/>
+          <p:nvPr/>
+        </p:nvSpPr>
+        <p:spPr>
+          <a:xfrm>
+            <a:off x="731520" y="4114800"/>
+            <a:ext cx="2377440" cy="548640"/>
+          </a:xfrm>
+          <a:prstGeom prst="rect">
+            <a:avLst/>
+          </a:prstGeom>
+          <a:noFill/>
+          <a:ln/>
+        </p:spPr>
+        <p:txBody>
+          <a:bodyPr wrap="square" lIns="0" tIns="0" rIns="0" bIns="0" rtlCol="0" anchor="ctr"/>
+          <a:lstStyle/>
+          <a:p>
+            <a:pPr indent="0" marL="0">
+              <a:buNone/>
+            </a:pPr>
+            <a:r>
+              <a:rPr lang="en-US" sz="2300" b="1" dirty="0">
+                <a:solidFill>
+                  <a:srgbClr val="4E6270"/>
                 </a:solidFill>
                 <a:latin typeface="Century Schoolbook" pitchFamily="34" charset="0"/>
                 <a:ea typeface="Century Schoolbook" pitchFamily="34" charset="-122"/>
                 <a:cs typeface="Century Schoolbook" pitchFamily="34" charset="-120"/>
               </a:rPr>
-              <a:t>Problem</a:t>
-            </a:r>
-            <a:endParaRPr lang="en-US" sz="1900" dirty="0"/>
-          </a:p>
-        </p:txBody>
-      </p:sp>
-      <p:sp>
-        <p:nvSpPr>
-          <p:cNvPr id="5" name="Text 3"/>
-          <p:cNvSpPr/>
-          <p:nvPr/>
-        </p:nvSpPr>
-        <p:spPr>
-          <a:xfrm>
-            <a:off x="1005840" y="2578608"/>
-            <a:ext cx="9966960" cy="1188720"/>
-          </a:xfrm>
-          <a:prstGeom prst="rect">
-            <a:avLst/>
-          </a:prstGeom>
-          <a:noFill/>
-          <a:ln/>
-        </p:spPr>
-        <p:txBody>
-          <a:bodyPr wrap="square" lIns="0" tIns="0" rIns="0" bIns="0" rtlCol="0" anchor="ctr"/>
-          <a:lstStyle/>
-          <a:p>
-            <a:pPr indent="0" marL="0">
-              <a:lnSpc>
-                <a:spcPct val="105000"/>
-              </a:lnSpc>
-              <a:buNone/>
-            </a:pPr>
-            <a:r>
-              <a:rPr lang="en-US" sz="1300" dirty="0">
-                <a:solidFill>
-                  <a:srgbClr val="1F272D"/>
-                </a:solidFill>
-                <a:latin typeface="Calibri" pitchFamily="34" charset="0"/>
-                <a:ea typeface="Calibri" pitchFamily="34" charset="-122"/>
-                <a:cs typeface="Calibri" pitchFamily="34" charset="-120"/>
-              </a:rPr>
-              <a:t>Every window becomes the same five numbers: count, min, max, average, latest. If every rule read the average, the overload would slip through — one overweight trip among nine ordinary ones averages out below the limit while the car is genuinely overloaded.</a:t>
-            </a:r>
-            <a:endParaRPr lang="en-US" sz="1300" dirty="0"/>
-          </a:p>
-        </p:txBody>
-      </p:sp>
-      <p:sp>
-        <p:nvSpPr>
-          <p:cNvPr id="6" name="Shape 4"/>
-          <p:cNvSpPr/>
-          <p:nvPr/>
-        </p:nvSpPr>
-        <p:spPr>
-          <a:xfrm>
-            <a:off x="731520" y="4041648"/>
-            <a:ext cx="10698480" cy="1965960"/>
-          </a:xfrm>
-          <a:prstGeom prst="roundRect">
-            <a:avLst>
-              <a:gd name="adj" fmla="val 4651"/>
-            </a:avLst>
-          </a:prstGeom>
-          <a:solidFill>
-            <a:srgbClr val="EFF2F4"/>
-          </a:solidFill>
-          <a:ln w="19050">
+              <a:t>Solution</a:t>
+            </a:r>
+            <a:endParaRPr lang="en-US" sz="2300" dirty="0"/>
+          </a:p>
+        </p:txBody>
+      </p:sp>
+      <p:sp>
+        <p:nvSpPr>
+          <p:cNvPr id="7" name="Shape 5"/>
+          <p:cNvSpPr/>
+          <p:nvPr/>
+        </p:nvSpPr>
+        <p:spPr>
+          <a:xfrm>
+            <a:off x="3200400" y="4069080"/>
+            <a:ext cx="0" cy="1783080"/>
+          </a:xfrm>
+          <a:prstGeom prst="line">
+            <a:avLst/>
+          </a:prstGeom>
+          <a:noFill/>
+          <a:ln w="31750">
             <a:solidFill>
               <a:srgbClr val="4E6270"/>
             </a:solidFill>
@@ -3244,53 +3291,14 @@
       </p:sp>
       <p:sp>
         <p:nvSpPr>
-          <p:cNvPr id="7" name="Text 5"/>
-          <p:cNvSpPr/>
-          <p:nvPr/>
-        </p:nvSpPr>
-        <p:spPr>
-          <a:xfrm>
-            <a:off x="1005840" y="4224528"/>
-            <a:ext cx="3657600" cy="457200"/>
-          </a:xfrm>
-          <a:prstGeom prst="rect">
-            <a:avLst/>
-          </a:prstGeom>
-          <a:noFill/>
-          <a:ln/>
-        </p:spPr>
-        <p:txBody>
-          <a:bodyPr wrap="square" lIns="0" tIns="0" rIns="0" bIns="0" rtlCol="0" anchor="ctr"/>
-          <a:lstStyle/>
-          <a:p>
-            <a:pPr indent="0" marL="0">
-              <a:buNone/>
-            </a:pPr>
-            <a:r>
-              <a:rPr lang="en-US" sz="1900" b="1" dirty="0">
-                <a:solidFill>
-                  <a:srgbClr val="4E6270"/>
-                </a:solidFill>
-                <a:latin typeface="Century Schoolbook" pitchFamily="34" charset="0"/>
-                <a:ea typeface="Century Schoolbook" pitchFamily="34" charset="-122"/>
-                <a:cs typeface="Century Schoolbook" pitchFamily="34" charset="-120"/>
-              </a:rPr>
-              <a:t>Solution</a:t>
-            </a:r>
-            <a:endParaRPr lang="en-US" sz="1900" dirty="0"/>
-          </a:p>
-        </p:txBody>
-      </p:sp>
-      <p:sp>
-        <p:nvSpPr>
           <p:cNvPr id="8" name="Text 6"/>
           <p:cNvSpPr/>
           <p:nvPr/>
         </p:nvSpPr>
         <p:spPr>
           <a:xfrm>
-            <a:off x="1005840" y="4700016"/>
-            <a:ext cx="9966960" cy="1188720"/>
+            <a:off x="3474720" y="4069080"/>
+            <a:ext cx="7955280" cy="1920240"/>
           </a:xfrm>
           <a:prstGeom prst="rect">
             <a:avLst/>
@@ -3304,12 +3312,12 @@
           <a:p>
             <a:pPr indent="0" marL="0">
               <a:lnSpc>
-                <a:spcPct val="105000"/>
+                <a:spcPct val="112000"/>
               </a:lnSpc>
               <a:buNone/>
             </a:pPr>
             <a:r>
-              <a:rPr lang="en-US" sz="1300" dirty="0">
+              <a:rPr lang="en-US" sz="1450" dirty="0">
                 <a:solidFill>
                   <a:srgbClr val="1F272D"/>
                 </a:solidFill>
@@ -3319,7 +3327,7 @@
               </a:rPr>
               <a:t>Bind each rule to the number its fault lives in: overheating, rough riding and stalling are trends, so they read the window average; overload is a single instant, so it reads the window maximum. The samplers are drift-corrected so every window covers a like span of time and the peak that trips an overload is real, not a clock artefact. A unit test fires the overload on a peak the average leaves below the limit.</a:t>
             </a:r>
-            <a:endParaRPr lang="en-US" sz="1300" dirty="0"/>
+            <a:endParaRPr lang="en-US" sz="1450" dirty="0"/>
           </a:p>
         </p:txBody>
       </p:sp>

--- a/ppt/RasoolBashaDurbesula_X24205478_elevator-escalator-fleet-monitoring.pptx
+++ b/ppt/RasoolBashaDurbesula_X24205478_elevator-escalator-fleet-monitoring.pptx
@@ -2595,14 +2595,61 @@
       </p:sp>
       <p:sp>
         <p:nvSpPr>
-          <p:cNvPr id="4" name="Text 2"/>
-          <p:cNvSpPr/>
-          <p:nvPr/>
-        </p:nvSpPr>
-        <p:spPr>
-          <a:xfrm>
-            <a:off x="640080" y="1737360"/>
-            <a:ext cx="1097280" cy="1097280"/>
+          <p:cNvPr id="4" name="Shape 2"/>
+          <p:cNvSpPr/>
+          <p:nvPr/>
+        </p:nvSpPr>
+        <p:spPr>
+          <a:xfrm>
+            <a:off x="640080" y="1828800"/>
+            <a:ext cx="10881360" cy="1371600"/>
+          </a:xfrm>
+          <a:prstGeom prst="roundRect">
+            <a:avLst>
+              <a:gd name="adj" fmla="val 6667"/>
+            </a:avLst>
+          </a:prstGeom>
+          <a:solidFill>
+            <a:srgbClr val="EFF2F4"/>
+          </a:solidFill>
+          <a:ln w="15240">
+            <a:solidFill>
+              <a:srgbClr val="4E6270"/>
+            </a:solidFill>
+            <a:prstDash val="solid"/>
+          </a:ln>
+        </p:spPr>
+      </p:sp>
+      <p:sp>
+        <p:nvSpPr>
+          <p:cNvPr id="5" name="Shape 3"/>
+          <p:cNvSpPr/>
+          <p:nvPr/>
+        </p:nvSpPr>
+        <p:spPr>
+          <a:xfrm>
+            <a:off x="960120" y="2203704"/>
+            <a:ext cx="621792" cy="621792"/>
+          </a:xfrm>
+          <a:prstGeom prst="ellipse">
+            <a:avLst/>
+          </a:prstGeom>
+          <a:solidFill>
+            <a:srgbClr val="37474F"/>
+          </a:solidFill>
+          <a:ln/>
+        </p:spPr>
+      </p:sp>
+      <p:sp>
+        <p:nvSpPr>
+          <p:cNvPr id="6" name="Text 4"/>
+          <p:cNvSpPr/>
+          <p:nvPr/>
+        </p:nvSpPr>
+        <p:spPr>
+          <a:xfrm>
+            <a:off x="960120" y="2203704"/>
+            <a:ext cx="621792" cy="621792"/>
           </a:xfrm>
           <a:prstGeom prst="rect">
             <a:avLst/>
@@ -2614,13 +2661,13 @@
           <a:bodyPr wrap="square" lIns="0" tIns="0" rIns="0" bIns="0" rtlCol="0" anchor="ctr"/>
           <a:lstStyle/>
           <a:p>
-            <a:pPr indent="0" marL="0">
+            <a:pPr algn="ctr" indent="0" marL="0">
               <a:buNone/>
             </a:pPr>
             <a:r>
-              <a:rPr lang="en-US" sz="5400" b="1" dirty="0">
+              <a:rPr lang="en-US" sz="2200" b="1" dirty="0">
                 <a:solidFill>
-                  <a:srgbClr val="EFF2F4"/>
+                  <a:srgbClr val="FFFFFF"/>
                 </a:solidFill>
                 <a:latin typeface="Century Schoolbook" pitchFamily="34" charset="0"/>
                 <a:ea typeface="Century Schoolbook" pitchFamily="34" charset="-122"/>
@@ -2628,43 +2675,20 @@
               </a:rPr>
               <a:t>1</a:t>
             </a:r>
-            <a:endParaRPr lang="en-US" sz="5400" dirty="0"/>
-          </a:p>
-        </p:txBody>
-      </p:sp>
-      <p:sp>
-        <p:nvSpPr>
-          <p:cNvPr id="5" name="Shape 3"/>
-          <p:cNvSpPr/>
-          <p:nvPr/>
-        </p:nvSpPr>
-        <p:spPr>
-          <a:xfrm>
-            <a:off x="1828800" y="1920240"/>
-            <a:ext cx="0" cy="1051560"/>
-          </a:xfrm>
-          <a:prstGeom prst="line">
-            <a:avLst/>
-          </a:prstGeom>
-          <a:noFill/>
-          <a:ln w="25400">
-            <a:solidFill>
-              <a:srgbClr val="4E6270"/>
-            </a:solidFill>
-            <a:prstDash val="solid"/>
-          </a:ln>
-        </p:spPr>
-      </p:sp>
-      <p:sp>
-        <p:nvSpPr>
-          <p:cNvPr id="6" name="Text 4"/>
-          <p:cNvSpPr/>
-          <p:nvPr/>
-        </p:nvSpPr>
-        <p:spPr>
-          <a:xfrm>
-            <a:off x="2057400" y="1874520"/>
-            <a:ext cx="9509760" cy="411480"/>
+            <a:endParaRPr lang="en-US" sz="2200" dirty="0"/>
+          </a:p>
+        </p:txBody>
+      </p:sp>
+      <p:sp>
+        <p:nvSpPr>
+          <p:cNvPr id="7" name="Text 5"/>
+          <p:cNvSpPr/>
+          <p:nvPr/>
+        </p:nvSpPr>
+        <p:spPr>
+          <a:xfrm>
+            <a:off x="1828800" y="2029968"/>
+            <a:ext cx="9418320" cy="411480"/>
           </a:xfrm>
           <a:prstGeom prst="rect">
             <a:avLst/>
@@ -2680,7 +2704,7 @@
               <a:buNone/>
             </a:pPr>
             <a:r>
-              <a:rPr lang="en-US" sz="1800" b="1" dirty="0">
+              <a:rPr lang="en-US" sz="1700" b="1" dirty="0">
                 <a:solidFill>
                   <a:srgbClr val="1F272D"/>
                 </a:solidFill>
@@ -2690,20 +2714,20 @@
               </a:rPr>
               <a:t>A meter card per signal, per tower</a:t>
             </a:r>
-            <a:endParaRPr lang="en-US" sz="1800" dirty="0"/>
-          </a:p>
-        </p:txBody>
-      </p:sp>
-      <p:sp>
-        <p:nvSpPr>
-          <p:cNvPr id="7" name="Text 5"/>
-          <p:cNvSpPr/>
-          <p:nvPr/>
-        </p:nvSpPr>
-        <p:spPr>
-          <a:xfrm>
-            <a:off x="2057400" y="2313432"/>
-            <a:ext cx="9509760" cy="822960"/>
+            <a:endParaRPr lang="en-US" sz="1700" dirty="0"/>
+          </a:p>
+        </p:txBody>
+      </p:sp>
+      <p:sp>
+        <p:nvSpPr>
+          <p:cNvPr id="8" name="Text 6"/>
+          <p:cNvSpPr/>
+          <p:nvPr/>
+        </p:nvSpPr>
+        <p:spPr>
+          <a:xfrm>
+            <a:off x="1828800" y="2450592"/>
+            <a:ext cx="9418320" cy="594360"/>
           </a:xfrm>
           <a:prstGeom prst="rect">
             <a:avLst/>
@@ -2716,10 +2740,13 @@
           <a:lstStyle/>
           <a:p>
             <a:pPr indent="0" marL="0">
+              <a:lnSpc>
+                <a:spcPct val="105000"/>
+              </a:lnSpc>
               <a:buNone/>
             </a:pPr>
             <a:r>
-              <a:rPr lang="en-US" sz="1350" dirty="0">
+              <a:rPr lang="en-US" sz="1300" dirty="0">
                 <a:solidFill>
                   <a:srgbClr val="626E78"/>
                 </a:solidFill>
@@ -2729,20 +2756,67 @@
               </a:rPr>
               <a:t>Motor temperature, door cycles, cab vibration, load weight and travel speed live for both towers with native meter bars.</a:t>
             </a:r>
-            <a:endParaRPr lang="en-US" sz="1350" dirty="0"/>
-          </a:p>
-        </p:txBody>
-      </p:sp>
-      <p:sp>
-        <p:nvSpPr>
-          <p:cNvPr id="8" name="Text 6"/>
-          <p:cNvSpPr/>
-          <p:nvPr/>
-        </p:nvSpPr>
-        <p:spPr>
-          <a:xfrm>
-            <a:off x="640080" y="3200400"/>
-            <a:ext cx="1097280" cy="1097280"/>
+            <a:endParaRPr lang="en-US" sz="1300" dirty="0"/>
+          </a:p>
+        </p:txBody>
+      </p:sp>
+      <p:sp>
+        <p:nvSpPr>
+          <p:cNvPr id="9" name="Shape 7"/>
+          <p:cNvSpPr/>
+          <p:nvPr/>
+        </p:nvSpPr>
+        <p:spPr>
+          <a:xfrm>
+            <a:off x="640080" y="3401568"/>
+            <a:ext cx="5303520" cy="2606040"/>
+          </a:xfrm>
+          <a:prstGeom prst="roundRect">
+            <a:avLst>
+              <a:gd name="adj" fmla="val 3509"/>
+            </a:avLst>
+          </a:prstGeom>
+          <a:solidFill>
+            <a:srgbClr val="EFF2F4"/>
+          </a:solidFill>
+          <a:ln w="15240">
+            <a:solidFill>
+              <a:srgbClr val="4E6270"/>
+            </a:solidFill>
+            <a:prstDash val="solid"/>
+          </a:ln>
+        </p:spPr>
+      </p:sp>
+      <p:sp>
+        <p:nvSpPr>
+          <p:cNvPr id="10" name="Shape 8"/>
+          <p:cNvSpPr/>
+          <p:nvPr/>
+        </p:nvSpPr>
+        <p:spPr>
+          <a:xfrm>
+            <a:off x="914400" y="3675888"/>
+            <a:ext cx="603504" cy="603504"/>
+          </a:xfrm>
+          <a:prstGeom prst="ellipse">
+            <a:avLst/>
+          </a:prstGeom>
+          <a:solidFill>
+            <a:srgbClr val="37474F"/>
+          </a:solidFill>
+          <a:ln/>
+        </p:spPr>
+      </p:sp>
+      <p:sp>
+        <p:nvSpPr>
+          <p:cNvPr id="11" name="Text 9"/>
+          <p:cNvSpPr/>
+          <p:nvPr/>
+        </p:nvSpPr>
+        <p:spPr>
+          <a:xfrm>
+            <a:off x="914400" y="3675888"/>
+            <a:ext cx="603504" cy="603504"/>
           </a:xfrm>
           <a:prstGeom prst="rect">
             <a:avLst/>
@@ -2754,13 +2828,13 @@
           <a:bodyPr wrap="square" lIns="0" tIns="0" rIns="0" bIns="0" rtlCol="0" anchor="ctr"/>
           <a:lstStyle/>
           <a:p>
-            <a:pPr indent="0" marL="0">
+            <a:pPr algn="ctr" indent="0" marL="0">
               <a:buNone/>
             </a:pPr>
             <a:r>
-              <a:rPr lang="en-US" sz="5400" b="1" dirty="0">
+              <a:rPr lang="en-US" sz="2200" b="1" dirty="0">
                 <a:solidFill>
-                  <a:srgbClr val="EFF2F4"/>
+                  <a:srgbClr val="FFFFFF"/>
                 </a:solidFill>
                 <a:latin typeface="Century Schoolbook" pitchFamily="34" charset="0"/>
                 <a:ea typeface="Century Schoolbook" pitchFamily="34" charset="-122"/>
@@ -2768,43 +2842,20 @@
               </a:rPr>
               <a:t>2</a:t>
             </a:r>
-            <a:endParaRPr lang="en-US" sz="5400" dirty="0"/>
-          </a:p>
-        </p:txBody>
-      </p:sp>
-      <p:sp>
-        <p:nvSpPr>
-          <p:cNvPr id="9" name="Shape 7"/>
-          <p:cNvSpPr/>
-          <p:nvPr/>
-        </p:nvSpPr>
-        <p:spPr>
-          <a:xfrm>
-            <a:off x="1828800" y="3383280"/>
-            <a:ext cx="0" cy="1051560"/>
-          </a:xfrm>
-          <a:prstGeom prst="line">
-            <a:avLst/>
-          </a:prstGeom>
-          <a:noFill/>
-          <a:ln w="25400">
-            <a:solidFill>
-              <a:srgbClr val="4E6270"/>
-            </a:solidFill>
-            <a:prstDash val="solid"/>
-          </a:ln>
-        </p:spPr>
-      </p:sp>
-      <p:sp>
-        <p:nvSpPr>
-          <p:cNvPr id="10" name="Text 8"/>
-          <p:cNvSpPr/>
-          <p:nvPr/>
-        </p:nvSpPr>
-        <p:spPr>
-          <a:xfrm>
-            <a:off x="2057400" y="3337560"/>
-            <a:ext cx="9509760" cy="411480"/>
+            <a:endParaRPr lang="en-US" sz="2200" dirty="0"/>
+          </a:p>
+        </p:txBody>
+      </p:sp>
+      <p:sp>
+        <p:nvSpPr>
+          <p:cNvPr id="12" name="Text 10"/>
+          <p:cNvSpPr/>
+          <p:nvPr/>
+        </p:nvSpPr>
+        <p:spPr>
+          <a:xfrm>
+            <a:off x="914400" y="4425696"/>
+            <a:ext cx="4754880" cy="777240"/>
           </a:xfrm>
           <a:prstGeom prst="rect">
             <a:avLst/>
@@ -2820,7 +2871,7 @@
               <a:buNone/>
             </a:pPr>
             <a:r>
-              <a:rPr lang="en-US" sz="1800" b="1" dirty="0">
+              <a:rPr lang="en-US" sz="1600" b="1" dirty="0">
                 <a:solidFill>
                   <a:srgbClr val="1F272D"/>
                 </a:solidFill>
@@ -2830,20 +2881,20 @@
               </a:rPr>
               <a:t>Two faults at opposite ends of time</a:t>
             </a:r>
-            <a:endParaRPr lang="en-US" sz="1800" dirty="0"/>
-          </a:p>
-        </p:txBody>
-      </p:sp>
-      <p:sp>
-        <p:nvSpPr>
-          <p:cNvPr id="11" name="Text 9"/>
-          <p:cNvSpPr/>
-          <p:nvPr/>
-        </p:nvSpPr>
-        <p:spPr>
-          <a:xfrm>
-            <a:off x="2057400" y="3776472"/>
-            <a:ext cx="9509760" cy="822960"/>
+            <a:endParaRPr lang="en-US" sz="1600" dirty="0"/>
+          </a:p>
+        </p:txBody>
+      </p:sp>
+      <p:sp>
+        <p:nvSpPr>
+          <p:cNvPr id="13" name="Text 11"/>
+          <p:cNvSpPr/>
+          <p:nvPr/>
+        </p:nvSpPr>
+        <p:spPr>
+          <a:xfrm>
+            <a:off x="914400" y="5184648"/>
+            <a:ext cx="4754880" cy="640080"/>
           </a:xfrm>
           <a:prstGeom prst="rect">
             <a:avLst/>
@@ -2856,10 +2907,13 @@
           <a:lstStyle/>
           <a:p>
             <a:pPr indent="0" marL="0">
+              <a:lnSpc>
+                <a:spcPct val="106000"/>
+              </a:lnSpc>
               <a:buNone/>
             </a:pPr>
             <a:r>
-              <a:rPr lang="en-US" sz="1350" dirty="0">
+              <a:rPr lang="en-US" sz="1250" dirty="0">
                 <a:solidFill>
                   <a:srgbClr val="626E78"/>
                 </a:solidFill>
@@ -2869,20 +2923,67 @@
               </a:rPr>
               <a:t>Tower-B is firing a ride-quality fault (a drift, read on the average) and an overload warning (an instant, read on the peak) at once.</a:t>
             </a:r>
-            <a:endParaRPr lang="en-US" sz="1350" dirty="0"/>
-          </a:p>
-        </p:txBody>
-      </p:sp>
-      <p:sp>
-        <p:nvSpPr>
-          <p:cNvPr id="12" name="Text 10"/>
-          <p:cNvSpPr/>
-          <p:nvPr/>
-        </p:nvSpPr>
-        <p:spPr>
-          <a:xfrm>
-            <a:off x="640080" y="4663440"/>
-            <a:ext cx="1097280" cy="1097280"/>
+            <a:endParaRPr lang="en-US" sz="1250" dirty="0"/>
+          </a:p>
+        </p:txBody>
+      </p:sp>
+      <p:sp>
+        <p:nvSpPr>
+          <p:cNvPr id="14" name="Shape 12"/>
+          <p:cNvSpPr/>
+          <p:nvPr/>
+        </p:nvSpPr>
+        <p:spPr>
+          <a:xfrm>
+            <a:off x="6217920" y="3401568"/>
+            <a:ext cx="5303520" cy="2606040"/>
+          </a:xfrm>
+          <a:prstGeom prst="roundRect">
+            <a:avLst>
+              <a:gd name="adj" fmla="val 3509"/>
+            </a:avLst>
+          </a:prstGeom>
+          <a:solidFill>
+            <a:srgbClr val="EFF2F4"/>
+          </a:solidFill>
+          <a:ln w="15240">
+            <a:solidFill>
+              <a:srgbClr val="4E6270"/>
+            </a:solidFill>
+            <a:prstDash val="solid"/>
+          </a:ln>
+        </p:spPr>
+      </p:sp>
+      <p:sp>
+        <p:nvSpPr>
+          <p:cNvPr id="15" name="Shape 13"/>
+          <p:cNvSpPr/>
+          <p:nvPr/>
+        </p:nvSpPr>
+        <p:spPr>
+          <a:xfrm>
+            <a:off x="6492240" y="3675888"/>
+            <a:ext cx="603504" cy="603504"/>
+          </a:xfrm>
+          <a:prstGeom prst="ellipse">
+            <a:avLst/>
+          </a:prstGeom>
+          <a:solidFill>
+            <a:srgbClr val="37474F"/>
+          </a:solidFill>
+          <a:ln/>
+        </p:spPr>
+      </p:sp>
+      <p:sp>
+        <p:nvSpPr>
+          <p:cNvPr id="16" name="Text 14"/>
+          <p:cNvSpPr/>
+          <p:nvPr/>
+        </p:nvSpPr>
+        <p:spPr>
+          <a:xfrm>
+            <a:off x="6492240" y="3675888"/>
+            <a:ext cx="603504" cy="603504"/>
           </a:xfrm>
           <a:prstGeom prst="rect">
             <a:avLst/>
@@ -2894,13 +2995,13 @@
           <a:bodyPr wrap="square" lIns="0" tIns="0" rIns="0" bIns="0" rtlCol="0" anchor="ctr"/>
           <a:lstStyle/>
           <a:p>
-            <a:pPr indent="0" marL="0">
+            <a:pPr algn="ctr" indent="0" marL="0">
               <a:buNone/>
             </a:pPr>
             <a:r>
-              <a:rPr lang="en-US" sz="5400" b="1" dirty="0">
+              <a:rPr lang="en-US" sz="2200" b="1" dirty="0">
                 <a:solidFill>
-                  <a:srgbClr val="EFF2F4"/>
+                  <a:srgbClr val="FFFFFF"/>
                 </a:solidFill>
                 <a:latin typeface="Century Schoolbook" pitchFamily="34" charset="0"/>
                 <a:ea typeface="Century Schoolbook" pitchFamily="34" charset="-122"/>
@@ -2908,43 +3009,20 @@
               </a:rPr>
               <a:t>3</a:t>
             </a:r>
-            <a:endParaRPr lang="en-US" sz="5400" dirty="0"/>
-          </a:p>
-        </p:txBody>
-      </p:sp>
-      <p:sp>
-        <p:nvSpPr>
-          <p:cNvPr id="13" name="Shape 11"/>
-          <p:cNvSpPr/>
-          <p:nvPr/>
-        </p:nvSpPr>
-        <p:spPr>
-          <a:xfrm>
-            <a:off x="1828800" y="4846320"/>
-            <a:ext cx="0" cy="1051560"/>
-          </a:xfrm>
-          <a:prstGeom prst="line">
-            <a:avLst/>
-          </a:prstGeom>
-          <a:noFill/>
-          <a:ln w="25400">
-            <a:solidFill>
-              <a:srgbClr val="4E6270"/>
-            </a:solidFill>
-            <a:prstDash val="solid"/>
-          </a:ln>
-        </p:spPr>
-      </p:sp>
-      <p:sp>
-        <p:nvSpPr>
-          <p:cNvPr id="14" name="Text 12"/>
-          <p:cNvSpPr/>
-          <p:nvPr/>
-        </p:nvSpPr>
-        <p:spPr>
-          <a:xfrm>
-            <a:off x="2057400" y="4800600"/>
-            <a:ext cx="9509760" cy="411480"/>
+            <a:endParaRPr lang="en-US" sz="2200" dirty="0"/>
+          </a:p>
+        </p:txBody>
+      </p:sp>
+      <p:sp>
+        <p:nvSpPr>
+          <p:cNvPr id="17" name="Text 15"/>
+          <p:cNvSpPr/>
+          <p:nvPr/>
+        </p:nvSpPr>
+        <p:spPr>
+          <a:xfrm>
+            <a:off x="6492240" y="4425696"/>
+            <a:ext cx="4754880" cy="777240"/>
           </a:xfrm>
           <a:prstGeom prst="rect">
             <a:avLst/>
@@ -2960,7 +3038,7 @@
               <a:buNone/>
             </a:pPr>
             <a:r>
-              <a:rPr lang="en-US" sz="1800" b="1" dirty="0">
+              <a:rPr lang="en-US" sz="1600" b="1" dirty="0">
                 <a:solidFill>
                   <a:srgbClr val="1F272D"/>
                 </a:solidFill>
@@ -2970,20 +3048,20 @@
               </a:rPr>
               <a:t>Window-average trend charts</a:t>
             </a:r>
-            <a:endParaRPr lang="en-US" sz="1800" dirty="0"/>
-          </a:p>
-        </p:txBody>
-      </p:sp>
-      <p:sp>
-        <p:nvSpPr>
-          <p:cNvPr id="15" name="Text 13"/>
-          <p:cNvSpPr/>
-          <p:nvPr/>
-        </p:nvSpPr>
-        <p:spPr>
-          <a:xfrm>
-            <a:off x="2057400" y="5239512"/>
-            <a:ext cx="9509760" cy="822960"/>
+            <a:endParaRPr lang="en-US" sz="1600" dirty="0"/>
+          </a:p>
+        </p:txBody>
+      </p:sp>
+      <p:sp>
+        <p:nvSpPr>
+          <p:cNvPr id="18" name="Text 16"/>
+          <p:cNvSpPr/>
+          <p:nvPr/>
+        </p:nvSpPr>
+        <p:spPr>
+          <a:xfrm>
+            <a:off x="6492240" y="5184648"/>
+            <a:ext cx="4754880" cy="640080"/>
           </a:xfrm>
           <a:prstGeom prst="rect">
             <a:avLst/>
@@ -2996,10 +3074,13 @@
           <a:lstStyle/>
           <a:p>
             <a:pPr indent="0" marL="0">
+              <a:lnSpc>
+                <a:spcPct val="106000"/>
+              </a:lnSpc>
               <a:buNone/>
             </a:pPr>
             <a:r>
-              <a:rPr lang="en-US" sz="1350" dirty="0">
+              <a:rPr lang="en-US" sz="1250" dirty="0">
                 <a:solidFill>
                   <a:srgbClr val="626E78"/>
                 </a:solidFill>
@@ -3009,46 +3090,7 @@
               </a:rPr>
               <a:t>Five trend charts run per tower, so a slowly overheating motor is visible on the trend well before it alarms.</a:t>
             </a:r>
-            <a:endParaRPr lang="en-US" sz="1350" dirty="0"/>
-          </a:p>
-        </p:txBody>
-      </p:sp>
-      <p:sp>
-        <p:nvSpPr>
-          <p:cNvPr id="16" name="Text 14"/>
-          <p:cNvSpPr/>
-          <p:nvPr/>
-        </p:nvSpPr>
-        <p:spPr>
-          <a:xfrm>
-            <a:off x="640080" y="6309360"/>
-            <a:ext cx="10972800" cy="365760"/>
-          </a:xfrm>
-          <a:prstGeom prst="rect">
-            <a:avLst/>
-          </a:prstGeom>
-          <a:noFill/>
-          <a:ln/>
-        </p:spPr>
-        <p:txBody>
-          <a:bodyPr wrap="square" rtlCol="0" anchor="ctr"/>
-          <a:lstStyle/>
-          <a:p>
-            <a:pPr indent="0" marL="0">
-              <a:buNone/>
-            </a:pPr>
-            <a:r>
-              <a:rPr lang="en-US" sz="1300" i="1" dirty="0">
-                <a:solidFill>
-                  <a:srgbClr val="74889A"/>
-                </a:solidFill>
-                <a:latin typeface="Calibri" pitchFamily="34" charset="0"/>
-                <a:ea typeface="Calibri" pitchFamily="34" charset="-122"/>
-                <a:cs typeface="Calibri" pitchFamily="34" charset="-120"/>
-              </a:rPr>
-              <a:t>Switch to the live dashboard here — backup video ready.</a:t>
-            </a:r>
-            <a:endParaRPr lang="en-US" sz="1300" dirty="0"/>
+            <a:endParaRPr lang="en-US" sz="1250" dirty="0"/>
           </a:p>
         </p:txBody>
       </p:sp>
@@ -3125,14 +3167,41 @@
       </p:sp>
       <p:sp>
         <p:nvSpPr>
-          <p:cNvPr id="3" name="Text 1"/>
-          <p:cNvSpPr/>
-          <p:nvPr/>
-        </p:nvSpPr>
-        <p:spPr>
-          <a:xfrm>
-            <a:off x="731520" y="1965960"/>
-            <a:ext cx="2377440" cy="548640"/>
+          <p:cNvPr id="3" name="Shape 1"/>
+          <p:cNvSpPr/>
+          <p:nvPr/>
+        </p:nvSpPr>
+        <p:spPr>
+          <a:xfrm>
+            <a:off x="640080" y="1874520"/>
+            <a:ext cx="4937760" cy="4160520"/>
+          </a:xfrm>
+          <a:prstGeom prst="roundRect">
+            <a:avLst>
+              <a:gd name="adj" fmla="val 2198"/>
+            </a:avLst>
+          </a:prstGeom>
+          <a:solidFill>
+            <a:srgbClr val="EFF2F4"/>
+          </a:solidFill>
+          <a:ln w="19050">
+            <a:solidFill>
+              <a:srgbClr val="F0A500"/>
+            </a:solidFill>
+            <a:prstDash val="solid"/>
+          </a:ln>
+        </p:spPr>
+      </p:sp>
+      <p:sp>
+        <p:nvSpPr>
+          <p:cNvPr id="4" name="Text 2"/>
+          <p:cNvSpPr/>
+          <p:nvPr/>
+        </p:nvSpPr>
+        <p:spPr>
+          <a:xfrm>
+            <a:off x="960120" y="2103120"/>
+            <a:ext cx="3657600" cy="457200"/>
           </a:xfrm>
           <a:prstGeom prst="rect">
             <a:avLst/>
@@ -3148,7 +3217,7 @@
               <a:buNone/>
             </a:pPr>
             <a:r>
-              <a:rPr lang="en-US" sz="2300" b="1" dirty="0">
+              <a:rPr lang="en-US" sz="1900" b="1" dirty="0">
                 <a:solidFill>
                   <a:srgbClr val="F0A500"/>
                 </a:solidFill>
@@ -3158,32 +3227,9 @@
               </a:rPr>
               <a:t>Problem</a:t>
             </a:r>
-            <a:endParaRPr lang="en-US" sz="2300" dirty="0"/>
-          </a:p>
-        </p:txBody>
-      </p:sp>
-      <p:sp>
-        <p:nvSpPr>
-          <p:cNvPr id="4" name="Shape 2"/>
-          <p:cNvSpPr/>
-          <p:nvPr/>
-        </p:nvSpPr>
-        <p:spPr>
-          <a:xfrm>
-            <a:off x="3200400" y="1920240"/>
-            <a:ext cx="0" cy="1783080"/>
-          </a:xfrm>
-          <a:prstGeom prst="line">
-            <a:avLst/>
-          </a:prstGeom>
-          <a:noFill/>
-          <a:ln w="31750">
-            <a:solidFill>
-              <a:srgbClr val="F0A500"/>
-            </a:solidFill>
-            <a:prstDash val="solid"/>
-          </a:ln>
-        </p:spPr>
+            <a:endParaRPr lang="en-US" sz="1900" dirty="0"/>
+          </a:p>
+        </p:txBody>
       </p:sp>
       <p:sp>
         <p:nvSpPr>
@@ -3193,8 +3239,8 @@
         </p:nvSpPr>
         <p:spPr>
           <a:xfrm>
-            <a:off x="3474720" y="1920240"/>
-            <a:ext cx="7955280" cy="1920240"/>
+            <a:off x="960120" y="2651760"/>
+            <a:ext cx="4343400" cy="3200400"/>
           </a:xfrm>
           <a:prstGeom prst="rect">
             <a:avLst/>
@@ -3213,7 +3259,7 @@
               <a:buNone/>
             </a:pPr>
             <a:r>
-              <a:rPr lang="en-US" sz="1450" dirty="0">
+              <a:rPr lang="en-US" sz="1350" dirty="0">
                 <a:solidFill>
                   <a:srgbClr val="1F272D"/>
                 </a:solidFill>
@@ -3223,20 +3269,47 @@
               </a:rPr>
               <a:t>Every window becomes the same five numbers: count, min, max, average, latest. If every rule read the average, the overload would slip through — one overweight trip among nine ordinary ones averages out below the limit while the car is genuinely overloaded.</a:t>
             </a:r>
-            <a:endParaRPr lang="en-US" sz="1450" dirty="0"/>
-          </a:p>
-        </p:txBody>
-      </p:sp>
-      <p:sp>
-        <p:nvSpPr>
-          <p:cNvPr id="6" name="Text 4"/>
-          <p:cNvSpPr/>
-          <p:nvPr/>
-        </p:nvSpPr>
-        <p:spPr>
-          <a:xfrm>
-            <a:off x="731520" y="4114800"/>
-            <a:ext cx="2377440" cy="548640"/>
+            <a:endParaRPr lang="en-US" sz="1350" dirty="0"/>
+          </a:p>
+        </p:txBody>
+      </p:sp>
+      <p:sp>
+        <p:nvSpPr>
+          <p:cNvPr id="6" name="Shape 4"/>
+          <p:cNvSpPr/>
+          <p:nvPr/>
+        </p:nvSpPr>
+        <p:spPr>
+          <a:xfrm>
+            <a:off x="6611112" y="1874520"/>
+            <a:ext cx="4937760" cy="4160520"/>
+          </a:xfrm>
+          <a:prstGeom prst="roundRect">
+            <a:avLst>
+              <a:gd name="adj" fmla="val 2198"/>
+            </a:avLst>
+          </a:prstGeom>
+          <a:solidFill>
+            <a:srgbClr val="EFF2F4"/>
+          </a:solidFill>
+          <a:ln w="19050">
+            <a:solidFill>
+              <a:srgbClr val="4E6270"/>
+            </a:solidFill>
+            <a:prstDash val="solid"/>
+          </a:ln>
+        </p:spPr>
+      </p:sp>
+      <p:sp>
+        <p:nvSpPr>
+          <p:cNvPr id="7" name="Text 5"/>
+          <p:cNvSpPr/>
+          <p:nvPr/>
+        </p:nvSpPr>
+        <p:spPr>
+          <a:xfrm>
+            <a:off x="6931152" y="2103120"/>
+            <a:ext cx="3657600" cy="457200"/>
           </a:xfrm>
           <a:prstGeom prst="rect">
             <a:avLst/>
@@ -3252,7 +3325,7 @@
               <a:buNone/>
             </a:pPr>
             <a:r>
-              <a:rPr lang="en-US" sz="2300" b="1" dirty="0">
+              <a:rPr lang="en-US" sz="1900" b="1" dirty="0">
                 <a:solidFill>
                   <a:srgbClr val="4E6270"/>
                 </a:solidFill>
@@ -3262,32 +3335,9 @@
               </a:rPr>
               <a:t>Solution</a:t>
             </a:r>
-            <a:endParaRPr lang="en-US" sz="2300" dirty="0"/>
-          </a:p>
-        </p:txBody>
-      </p:sp>
-      <p:sp>
-        <p:nvSpPr>
-          <p:cNvPr id="7" name="Shape 5"/>
-          <p:cNvSpPr/>
-          <p:nvPr/>
-        </p:nvSpPr>
-        <p:spPr>
-          <a:xfrm>
-            <a:off x="3200400" y="4069080"/>
-            <a:ext cx="0" cy="1783080"/>
-          </a:xfrm>
-          <a:prstGeom prst="line">
-            <a:avLst/>
-          </a:prstGeom>
-          <a:noFill/>
-          <a:ln w="31750">
-            <a:solidFill>
-              <a:srgbClr val="4E6270"/>
-            </a:solidFill>
-            <a:prstDash val="solid"/>
-          </a:ln>
-        </p:spPr>
+            <a:endParaRPr lang="en-US" sz="1900" dirty="0"/>
+          </a:p>
+        </p:txBody>
       </p:sp>
       <p:sp>
         <p:nvSpPr>
@@ -3297,8 +3347,8 @@
         </p:nvSpPr>
         <p:spPr>
           <a:xfrm>
-            <a:off x="3474720" y="4069080"/>
-            <a:ext cx="7955280" cy="1920240"/>
+            <a:off x="6931152" y="2651760"/>
+            <a:ext cx="4343400" cy="3200400"/>
           </a:xfrm>
           <a:prstGeom prst="rect">
             <a:avLst/>
@@ -3317,7 +3367,7 @@
               <a:buNone/>
             </a:pPr>
             <a:r>
-              <a:rPr lang="en-US" sz="1450" dirty="0">
+              <a:rPr lang="en-US" sz="1350" dirty="0">
                 <a:solidFill>
                   <a:srgbClr val="1F272D"/>
                 </a:solidFill>
@@ -3327,9 +3377,29 @@
               </a:rPr>
               <a:t>Bind each rule to the number its fault lives in: overheating, rough riding and stalling are trends, so they read the window average; overload is a single instant, so it reads the window maximum. The samplers are drift-corrected so every window covers a like span of time and the peak that trips an overload is real, not a clock artefact. A unit test fires the overload on a peak the average leaves below the limit.</a:t>
             </a:r>
-            <a:endParaRPr lang="en-US" sz="1450" dirty="0"/>
-          </a:p>
-        </p:txBody>
+            <a:endParaRPr lang="en-US" sz="1350" dirty="0"/>
+          </a:p>
+        </p:txBody>
+      </p:sp>
+      <p:sp>
+        <p:nvSpPr>
+          <p:cNvPr id="9" name="Shape 7"/>
+          <p:cNvSpPr/>
+          <p:nvPr/>
+        </p:nvSpPr>
+        <p:spPr>
+          <a:xfrm>
+            <a:off x="5669280" y="3703320"/>
+            <a:ext cx="841248" cy="512064"/>
+          </a:xfrm>
+          <a:prstGeom prst="rightArrow">
+            <a:avLst/>
+          </a:prstGeom>
+          <a:solidFill>
+            <a:srgbClr val="37474F"/>
+          </a:solidFill>
+          <a:ln/>
+        </p:spPr>
       </p:sp>
     </p:spTree>
   </p:cSld>

--- a/ppt/RasoolBashaDurbesula_X24205478_elevator-escalator-fleet-monitoring.pptx
+++ b/ppt/RasoolBashaDurbesula_X24205478_elevator-escalator-fleet-monitoring.pptx
@@ -1124,7 +1124,7 @@
     <p:bg>
       <p:bgPr>
         <a:solidFill>
-          <a:srgbClr val="222A30"/>
+          <a:srgbClr val="FFFFFF"/>
         </a:solidFill>
       </p:bgPr>
     </p:bg>
@@ -1169,7 +1169,7 @@
             <a:r>
               <a:rPr lang="en-US" sz="3600" b="1" dirty="0">
                 <a:solidFill>
-                  <a:srgbClr val="FFFFFF"/>
+                  <a:srgbClr val="1F272D"/>
                 </a:solidFill>
                 <a:latin typeface="Century Schoolbook" pitchFamily="34" charset="0"/>
                 <a:ea typeface="Century Schoolbook" pitchFamily="34" charset="-122"/>
@@ -1208,7 +1208,7 @@
             <a:r>
               <a:rPr lang="en-US" sz="1600" dirty="0">
                 <a:solidFill>
-                  <a:srgbClr val="74889A"/>
+                  <a:srgbClr val="4E6270"/>
                 </a:solidFill>
                 <a:latin typeface="Calibri" pitchFamily="34" charset="0"/>
                 <a:ea typeface="Calibri" pitchFamily="34" charset="-122"/>
@@ -1250,7 +1250,7 @@
             <a:r>
               <a:rPr lang="en-US" sz="2000" dirty="0">
                 <a:solidFill>
-                  <a:srgbClr val="D3DBE0"/>
+                  <a:srgbClr val="1F272D"/>
                 </a:solidFill>
                 <a:latin typeface="Calibri" pitchFamily="34" charset="0"/>
                 <a:ea typeface="Calibri" pitchFamily="34" charset="-122"/>
@@ -1279,14 +1279,9 @@
             </a:avLst>
           </a:prstGeom>
           <a:solidFill>
-            <a:srgbClr val="2A343B"/>
-          </a:solidFill>
-          <a:ln w="12700">
-            <a:solidFill>
-              <a:srgbClr val="F0A500"/>
-            </a:solidFill>
-            <a:prstDash val="solid"/>
-          </a:ln>
+            <a:srgbClr val="74889A"/>
+          </a:solidFill>
+          <a:ln/>
         </p:spPr>
       </p:sp>
       <p:sp>
@@ -1316,7 +1311,7 @@
             <a:r>
               <a:rPr lang="en-US" sz="1350" b="1" dirty="0">
                 <a:solidFill>
-                  <a:srgbClr val="F0A500"/>
+                  <a:srgbClr val="FFFFFF"/>
                 </a:solidFill>
                 <a:latin typeface="Calibri" pitchFamily="34" charset="0"/>
                 <a:ea typeface="Calibri" pitchFamily="34" charset="-122"/>
@@ -1345,14 +1340,9 @@
             </a:avLst>
           </a:prstGeom>
           <a:solidFill>
-            <a:srgbClr val="2A343B"/>
-          </a:solidFill>
-          <a:ln w="12700">
-            <a:solidFill>
-              <a:srgbClr val="F0A500"/>
-            </a:solidFill>
-            <a:prstDash val="solid"/>
-          </a:ln>
+            <a:srgbClr val="74889A"/>
+          </a:solidFill>
+          <a:ln/>
         </p:spPr>
       </p:sp>
       <p:sp>
@@ -1382,7 +1372,7 @@
             <a:r>
               <a:rPr lang="en-US" sz="1350" b="1" dirty="0">
                 <a:solidFill>
-                  <a:srgbClr val="F0A500"/>
+                  <a:srgbClr val="FFFFFF"/>
                 </a:solidFill>
                 <a:latin typeface="Calibri" pitchFamily="34" charset="0"/>
                 <a:ea typeface="Calibri" pitchFamily="34" charset="-122"/>
@@ -1411,14 +1401,9 @@
             </a:avLst>
           </a:prstGeom>
           <a:solidFill>
-            <a:srgbClr val="2A343B"/>
-          </a:solidFill>
-          <a:ln w="12700">
-            <a:solidFill>
-              <a:srgbClr val="F0A500"/>
-            </a:solidFill>
-            <a:prstDash val="solid"/>
-          </a:ln>
+            <a:srgbClr val="74889A"/>
+          </a:solidFill>
+          <a:ln/>
         </p:spPr>
       </p:sp>
       <p:sp>
@@ -1448,7 +1433,7 @@
             <a:r>
               <a:rPr lang="en-US" sz="1350" b="1" dirty="0">
                 <a:solidFill>
-                  <a:srgbClr val="F0A500"/>
+                  <a:srgbClr val="FFFFFF"/>
                 </a:solidFill>
                 <a:latin typeface="Calibri" pitchFamily="34" charset="0"/>
                 <a:ea typeface="Calibri" pitchFamily="34" charset="-122"/>
@@ -1484,17 +1469,6 @@
             <a:pPr algn="ctr" indent="0" marL="0">
               <a:buNone/>
             </a:pPr>
-            <a:r>
-              <a:rPr lang="en-US" sz="1300" dirty="0">
-                <a:solidFill>
-                  <a:srgbClr val="626E78"/>
-                </a:solidFill>
-                <a:latin typeface="Calibri" pitchFamily="34" charset="0"/>
-                <a:ea typeface="Calibri" pitchFamily="34" charset="-122"/>
-                <a:cs typeface="Calibri" pitchFamily="34" charset="-120"/>
-              </a:rPr>
-              <a:t>Fog &amp; Edge Computing (H9FECC)   ·   deployed live on AWS</a:t>
-            </a:r>
             <a:endParaRPr lang="en-US" sz="1300" dirty="0"/>
           </a:p>
         </p:txBody>

--- a/ppt/RasoolBashaDurbesula_X24205478_elevator-escalator-fleet-monitoring.pptx
+++ b/ppt/RasoolBashaDurbesula_X24205478_elevator-escalator-fleet-monitoring.pptx
@@ -1124,7 +1124,7 @@
     <p:bg>
       <p:bgPr>
         <a:solidFill>
-          <a:srgbClr val="FFFFFF"/>
+          <a:srgbClr val="17181A"/>
         </a:solidFill>
       </p:bgPr>
     </p:bg>
@@ -1144,14 +1144,148 @@
       </p:grpSpPr>
       <p:sp>
         <p:nvSpPr>
-          <p:cNvPr id="2" name="Text 0"/>
-          <p:cNvSpPr/>
-          <p:nvPr/>
-        </p:nvSpPr>
-        <p:spPr>
-          <a:xfrm>
-            <a:off x="548640" y="1051560"/>
-            <a:ext cx="11064240" cy="1188720"/>
+          <p:cNvPr id="2" name="Shape 0"/>
+          <p:cNvSpPr/>
+          <p:nvPr/>
+        </p:nvSpPr>
+        <p:spPr>
+          <a:xfrm>
+            <a:off x="10911535" y="457200"/>
+            <a:ext cx="822960" cy="0"/>
+          </a:xfrm>
+          <a:prstGeom prst="line">
+            <a:avLst/>
+          </a:prstGeom>
+          <a:noFill/>
+          <a:ln w="25400">
+            <a:solidFill>
+              <a:srgbClr val="FFCC00"/>
+            </a:solidFill>
+            <a:prstDash val="solid"/>
+          </a:ln>
+        </p:spPr>
+      </p:sp>
+      <p:sp>
+        <p:nvSpPr>
+          <p:cNvPr id="3" name="Shape 1"/>
+          <p:cNvSpPr/>
+          <p:nvPr/>
+        </p:nvSpPr>
+        <p:spPr>
+          <a:xfrm>
+            <a:off x="11734495" y="457200"/>
+            <a:ext cx="0" cy="822960"/>
+          </a:xfrm>
+          <a:prstGeom prst="line">
+            <a:avLst/>
+          </a:prstGeom>
+          <a:noFill/>
+          <a:ln w="25400">
+            <a:solidFill>
+              <a:srgbClr val="FFCC00"/>
+            </a:solidFill>
+            <a:prstDash val="solid"/>
+          </a:ln>
+        </p:spPr>
+      </p:sp>
+      <p:sp>
+        <p:nvSpPr>
+          <p:cNvPr id="4" name="Shape 2"/>
+          <p:cNvSpPr/>
+          <p:nvPr/>
+        </p:nvSpPr>
+        <p:spPr>
+          <a:xfrm>
+            <a:off x="457200" y="6400800"/>
+            <a:ext cx="822960" cy="0"/>
+          </a:xfrm>
+          <a:prstGeom prst="line">
+            <a:avLst/>
+          </a:prstGeom>
+          <a:noFill/>
+          <a:ln w="25400">
+            <a:solidFill>
+              <a:srgbClr val="FFCC00"/>
+            </a:solidFill>
+            <a:prstDash val="solid"/>
+          </a:ln>
+        </p:spPr>
+      </p:sp>
+      <p:sp>
+        <p:nvSpPr>
+          <p:cNvPr id="5" name="Shape 3"/>
+          <p:cNvSpPr/>
+          <p:nvPr/>
+        </p:nvSpPr>
+        <p:spPr>
+          <a:xfrm>
+            <a:off x="457200" y="5577840"/>
+            <a:ext cx="0" cy="822960"/>
+          </a:xfrm>
+          <a:prstGeom prst="line">
+            <a:avLst/>
+          </a:prstGeom>
+          <a:noFill/>
+          <a:ln w="25400">
+            <a:solidFill>
+              <a:srgbClr val="FFCC00"/>
+            </a:solidFill>
+            <a:prstDash val="solid"/>
+          </a:ln>
+        </p:spPr>
+      </p:sp>
+      <p:sp>
+        <p:nvSpPr>
+          <p:cNvPr id="6" name="Text 4"/>
+          <p:cNvSpPr/>
+          <p:nvPr/>
+        </p:nvSpPr>
+        <p:spPr>
+          <a:xfrm>
+            <a:off x="758952" y="1645920"/>
+            <a:ext cx="10637215" cy="1645920"/>
+          </a:xfrm>
+          <a:prstGeom prst="rect">
+            <a:avLst/>
+          </a:prstGeom>
+          <a:noFill/>
+          <a:ln/>
+        </p:spPr>
+        <p:txBody>
+          <a:bodyPr wrap="square" rtlCol="0" anchor="t"/>
+          <a:lstStyle/>
+          <a:p>
+            <a:pPr indent="0" marL="0">
+              <a:lnSpc>
+                <a:spcPct val="98000"/>
+              </a:lnSpc>
+              <a:buNone/>
+            </a:pPr>
+            <a:r>
+              <a:rPr lang="en-US" sz="3800" b="1" dirty="0">
+                <a:solidFill>
+                  <a:srgbClr val="ECE9DF"/>
+                </a:solidFill>
+                <a:latin typeface="Century Gothic" pitchFamily="34" charset="0"/>
+                <a:ea typeface="Century Gothic" pitchFamily="34" charset="-122"/>
+                <a:cs typeface="Century Gothic" pitchFamily="34" charset="-120"/>
+              </a:rPr>
+              <a:t>Elevator &amp; Escalator Fleet Monitoring</a:t>
+            </a:r>
+            <a:endParaRPr lang="en-US" sz="3800" dirty="0"/>
+          </a:p>
+        </p:txBody>
+      </p:sp>
+      <p:sp>
+        <p:nvSpPr>
+          <p:cNvPr id="7" name="Text 5"/>
+          <p:cNvSpPr/>
+          <p:nvPr/>
+        </p:nvSpPr>
+        <p:spPr>
+          <a:xfrm>
+            <a:off x="777240" y="3337560"/>
+            <a:ext cx="10637215" cy="365760"/>
           </a:xfrm>
           <a:prstGeom prst="rect">
             <a:avLst/>
@@ -1163,52 +1297,13 @@
           <a:bodyPr wrap="square" rtlCol="0" anchor="ctr"/>
           <a:lstStyle/>
           <a:p>
-            <a:pPr algn="ctr" indent="0" marL="0">
-              <a:buNone/>
-            </a:pPr>
-            <a:r>
-              <a:rPr lang="en-US" sz="3600" b="1" dirty="0">
-                <a:solidFill>
-                  <a:srgbClr val="1F272D"/>
-                </a:solidFill>
-                <a:latin typeface="Century Schoolbook" pitchFamily="34" charset="0"/>
-                <a:ea typeface="Century Schoolbook" pitchFamily="34" charset="-122"/>
-                <a:cs typeface="Century Schoolbook" pitchFamily="34" charset="-120"/>
-              </a:rPr>
-              <a:t>Elevator &amp; Escalator Fleet Monitoring</a:t>
-            </a:r>
-            <a:endParaRPr lang="en-US" sz="3600" dirty="0"/>
-          </a:p>
-        </p:txBody>
-      </p:sp>
-      <p:sp>
-        <p:nvSpPr>
-          <p:cNvPr id="3" name="Text 1"/>
-          <p:cNvSpPr/>
-          <p:nvPr/>
-        </p:nvSpPr>
-        <p:spPr>
-          <a:xfrm>
-            <a:off x="548640" y="2286000"/>
-            <a:ext cx="11064240" cy="365760"/>
-          </a:xfrm>
-          <a:prstGeom prst="rect">
-            <a:avLst/>
-          </a:prstGeom>
-          <a:noFill/>
-          <a:ln/>
-        </p:spPr>
-        <p:txBody>
-          <a:bodyPr wrap="square" rtlCol="0" anchor="ctr"/>
-          <a:lstStyle/>
-          <a:p>
-            <a:pPr algn="ctr" indent="0" marL="0">
-              <a:buNone/>
-            </a:pPr>
-            <a:r>
-              <a:rPr lang="en-US" sz="1600" dirty="0">
-                <a:solidFill>
-                  <a:srgbClr val="4E6270"/>
+            <a:pPr indent="0" marL="0">
+              <a:buNone/>
+            </a:pPr>
+            <a:r>
+              <a:rPr lang="en-US" sz="1450" dirty="0">
+                <a:solidFill>
+                  <a:srgbClr val="8B98A6"/>
                 </a:solidFill>
                 <a:latin typeface="Calibri" pitchFamily="34" charset="0"/>
                 <a:ea typeface="Calibri" pitchFamily="34" charset="-122"/>
@@ -1216,41 +1311,41 @@
               </a:rPr>
               <a:t>Rasool Basha Durbesula   ·   X24205478</a:t>
             </a:r>
-            <a:endParaRPr lang="en-US" sz="1600" dirty="0"/>
-          </a:p>
-        </p:txBody>
-      </p:sp>
-      <p:sp>
-        <p:nvSpPr>
-          <p:cNvPr id="4" name="Text 2"/>
-          <p:cNvSpPr/>
-          <p:nvPr/>
-        </p:nvSpPr>
-        <p:spPr>
-          <a:xfrm>
-            <a:off x="1463040" y="2926080"/>
-            <a:ext cx="9235440" cy="1371600"/>
-          </a:xfrm>
-          <a:prstGeom prst="rect">
-            <a:avLst/>
-          </a:prstGeom>
-          <a:noFill/>
-          <a:ln/>
-        </p:spPr>
-        <p:txBody>
-          <a:bodyPr wrap="square" rtlCol="0" anchor="ctr"/>
-          <a:lstStyle/>
-          <a:p>
-            <a:pPr algn="ctr" indent="0" marL="0">
+            <a:endParaRPr lang="en-US" sz="1450" dirty="0"/>
+          </a:p>
+        </p:txBody>
+      </p:sp>
+      <p:sp>
+        <p:nvSpPr>
+          <p:cNvPr id="8" name="Text 6"/>
+          <p:cNvSpPr/>
+          <p:nvPr/>
+        </p:nvSpPr>
+        <p:spPr>
+          <a:xfrm>
+            <a:off x="777240" y="3931920"/>
+            <a:ext cx="8138160" cy="1325880"/>
+          </a:xfrm>
+          <a:prstGeom prst="rect">
+            <a:avLst/>
+          </a:prstGeom>
+          <a:noFill/>
+          <a:ln/>
+        </p:spPr>
+        <p:txBody>
+          <a:bodyPr wrap="square" rtlCol="0" anchor="t"/>
+          <a:lstStyle/>
+          <a:p>
+            <a:pPr indent="0" marL="0">
               <a:lnSpc>
-                <a:spcPct val="110000"/>
+                <a:spcPct val="130000"/>
               </a:lnSpc>
               <a:buNone/>
             </a:pPr>
             <a:r>
-              <a:rPr lang="en-US" sz="2000" dirty="0">
-                <a:solidFill>
-                  <a:srgbClr val="1F272D"/>
+              <a:rPr lang="en-US" sz="1400" dirty="0">
+                <a:solidFill>
+                  <a:srgbClr val="ECE9DF"/>
                 </a:solidFill>
                 <a:latin typeface="Calibri" pitchFamily="34" charset="0"/>
                 <a:ea typeface="Calibri" pitchFamily="34" charset="-122"/>
@@ -1258,218 +1353,7 @@
               </a:rPr>
               <a:t>A lift fails two ways — slowly, as a motor creeps hot or a ride roughens, and suddenly, as one overweight trip loads the car past its limit — and a clipboard round sees only one instant.</a:t>
             </a:r>
-            <a:endParaRPr lang="en-US" sz="2000" dirty="0"/>
-          </a:p>
-        </p:txBody>
-      </p:sp>
-      <p:sp>
-        <p:nvSpPr>
-          <p:cNvPr id="5" name="Shape 3"/>
-          <p:cNvSpPr/>
-          <p:nvPr/>
-        </p:nvSpPr>
-        <p:spPr>
-          <a:xfrm>
-            <a:off x="1889608" y="4526280"/>
-            <a:ext cx="2651760" cy="566928"/>
-          </a:xfrm>
-          <a:prstGeom prst="roundRect">
-            <a:avLst>
-              <a:gd name="adj" fmla="val 50000"/>
-            </a:avLst>
-          </a:prstGeom>
-          <a:solidFill>
-            <a:srgbClr val="74889A"/>
-          </a:solidFill>
-          <a:ln/>
-        </p:spPr>
-      </p:sp>
-      <p:sp>
-        <p:nvSpPr>
-          <p:cNvPr id="6" name="Text 4"/>
-          <p:cNvSpPr/>
-          <p:nvPr/>
-        </p:nvSpPr>
-        <p:spPr>
-          <a:xfrm>
-            <a:off x="1889608" y="4526280"/>
-            <a:ext cx="2651760" cy="566928"/>
-          </a:xfrm>
-          <a:prstGeom prst="rect">
-            <a:avLst/>
-          </a:prstGeom>
-          <a:noFill/>
-          <a:ln/>
-        </p:spPr>
-        <p:txBody>
-          <a:bodyPr wrap="square" lIns="0" tIns="0" rIns="0" bIns="0" rtlCol="0" anchor="ctr"/>
-          <a:lstStyle/>
-          <a:p>
-            <a:pPr algn="ctr" indent="0" marL="0">
-              <a:buNone/>
-            </a:pPr>
-            <a:r>
-              <a:rPr lang="en-US" sz="1350" b="1" dirty="0">
-                <a:solidFill>
-                  <a:srgbClr val="FFFFFF"/>
-                </a:solidFill>
-                <a:latin typeface="Calibri" pitchFamily="34" charset="0"/>
-                <a:ea typeface="Calibri" pitchFamily="34" charset="-122"/>
-                <a:cs typeface="Calibri" pitchFamily="34" charset="-120"/>
-              </a:rPr>
-              <a:t>Motor &gt; 85 °C (avg)</a:t>
-            </a:r>
-            <a:endParaRPr lang="en-US" sz="1350" dirty="0"/>
-          </a:p>
-        </p:txBody>
-      </p:sp>
-      <p:sp>
-        <p:nvSpPr>
-          <p:cNvPr id="7" name="Shape 5"/>
-          <p:cNvSpPr/>
-          <p:nvPr/>
-        </p:nvSpPr>
-        <p:spPr>
-          <a:xfrm>
-            <a:off x="4769968" y="4526280"/>
-            <a:ext cx="2651760" cy="566928"/>
-          </a:xfrm>
-          <a:prstGeom prst="roundRect">
-            <a:avLst>
-              <a:gd name="adj" fmla="val 50000"/>
-            </a:avLst>
-          </a:prstGeom>
-          <a:solidFill>
-            <a:srgbClr val="74889A"/>
-          </a:solidFill>
-          <a:ln/>
-        </p:spPr>
-      </p:sp>
-      <p:sp>
-        <p:nvSpPr>
-          <p:cNvPr id="8" name="Text 6"/>
-          <p:cNvSpPr/>
-          <p:nvPr/>
-        </p:nvSpPr>
-        <p:spPr>
-          <a:xfrm>
-            <a:off x="4769968" y="4526280"/>
-            <a:ext cx="2651760" cy="566928"/>
-          </a:xfrm>
-          <a:prstGeom prst="rect">
-            <a:avLst/>
-          </a:prstGeom>
-          <a:noFill/>
-          <a:ln/>
-        </p:spPr>
-        <p:txBody>
-          <a:bodyPr wrap="square" lIns="0" tIns="0" rIns="0" bIns="0" rtlCol="0" anchor="ctr"/>
-          <a:lstStyle/>
-          <a:p>
-            <a:pPr algn="ctr" indent="0" marL="0">
-              <a:buNone/>
-            </a:pPr>
-            <a:r>
-              <a:rPr lang="en-US" sz="1350" b="1" dirty="0">
-                <a:solidFill>
-                  <a:srgbClr val="FFFFFF"/>
-                </a:solidFill>
-                <a:latin typeface="Calibri" pitchFamily="34" charset="0"/>
-                <a:ea typeface="Calibri" pitchFamily="34" charset="-122"/>
-                <a:cs typeface="Calibri" pitchFamily="34" charset="-120"/>
-              </a:rPr>
-              <a:t>Overload &gt; 1,000 kg (peak)</a:t>
-            </a:r>
-            <a:endParaRPr lang="en-US" sz="1350" dirty="0"/>
-          </a:p>
-        </p:txBody>
-      </p:sp>
-      <p:sp>
-        <p:nvSpPr>
-          <p:cNvPr id="9" name="Shape 7"/>
-          <p:cNvSpPr/>
-          <p:nvPr/>
-        </p:nvSpPr>
-        <p:spPr>
-          <a:xfrm>
-            <a:off x="7650328" y="4526280"/>
-            <a:ext cx="2651760" cy="566928"/>
-          </a:xfrm>
-          <a:prstGeom prst="roundRect">
-            <a:avLst>
-              <a:gd name="adj" fmla="val 50000"/>
-            </a:avLst>
-          </a:prstGeom>
-          <a:solidFill>
-            <a:srgbClr val="74889A"/>
-          </a:solidFill>
-          <a:ln/>
-        </p:spPr>
-      </p:sp>
-      <p:sp>
-        <p:nvSpPr>
-          <p:cNvPr id="10" name="Text 8"/>
-          <p:cNvSpPr/>
-          <p:nvPr/>
-        </p:nvSpPr>
-        <p:spPr>
-          <a:xfrm>
-            <a:off x="7650328" y="4526280"/>
-            <a:ext cx="2651760" cy="566928"/>
-          </a:xfrm>
-          <a:prstGeom prst="rect">
-            <a:avLst/>
-          </a:prstGeom>
-          <a:noFill/>
-          <a:ln/>
-        </p:spPr>
-        <p:txBody>
-          <a:bodyPr wrap="square" lIns="0" tIns="0" rIns="0" bIns="0" rtlCol="0" anchor="ctr"/>
-          <a:lstStyle/>
-          <a:p>
-            <a:pPr algn="ctr" indent="0" marL="0">
-              <a:buNone/>
-            </a:pPr>
-            <a:r>
-              <a:rPr lang="en-US" sz="1350" b="1" dirty="0">
-                <a:solidFill>
-                  <a:srgbClr val="FFFFFF"/>
-                </a:solidFill>
-                <a:latin typeface="Calibri" pitchFamily="34" charset="0"/>
-                <a:ea typeface="Calibri" pitchFamily="34" charset="-122"/>
-                <a:cs typeface="Calibri" pitchFamily="34" charset="-120"/>
-              </a:rPr>
-              <a:t>Stall &lt; 0.5 m/s</a:t>
-            </a:r>
-            <a:endParaRPr lang="en-US" sz="1350" dirty="0"/>
-          </a:p>
-        </p:txBody>
-      </p:sp>
-      <p:sp>
-        <p:nvSpPr>
-          <p:cNvPr id="11" name="Text 9"/>
-          <p:cNvSpPr/>
-          <p:nvPr/>
-        </p:nvSpPr>
-        <p:spPr>
-          <a:xfrm>
-            <a:off x="548640" y="6126480"/>
-            <a:ext cx="11064240" cy="365760"/>
-          </a:xfrm>
-          <a:prstGeom prst="rect">
-            <a:avLst/>
-          </a:prstGeom>
-          <a:noFill/>
-          <a:ln/>
-        </p:spPr>
-        <p:txBody>
-          <a:bodyPr wrap="square" rtlCol="0" anchor="ctr"/>
-          <a:lstStyle/>
-          <a:p>
-            <a:pPr algn="ctr" indent="0" marL="0">
-              <a:buNone/>
-            </a:pPr>
-            <a:endParaRPr lang="en-US" sz="1300" dirty="0"/>
+            <a:endParaRPr lang="en-US" sz="1400" dirty="0"/>
           </a:p>
         </p:txBody>
       </p:sp>
@@ -1487,7 +1371,7 @@
     <p:bg>
       <p:bgPr>
         <a:solidFill>
-          <a:srgbClr val="FFFFFF"/>
+          <a:srgbClr val="17181A"/>
         </a:solidFill>
       </p:bgPr>
     </p:bg>
@@ -1507,65 +1391,22 @@
       </p:grpSpPr>
       <p:sp>
         <p:nvSpPr>
-          <p:cNvPr id="2" name="Text 0"/>
-          <p:cNvSpPr/>
-          <p:nvPr/>
-        </p:nvSpPr>
-        <p:spPr>
-          <a:xfrm>
-            <a:off x="640080" y="457200"/>
-            <a:ext cx="10972800" cy="640080"/>
-          </a:xfrm>
-          <a:prstGeom prst="rect">
-            <a:avLst/>
-          </a:prstGeom>
-          <a:noFill/>
-          <a:ln/>
-        </p:spPr>
-        <p:txBody>
-          <a:bodyPr wrap="square" rtlCol="0" anchor="ctr"/>
-          <a:lstStyle/>
-          <a:p>
-            <a:pPr indent="0" marL="0">
-              <a:buNone/>
-            </a:pPr>
-            <a:r>
-              <a:rPr lang="en-US" sz="3000" b="1" dirty="0">
-                <a:solidFill>
-                  <a:srgbClr val="1F272D"/>
-                </a:solidFill>
-                <a:latin typeface="Century Schoolbook" pitchFamily="34" charset="0"/>
-                <a:ea typeface="Century Schoolbook" pitchFamily="34" charset="-122"/>
-                <a:cs typeface="Century Schoolbook" pitchFamily="34" charset="-120"/>
-              </a:rPr>
-              <a:t>What I Built — Sensor to Screen</a:t>
-            </a:r>
-            <a:endParaRPr lang="en-US" sz="3000" dirty="0"/>
-          </a:p>
-        </p:txBody>
-      </p:sp>
-      <p:sp>
-        <p:nvSpPr>
-          <p:cNvPr id="3" name="Shape 1"/>
-          <p:cNvSpPr/>
-          <p:nvPr/>
-        </p:nvSpPr>
-        <p:spPr>
-          <a:xfrm>
-            <a:off x="640080" y="1874520"/>
-            <a:ext cx="2286000" cy="1280160"/>
-          </a:xfrm>
-          <a:prstGeom prst="roundRect">
-            <a:avLst>
-              <a:gd name="adj" fmla="val 7143"/>
-            </a:avLst>
-          </a:prstGeom>
-          <a:solidFill>
-            <a:srgbClr val="EFF2F4"/>
-          </a:solidFill>
-          <a:ln w="19050">
+          <p:cNvPr id="2" name="Shape 0"/>
+          <p:cNvSpPr/>
+          <p:nvPr/>
+        </p:nvSpPr>
+        <p:spPr>
+          <a:xfrm>
+            <a:off x="10911535" y="457200"/>
+            <a:ext cx="822960" cy="0"/>
+          </a:xfrm>
+          <a:prstGeom prst="line">
+            <a:avLst/>
+          </a:prstGeom>
+          <a:noFill/>
+          <a:ln w="25400">
             <a:solidFill>
-              <a:srgbClr val="74889A"/>
+              <a:srgbClr val="FFCC00"/>
             </a:solidFill>
             <a:prstDash val="solid"/>
           </a:ln>
@@ -1573,34 +1414,83 @@
       </p:sp>
       <p:sp>
         <p:nvSpPr>
+          <p:cNvPr id="3" name="Shape 1"/>
+          <p:cNvSpPr/>
+          <p:nvPr/>
+        </p:nvSpPr>
+        <p:spPr>
+          <a:xfrm>
+            <a:off x="11734495" y="457200"/>
+            <a:ext cx="0" cy="822960"/>
+          </a:xfrm>
+          <a:prstGeom prst="line">
+            <a:avLst/>
+          </a:prstGeom>
+          <a:noFill/>
+          <a:ln w="25400">
+            <a:solidFill>
+              <a:srgbClr val="FFCC00"/>
+            </a:solidFill>
+            <a:prstDash val="solid"/>
+          </a:ln>
+        </p:spPr>
+      </p:sp>
+      <p:sp>
+        <p:nvSpPr>
           <p:cNvPr id="4" name="Shape 2"/>
           <p:cNvSpPr/>
           <p:nvPr/>
         </p:nvSpPr>
         <p:spPr>
           <a:xfrm>
-            <a:off x="1691640" y="2039112"/>
-            <a:ext cx="182880" cy="182880"/>
-          </a:xfrm>
-          <a:prstGeom prst="ellipse">
-            <a:avLst/>
-          </a:prstGeom>
-          <a:solidFill>
-            <a:srgbClr val="74889A"/>
-          </a:solidFill>
-          <a:ln/>
-        </p:spPr>
-      </p:sp>
-      <p:sp>
-        <p:nvSpPr>
-          <p:cNvPr id="5" name="Text 3"/>
-          <p:cNvSpPr/>
-          <p:nvPr/>
-        </p:nvSpPr>
-        <p:spPr>
-          <a:xfrm>
-            <a:off x="612648" y="2258568"/>
-            <a:ext cx="2340864" cy="365760"/>
+            <a:off x="457200" y="6400800"/>
+            <a:ext cx="822960" cy="0"/>
+          </a:xfrm>
+          <a:prstGeom prst="line">
+            <a:avLst/>
+          </a:prstGeom>
+          <a:noFill/>
+          <a:ln w="25400">
+            <a:solidFill>
+              <a:srgbClr val="FFCC00"/>
+            </a:solidFill>
+            <a:prstDash val="solid"/>
+          </a:ln>
+        </p:spPr>
+      </p:sp>
+      <p:sp>
+        <p:nvSpPr>
+          <p:cNvPr id="5" name="Shape 3"/>
+          <p:cNvSpPr/>
+          <p:nvPr/>
+        </p:nvSpPr>
+        <p:spPr>
+          <a:xfrm>
+            <a:off x="457200" y="5577840"/>
+            <a:ext cx="0" cy="822960"/>
+          </a:xfrm>
+          <a:prstGeom prst="line">
+            <a:avLst/>
+          </a:prstGeom>
+          <a:noFill/>
+          <a:ln w="25400">
+            <a:solidFill>
+              <a:srgbClr val="FFCC00"/>
+            </a:solidFill>
+            <a:prstDash val="solid"/>
+          </a:ln>
+        </p:spPr>
+      </p:sp>
+      <p:sp>
+        <p:nvSpPr>
+          <p:cNvPr id="6" name="Text 4"/>
+          <p:cNvSpPr/>
+          <p:nvPr/>
+        </p:nvSpPr>
+        <p:spPr>
+          <a:xfrm>
+            <a:off x="777240" y="731520"/>
+            <a:ext cx="914400" cy="640080"/>
           </a:xfrm>
           <a:prstGeom prst="rect">
             <a:avLst/>
@@ -1612,52 +1502,236 @@
           <a:bodyPr wrap="square" lIns="0" tIns="0" rIns="0" bIns="0" rtlCol="0" anchor="ctr"/>
           <a:lstStyle/>
           <a:p>
-            <a:pPr algn="ctr" indent="0" marL="0">
-              <a:buNone/>
-            </a:pPr>
-            <a:r>
-              <a:rPr lang="en-US" sz="1450" b="1" dirty="0">
-                <a:solidFill>
-                  <a:srgbClr val="1F272D"/>
+            <a:pPr indent="0" marL="0">
+              <a:buNone/>
+            </a:pPr>
+            <a:r>
+              <a:rPr lang="en-US" sz="3000" b="1" dirty="0">
+                <a:solidFill>
+                  <a:srgbClr val="FFCC00"/>
+                </a:solidFill>
+                <a:latin typeface="Century Gothic" pitchFamily="34" charset="0"/>
+                <a:ea typeface="Century Gothic" pitchFamily="34" charset="-122"/>
+                <a:cs typeface="Century Gothic" pitchFamily="34" charset="-120"/>
+              </a:rPr>
+              <a:t>01</a:t>
+            </a:r>
+            <a:endParaRPr lang="en-US" sz="3000" dirty="0"/>
+          </a:p>
+        </p:txBody>
+      </p:sp>
+      <p:sp>
+        <p:nvSpPr>
+          <p:cNvPr id="7" name="Text 5"/>
+          <p:cNvSpPr/>
+          <p:nvPr/>
+        </p:nvSpPr>
+        <p:spPr>
+          <a:xfrm>
+            <a:off x="1645920" y="905256"/>
+            <a:ext cx="9768535" cy="274320"/>
+          </a:xfrm>
+          <a:prstGeom prst="rect">
+            <a:avLst/>
+          </a:prstGeom>
+          <a:noFill/>
+          <a:ln/>
+        </p:spPr>
+        <p:txBody>
+          <a:bodyPr wrap="square" lIns="0" tIns="0" rIns="0" bIns="0" rtlCol="0" anchor="ctr"/>
+          <a:lstStyle/>
+          <a:p>
+            <a:pPr indent="0" marL="0">
+              <a:buNone/>
+            </a:pPr>
+            <a:r>
+              <a:rPr lang="en-US" sz="1100" b="1" spc="200" kern="0" dirty="0">
+                <a:solidFill>
+                  <a:srgbClr val="8B98A6"/>
                 </a:solidFill>
                 <a:latin typeface="Calibri" pitchFamily="34" charset="0"/>
                 <a:ea typeface="Calibri" pitchFamily="34" charset="-122"/>
                 <a:cs typeface="Calibri" pitchFamily="34" charset="-120"/>
               </a:rPr>
+              <a:t>ARCHITECTURE</a:t>
+            </a:r>
+            <a:endParaRPr lang="en-US" sz="1100" dirty="0"/>
+          </a:p>
+        </p:txBody>
+      </p:sp>
+      <p:sp>
+        <p:nvSpPr>
+          <p:cNvPr id="8" name="Text 6"/>
+          <p:cNvSpPr/>
+          <p:nvPr/>
+        </p:nvSpPr>
+        <p:spPr>
+          <a:xfrm>
+            <a:off x="777240" y="1380744"/>
+            <a:ext cx="10637215" cy="640080"/>
+          </a:xfrm>
+          <a:prstGeom prst="rect">
+            <a:avLst/>
+          </a:prstGeom>
+          <a:noFill/>
+          <a:ln/>
+        </p:spPr>
+        <p:txBody>
+          <a:bodyPr wrap="square" lIns="0" tIns="0" rIns="0" bIns="0" rtlCol="0" anchor="ctr"/>
+          <a:lstStyle/>
+          <a:p>
+            <a:pPr indent="0" marL="0">
+              <a:buNone/>
+            </a:pPr>
+            <a:r>
+              <a:rPr lang="en-US" sz="2300" b="1" dirty="0">
+                <a:solidFill>
+                  <a:srgbClr val="ECE9DF"/>
+                </a:solidFill>
+                <a:latin typeface="Century Gothic" pitchFamily="34" charset="0"/>
+                <a:ea typeface="Century Gothic" pitchFamily="34" charset="-122"/>
+                <a:cs typeface="Century Gothic" pitchFamily="34" charset="-120"/>
+              </a:rPr>
+              <a:t>What I Built — Sensor to Screen</a:t>
+            </a:r>
+            <a:endParaRPr lang="en-US" sz="2300" dirty="0"/>
+          </a:p>
+        </p:txBody>
+      </p:sp>
+      <p:sp>
+        <p:nvSpPr>
+          <p:cNvPr id="9" name="Shape 7"/>
+          <p:cNvSpPr/>
+          <p:nvPr/>
+        </p:nvSpPr>
+        <p:spPr>
+          <a:xfrm>
+            <a:off x="777240" y="2971800"/>
+            <a:ext cx="1391869" cy="1965960"/>
+          </a:xfrm>
+          <a:prstGeom prst="roundRect">
+            <a:avLst/>
+          </a:prstGeom>
+          <a:solidFill>
+            <a:srgbClr val="FFCC00"/>
+          </a:solidFill>
+          <a:ln w="12700">
+            <a:solidFill>
+              <a:srgbClr val="FFCC00"/>
+            </a:solidFill>
+            <a:prstDash val="solid"/>
+          </a:ln>
+        </p:spPr>
+      </p:sp>
+      <p:sp>
+        <p:nvSpPr>
+          <p:cNvPr id="10" name="Text 8"/>
+          <p:cNvSpPr/>
+          <p:nvPr/>
+        </p:nvSpPr>
+        <p:spPr>
+          <a:xfrm>
+            <a:off x="923544" y="3154680"/>
+            <a:ext cx="1099261" cy="320040"/>
+          </a:xfrm>
+          <a:prstGeom prst="rect">
+            <a:avLst/>
+          </a:prstGeom>
+          <a:noFill/>
+          <a:ln/>
+        </p:spPr>
+        <p:txBody>
+          <a:bodyPr wrap="square" lIns="0" tIns="0" rIns="0" bIns="0" rtlCol="0" anchor="ctr"/>
+          <a:lstStyle/>
+          <a:p>
+            <a:pPr indent="0" marL="0">
+              <a:buNone/>
+            </a:pPr>
+            <a:r>
+              <a:rPr lang="en-US" sz="1100" dirty="0">
+                <a:solidFill>
+                  <a:srgbClr val="111111"/>
+                </a:solidFill>
+                <a:latin typeface="Consolas" pitchFamily="34" charset="0"/>
+                <a:ea typeface="Consolas" pitchFamily="34" charset="-122"/>
+                <a:cs typeface="Consolas" pitchFamily="34" charset="-120"/>
+              </a:rPr>
+              <a:t>01</a:t>
+            </a:r>
+            <a:endParaRPr lang="en-US" sz="1100" dirty="0"/>
+          </a:p>
+        </p:txBody>
+      </p:sp>
+      <p:sp>
+        <p:nvSpPr>
+          <p:cNvPr id="11" name="Text 9"/>
+          <p:cNvSpPr/>
+          <p:nvPr/>
+        </p:nvSpPr>
+        <p:spPr>
+          <a:xfrm>
+            <a:off x="923544" y="3593592"/>
+            <a:ext cx="1099261" cy="868680"/>
+          </a:xfrm>
+          <a:prstGeom prst="rect">
+            <a:avLst/>
+          </a:prstGeom>
+          <a:noFill/>
+          <a:ln/>
+        </p:spPr>
+        <p:txBody>
+          <a:bodyPr wrap="square" lIns="0" tIns="0" rIns="0" bIns="0" rtlCol="0" anchor="t"/>
+          <a:lstStyle/>
+          <a:p>
+            <a:pPr indent="0" marL="0">
+              <a:lnSpc>
+                <a:spcPct val="96000"/>
+              </a:lnSpc>
+              <a:buNone/>
+            </a:pPr>
+            <a:r>
+              <a:rPr lang="en-US" sz="1300" b="1" dirty="0">
+                <a:solidFill>
+                  <a:srgbClr val="111111"/>
+                </a:solidFill>
+                <a:latin typeface="Century Gothic" pitchFamily="34" charset="0"/>
+                <a:ea typeface="Century Gothic" pitchFamily="34" charset="-122"/>
+                <a:cs typeface="Century Gothic" pitchFamily="34" charset="-120"/>
+              </a:rPr>
               <a:t>Cab sensors</a:t>
             </a:r>
-            <a:endParaRPr lang="en-US" sz="1450" dirty="0"/>
-          </a:p>
-        </p:txBody>
-      </p:sp>
-      <p:sp>
-        <p:nvSpPr>
-          <p:cNvPr id="6" name="Text 4"/>
-          <p:cNvSpPr/>
-          <p:nvPr/>
-        </p:nvSpPr>
-        <p:spPr>
-          <a:xfrm>
-            <a:off x="640080" y="2606040"/>
-            <a:ext cx="2286000" cy="411480"/>
-          </a:xfrm>
-          <a:prstGeom prst="rect">
-            <a:avLst/>
-          </a:prstGeom>
-          <a:noFill/>
-          <a:ln/>
-        </p:spPr>
-        <p:txBody>
-          <a:bodyPr wrap="square" lIns="0" tIns="0" rIns="0" bIns="0" rtlCol="0" anchor="t"/>
-          <a:lstStyle/>
-          <a:p>
-            <a:pPr algn="ctr" indent="0" marL="0">
-              <a:buNone/>
-            </a:pPr>
-            <a:r>
-              <a:rPr lang="en-US" sz="1050" dirty="0">
-                <a:solidFill>
-                  <a:srgbClr val="626E78"/>
+            <a:endParaRPr lang="en-US" sz="1300" dirty="0"/>
+          </a:p>
+        </p:txBody>
+      </p:sp>
+      <p:sp>
+        <p:nvSpPr>
+          <p:cNvPr id="12" name="Text 10"/>
+          <p:cNvSpPr/>
+          <p:nvPr/>
+        </p:nvSpPr>
+        <p:spPr>
+          <a:xfrm>
+            <a:off x="923544" y="4453128"/>
+            <a:ext cx="1099261" cy="365760"/>
+          </a:xfrm>
+          <a:prstGeom prst="rect">
+            <a:avLst/>
+          </a:prstGeom>
+          <a:noFill/>
+          <a:ln/>
+        </p:spPr>
+        <p:txBody>
+          <a:bodyPr wrap="square" lIns="0" tIns="0" rIns="0" bIns="0" rtlCol="0" anchor="ctr"/>
+          <a:lstStyle/>
+          <a:p>
+            <a:pPr indent="0" marL="0">
+              <a:buNone/>
+            </a:pPr>
+            <a:r>
+              <a:rPr lang="en-US" sz="900" dirty="0">
+                <a:solidFill>
+                  <a:srgbClr val="111111"/>
                 </a:solidFill>
                 <a:latin typeface="Calibri" pitchFamily="34" charset="0"/>
                 <a:ea typeface="Calibri" pitchFamily="34" charset="-122"/>
@@ -1665,57 +1739,50 @@
               </a:rPr>
               <a:t>10 · 2 towers</a:t>
             </a:r>
-            <a:endParaRPr lang="en-US" sz="1050" dirty="0"/>
-          </a:p>
-        </p:txBody>
-      </p:sp>
-      <p:sp>
-        <p:nvSpPr>
-          <p:cNvPr id="7" name="Shape 5"/>
-          <p:cNvSpPr/>
-          <p:nvPr/>
-        </p:nvSpPr>
-        <p:spPr>
-          <a:xfrm>
-            <a:off x="2944368" y="2514600"/>
-            <a:ext cx="1975104" cy="0"/>
-          </a:xfrm>
-          <a:prstGeom prst="line">
-            <a:avLst/>
-          </a:prstGeom>
-          <a:noFill/>
-          <a:ln w="25400">
+            <a:endParaRPr lang="en-US" sz="900" dirty="0"/>
+          </a:p>
+        </p:txBody>
+      </p:sp>
+      <p:sp>
+        <p:nvSpPr>
+          <p:cNvPr id="13" name="Shape 11"/>
+          <p:cNvSpPr/>
+          <p:nvPr/>
+        </p:nvSpPr>
+        <p:spPr>
+          <a:xfrm>
+            <a:off x="2242261" y="3845052"/>
+            <a:ext cx="310896" cy="219456"/>
+          </a:xfrm>
+          <a:prstGeom prst="rightArrow">
+            <a:avLst/>
+          </a:prstGeom>
+          <a:solidFill>
+            <a:srgbClr val="8B98A6"/>
+          </a:solidFill>
+          <a:ln/>
+        </p:spPr>
+      </p:sp>
+      <p:sp>
+        <p:nvSpPr>
+          <p:cNvPr id="14" name="Shape 12"/>
+          <p:cNvSpPr/>
+          <p:nvPr/>
+        </p:nvSpPr>
+        <p:spPr>
+          <a:xfrm>
+            <a:off x="2626309" y="2971800"/>
+            <a:ext cx="1391869" cy="1965960"/>
+          </a:xfrm>
+          <a:prstGeom prst="roundRect">
+            <a:avLst/>
+          </a:prstGeom>
+          <a:solidFill>
+            <a:srgbClr val="FFCC00"/>
+          </a:solidFill>
+          <a:ln w="12700">
             <a:solidFill>
-              <a:srgbClr val="74889A"/>
-            </a:solidFill>
-            <a:prstDash val="solid"/>
-            <a:headEnd type="none"/>
-            <a:tailEnd type="triangle"/>
-          </a:ln>
-        </p:spPr>
-      </p:sp>
-      <p:sp>
-        <p:nvSpPr>
-          <p:cNvPr id="8" name="Shape 6"/>
-          <p:cNvSpPr/>
-          <p:nvPr/>
-        </p:nvSpPr>
-        <p:spPr>
-          <a:xfrm>
-            <a:off x="4937760" y="1874520"/>
-            <a:ext cx="2286000" cy="1280160"/>
-          </a:xfrm>
-          <a:prstGeom prst="roundRect">
-            <a:avLst>
-              <a:gd name="adj" fmla="val 7143"/>
-            </a:avLst>
-          </a:prstGeom>
-          <a:solidFill>
-            <a:srgbClr val="EFF2F4"/>
-          </a:solidFill>
-          <a:ln w="19050">
-            <a:solidFill>
-              <a:srgbClr val="74889A"/>
+              <a:srgbClr val="FFCC00"/>
             </a:solidFill>
             <a:prstDash val="solid"/>
           </a:ln>
@@ -1723,34 +1790,14 @@
       </p:sp>
       <p:sp>
         <p:nvSpPr>
-          <p:cNvPr id="9" name="Shape 7"/>
-          <p:cNvSpPr/>
-          <p:nvPr/>
-        </p:nvSpPr>
-        <p:spPr>
-          <a:xfrm>
-            <a:off x="5989320" y="2039112"/>
-            <a:ext cx="182880" cy="182880"/>
-          </a:xfrm>
-          <a:prstGeom prst="ellipse">
-            <a:avLst/>
-          </a:prstGeom>
-          <a:solidFill>
-            <a:srgbClr val="74889A"/>
-          </a:solidFill>
-          <a:ln/>
-        </p:spPr>
-      </p:sp>
-      <p:sp>
-        <p:nvSpPr>
-          <p:cNvPr id="10" name="Text 8"/>
-          <p:cNvSpPr/>
-          <p:nvPr/>
-        </p:nvSpPr>
-        <p:spPr>
-          <a:xfrm>
-            <a:off x="4910328" y="2258568"/>
-            <a:ext cx="2340864" cy="365760"/>
+          <p:cNvPr id="15" name="Text 13"/>
+          <p:cNvSpPr/>
+          <p:nvPr/>
+        </p:nvSpPr>
+        <p:spPr>
+          <a:xfrm>
+            <a:off x="2772613" y="3154680"/>
+            <a:ext cx="1099261" cy="320040"/>
           </a:xfrm>
           <a:prstGeom prst="rect">
             <a:avLst/>
@@ -1762,34 +1809,199 @@
           <a:bodyPr wrap="square" lIns="0" tIns="0" rIns="0" bIns="0" rtlCol="0" anchor="ctr"/>
           <a:lstStyle/>
           <a:p>
-            <a:pPr algn="ctr" indent="0" marL="0">
-              <a:buNone/>
-            </a:pPr>
-            <a:r>
-              <a:rPr lang="en-US" sz="1450" b="1" dirty="0">
-                <a:solidFill>
-                  <a:srgbClr val="1F272D"/>
+            <a:pPr indent="0" marL="0">
+              <a:buNone/>
+            </a:pPr>
+            <a:r>
+              <a:rPr lang="en-US" sz="1100" dirty="0">
+                <a:solidFill>
+                  <a:srgbClr val="111111"/>
+                </a:solidFill>
+                <a:latin typeface="Consolas" pitchFamily="34" charset="0"/>
+                <a:ea typeface="Consolas" pitchFamily="34" charset="-122"/>
+                <a:cs typeface="Consolas" pitchFamily="34" charset="-120"/>
+              </a:rPr>
+              <a:t>02</a:t>
+            </a:r>
+            <a:endParaRPr lang="en-US" sz="1100" dirty="0"/>
+          </a:p>
+        </p:txBody>
+      </p:sp>
+      <p:sp>
+        <p:nvSpPr>
+          <p:cNvPr id="16" name="Text 14"/>
+          <p:cNvSpPr/>
+          <p:nvPr/>
+        </p:nvSpPr>
+        <p:spPr>
+          <a:xfrm>
+            <a:off x="2772613" y="3593592"/>
+            <a:ext cx="1099261" cy="868680"/>
+          </a:xfrm>
+          <a:prstGeom prst="rect">
+            <a:avLst/>
+          </a:prstGeom>
+          <a:noFill/>
+          <a:ln/>
+        </p:spPr>
+        <p:txBody>
+          <a:bodyPr wrap="square" lIns="0" tIns="0" rIns="0" bIns="0" rtlCol="0" anchor="t"/>
+          <a:lstStyle/>
+          <a:p>
+            <a:pPr indent="0" marL="0">
+              <a:lnSpc>
+                <a:spcPct val="96000"/>
+              </a:lnSpc>
+              <a:buNone/>
+            </a:pPr>
+            <a:r>
+              <a:rPr lang="en-US" sz="1300" b="1" dirty="0">
+                <a:solidFill>
+                  <a:srgbClr val="111111"/>
+                </a:solidFill>
+                <a:latin typeface="Century Gothic" pitchFamily="34" charset="0"/>
+                <a:ea typeface="Century Gothic" pitchFamily="34" charset="-122"/>
+                <a:cs typeface="Century Gothic" pitchFamily="34" charset="-120"/>
+              </a:rPr>
+              <a:t>Fog node</a:t>
+            </a:r>
+            <a:endParaRPr lang="en-US" sz="1300" dirty="0"/>
+          </a:p>
+        </p:txBody>
+      </p:sp>
+      <p:sp>
+        <p:nvSpPr>
+          <p:cNvPr id="17" name="Text 15"/>
+          <p:cNvSpPr/>
+          <p:nvPr/>
+        </p:nvSpPr>
+        <p:spPr>
+          <a:xfrm>
+            <a:off x="2772613" y="4453128"/>
+            <a:ext cx="1099261" cy="365760"/>
+          </a:xfrm>
+          <a:prstGeom prst="rect">
+            <a:avLst/>
+          </a:prstGeom>
+          <a:noFill/>
+          <a:ln/>
+        </p:spPr>
+        <p:txBody>
+          <a:bodyPr wrap="square" lIns="0" tIns="0" rIns="0" bIns="0" rtlCol="0" anchor="ctr"/>
+          <a:lstStyle/>
+          <a:p>
+            <a:pPr indent="0" marL="0">
+              <a:buNone/>
+            </a:pPr>
+            <a:r>
+              <a:rPr lang="en-US" sz="900" dirty="0">
+                <a:solidFill>
+                  <a:srgbClr val="111111"/>
                 </a:solidFill>
                 <a:latin typeface="Calibri" pitchFamily="34" charset="0"/>
                 <a:ea typeface="Calibri" pitchFamily="34" charset="-122"/>
                 <a:cs typeface="Calibri" pitchFamily="34" charset="-120"/>
               </a:rPr>
-              <a:t>Fog node</a:t>
-            </a:r>
-            <a:endParaRPr lang="en-US" sz="1450" dirty="0"/>
-          </a:p>
-        </p:txBody>
-      </p:sp>
-      <p:sp>
-        <p:nvSpPr>
-          <p:cNvPr id="11" name="Text 9"/>
-          <p:cNvSpPr/>
-          <p:nvPr/>
-        </p:nvSpPr>
-        <p:spPr>
-          <a:xfrm>
-            <a:off x="4937760" y="2606040"/>
-            <a:ext cx="2286000" cy="411480"/>
+              <a:t>window · aggregate · alert</a:t>
+            </a:r>
+            <a:endParaRPr lang="en-US" sz="900" dirty="0"/>
+          </a:p>
+        </p:txBody>
+      </p:sp>
+      <p:sp>
+        <p:nvSpPr>
+          <p:cNvPr id="18" name="Shape 16"/>
+          <p:cNvSpPr/>
+          <p:nvPr/>
+        </p:nvSpPr>
+        <p:spPr>
+          <a:xfrm>
+            <a:off x="4091330" y="3845052"/>
+            <a:ext cx="310896" cy="219456"/>
+          </a:xfrm>
+          <a:prstGeom prst="rightArrow">
+            <a:avLst/>
+          </a:prstGeom>
+          <a:solidFill>
+            <a:srgbClr val="8B98A6"/>
+          </a:solidFill>
+          <a:ln/>
+        </p:spPr>
+      </p:sp>
+      <p:sp>
+        <p:nvSpPr>
+          <p:cNvPr id="19" name="Shape 17"/>
+          <p:cNvSpPr/>
+          <p:nvPr/>
+        </p:nvSpPr>
+        <p:spPr>
+          <a:xfrm>
+            <a:off x="4475378" y="2971800"/>
+            <a:ext cx="1391869" cy="1965960"/>
+          </a:xfrm>
+          <a:prstGeom prst="roundRect">
+            <a:avLst/>
+          </a:prstGeom>
+          <a:solidFill>
+            <a:srgbClr val="202226"/>
+          </a:solidFill>
+          <a:ln w="12700">
+            <a:solidFill>
+              <a:srgbClr val="34363A"/>
+            </a:solidFill>
+            <a:prstDash val="solid"/>
+          </a:ln>
+        </p:spPr>
+      </p:sp>
+      <p:sp>
+        <p:nvSpPr>
+          <p:cNvPr id="20" name="Text 18"/>
+          <p:cNvSpPr/>
+          <p:nvPr/>
+        </p:nvSpPr>
+        <p:spPr>
+          <a:xfrm>
+            <a:off x="4621682" y="3154680"/>
+            <a:ext cx="1099261" cy="320040"/>
+          </a:xfrm>
+          <a:prstGeom prst="rect">
+            <a:avLst/>
+          </a:prstGeom>
+          <a:noFill/>
+          <a:ln/>
+        </p:spPr>
+        <p:txBody>
+          <a:bodyPr wrap="square" lIns="0" tIns="0" rIns="0" bIns="0" rtlCol="0" anchor="ctr"/>
+          <a:lstStyle/>
+          <a:p>
+            <a:pPr indent="0" marL="0">
+              <a:buNone/>
+            </a:pPr>
+            <a:r>
+              <a:rPr lang="en-US" sz="1100" dirty="0">
+                <a:solidFill>
+                  <a:srgbClr val="FFCC00"/>
+                </a:solidFill>
+                <a:latin typeface="Consolas" pitchFamily="34" charset="0"/>
+                <a:ea typeface="Consolas" pitchFamily="34" charset="-122"/>
+                <a:cs typeface="Consolas" pitchFamily="34" charset="-120"/>
+              </a:rPr>
+              <a:t>03</a:t>
+            </a:r>
+            <a:endParaRPr lang="en-US" sz="1100" dirty="0"/>
+          </a:p>
+        </p:txBody>
+      </p:sp>
+      <p:sp>
+        <p:nvSpPr>
+          <p:cNvPr id="21" name="Text 19"/>
+          <p:cNvSpPr/>
+          <p:nvPr/>
+        </p:nvSpPr>
+        <p:spPr>
+          <a:xfrm>
+            <a:off x="4621682" y="3593592"/>
+            <a:ext cx="1099261" cy="868680"/>
           </a:xfrm>
           <a:prstGeom prst="rect">
             <a:avLst/>
@@ -1801,71 +2013,106 @@
           <a:bodyPr wrap="square" lIns="0" tIns="0" rIns="0" bIns="0" rtlCol="0" anchor="t"/>
           <a:lstStyle/>
           <a:p>
-            <a:pPr algn="ctr" indent="0" marL="0">
-              <a:buNone/>
-            </a:pPr>
-            <a:r>
-              <a:rPr lang="en-US" sz="1050" dirty="0">
-                <a:solidFill>
-                  <a:srgbClr val="626E78"/>
+            <a:pPr indent="0" marL="0">
+              <a:lnSpc>
+                <a:spcPct val="96000"/>
+              </a:lnSpc>
+              <a:buNone/>
+            </a:pPr>
+            <a:r>
+              <a:rPr lang="en-US" sz="1300" b="1" dirty="0">
+                <a:solidFill>
+                  <a:srgbClr val="ECE9DF"/>
+                </a:solidFill>
+                <a:latin typeface="Century Gothic" pitchFamily="34" charset="0"/>
+                <a:ea typeface="Century Gothic" pitchFamily="34" charset="-122"/>
+                <a:cs typeface="Century Gothic" pitchFamily="34" charset="-120"/>
+              </a:rPr>
+              <a:t>Amazon SQS</a:t>
+            </a:r>
+            <a:endParaRPr lang="en-US" sz="1300" dirty="0"/>
+          </a:p>
+        </p:txBody>
+      </p:sp>
+      <p:sp>
+        <p:nvSpPr>
+          <p:cNvPr id="22" name="Text 20"/>
+          <p:cNvSpPr/>
+          <p:nvPr/>
+        </p:nvSpPr>
+        <p:spPr>
+          <a:xfrm>
+            <a:off x="4621682" y="4453128"/>
+            <a:ext cx="1099261" cy="365760"/>
+          </a:xfrm>
+          <a:prstGeom prst="rect">
+            <a:avLst/>
+          </a:prstGeom>
+          <a:noFill/>
+          <a:ln/>
+        </p:spPr>
+        <p:txBody>
+          <a:bodyPr wrap="square" lIns="0" tIns="0" rIns="0" bIns="0" rtlCol="0" anchor="ctr"/>
+          <a:lstStyle/>
+          <a:p>
+            <a:pPr indent="0" marL="0">
+              <a:buNone/>
+            </a:pPr>
+            <a:r>
+              <a:rPr lang="en-US" sz="900" dirty="0">
+                <a:solidFill>
+                  <a:srgbClr val="8B98A6"/>
                 </a:solidFill>
                 <a:latin typeface="Calibri" pitchFamily="34" charset="0"/>
                 <a:ea typeface="Calibri" pitchFamily="34" charset="-122"/>
                 <a:cs typeface="Calibri" pitchFamily="34" charset="-120"/>
               </a:rPr>
-              <a:t>window · aggregate · alert</a:t>
-            </a:r>
-            <a:endParaRPr lang="en-US" sz="1050" dirty="0"/>
-          </a:p>
-        </p:txBody>
-      </p:sp>
-      <p:sp>
-        <p:nvSpPr>
-          <p:cNvPr id="12" name="Shape 10"/>
-          <p:cNvSpPr/>
-          <p:nvPr/>
-        </p:nvSpPr>
-        <p:spPr>
-          <a:xfrm>
-            <a:off x="7242048" y="2514600"/>
-            <a:ext cx="1975104" cy="0"/>
-          </a:xfrm>
-          <a:prstGeom prst="line">
-            <a:avLst/>
-          </a:prstGeom>
-          <a:noFill/>
-          <a:ln w="25400">
+              <a:t>aggregate queue</a:t>
+            </a:r>
+            <a:endParaRPr lang="en-US" sz="900" dirty="0"/>
+          </a:p>
+        </p:txBody>
+      </p:sp>
+      <p:sp>
+        <p:nvSpPr>
+          <p:cNvPr id="23" name="Shape 21"/>
+          <p:cNvSpPr/>
+          <p:nvPr/>
+        </p:nvSpPr>
+        <p:spPr>
+          <a:xfrm>
+            <a:off x="5940400" y="3845052"/>
+            <a:ext cx="310896" cy="219456"/>
+          </a:xfrm>
+          <a:prstGeom prst="rightArrow">
+            <a:avLst/>
+          </a:prstGeom>
+          <a:solidFill>
+            <a:srgbClr val="8B98A6"/>
+          </a:solidFill>
+          <a:ln/>
+        </p:spPr>
+      </p:sp>
+      <p:sp>
+        <p:nvSpPr>
+          <p:cNvPr id="24" name="Shape 22"/>
+          <p:cNvSpPr/>
+          <p:nvPr/>
+        </p:nvSpPr>
+        <p:spPr>
+          <a:xfrm>
+            <a:off x="6324448" y="2971800"/>
+            <a:ext cx="1391869" cy="1965960"/>
+          </a:xfrm>
+          <a:prstGeom prst="roundRect">
+            <a:avLst/>
+          </a:prstGeom>
+          <a:solidFill>
+            <a:srgbClr val="202226"/>
+          </a:solidFill>
+          <a:ln w="12700">
             <a:solidFill>
-              <a:srgbClr val="74889A"/>
-            </a:solidFill>
-            <a:prstDash val="solid"/>
-            <a:headEnd type="none"/>
-            <a:tailEnd type="triangle"/>
-          </a:ln>
-        </p:spPr>
-      </p:sp>
-      <p:sp>
-        <p:nvSpPr>
-          <p:cNvPr id="13" name="Shape 11"/>
-          <p:cNvSpPr/>
-          <p:nvPr/>
-        </p:nvSpPr>
-        <p:spPr>
-          <a:xfrm>
-            <a:off x="9235440" y="1874520"/>
-            <a:ext cx="2286000" cy="1280160"/>
-          </a:xfrm>
-          <a:prstGeom prst="roundRect">
-            <a:avLst>
-              <a:gd name="adj" fmla="val 7143"/>
-            </a:avLst>
-          </a:prstGeom>
-          <a:solidFill>
-            <a:srgbClr val="EFF2F4"/>
-          </a:solidFill>
-          <a:ln w="19050">
-            <a:solidFill>
-              <a:srgbClr val="37474F"/>
+              <a:srgbClr val="34363A"/>
             </a:solidFill>
             <a:prstDash val="solid"/>
           </a:ln>
@@ -1873,34 +2120,14 @@
       </p:sp>
       <p:sp>
         <p:nvSpPr>
-          <p:cNvPr id="14" name="Shape 12"/>
-          <p:cNvSpPr/>
-          <p:nvPr/>
-        </p:nvSpPr>
-        <p:spPr>
-          <a:xfrm>
-            <a:off x="10287000" y="2039112"/>
-            <a:ext cx="182880" cy="182880"/>
-          </a:xfrm>
-          <a:prstGeom prst="ellipse">
-            <a:avLst/>
-          </a:prstGeom>
-          <a:solidFill>
-            <a:srgbClr val="37474F"/>
-          </a:solidFill>
-          <a:ln/>
-        </p:spPr>
-      </p:sp>
-      <p:sp>
-        <p:nvSpPr>
-          <p:cNvPr id="15" name="Text 13"/>
-          <p:cNvSpPr/>
-          <p:nvPr/>
-        </p:nvSpPr>
-        <p:spPr>
-          <a:xfrm>
-            <a:off x="9208008" y="2258568"/>
-            <a:ext cx="2340864" cy="365760"/>
+          <p:cNvPr id="25" name="Text 23"/>
+          <p:cNvSpPr/>
+          <p:nvPr/>
+        </p:nvSpPr>
+        <p:spPr>
+          <a:xfrm>
+            <a:off x="6470752" y="3154680"/>
+            <a:ext cx="1099261" cy="320040"/>
           </a:xfrm>
           <a:prstGeom prst="rect">
             <a:avLst/>
@@ -1912,34 +2139,199 @@
           <a:bodyPr wrap="square" lIns="0" tIns="0" rIns="0" bIns="0" rtlCol="0" anchor="ctr"/>
           <a:lstStyle/>
           <a:p>
-            <a:pPr algn="ctr" indent="0" marL="0">
-              <a:buNone/>
-            </a:pPr>
-            <a:r>
-              <a:rPr lang="en-US" sz="1450" b="1" dirty="0">
-                <a:solidFill>
-                  <a:srgbClr val="1F272D"/>
+            <a:pPr indent="0" marL="0">
+              <a:buNone/>
+            </a:pPr>
+            <a:r>
+              <a:rPr lang="en-US" sz="1100" dirty="0">
+                <a:solidFill>
+                  <a:srgbClr val="FFCC00"/>
+                </a:solidFill>
+                <a:latin typeface="Consolas" pitchFamily="34" charset="0"/>
+                <a:ea typeface="Consolas" pitchFamily="34" charset="-122"/>
+                <a:cs typeface="Consolas" pitchFamily="34" charset="-120"/>
+              </a:rPr>
+              <a:t>04</a:t>
+            </a:r>
+            <a:endParaRPr lang="en-US" sz="1100" dirty="0"/>
+          </a:p>
+        </p:txBody>
+      </p:sp>
+      <p:sp>
+        <p:nvSpPr>
+          <p:cNvPr id="26" name="Text 24"/>
+          <p:cNvSpPr/>
+          <p:nvPr/>
+        </p:nvSpPr>
+        <p:spPr>
+          <a:xfrm>
+            <a:off x="6470752" y="3593592"/>
+            <a:ext cx="1099261" cy="868680"/>
+          </a:xfrm>
+          <a:prstGeom prst="rect">
+            <a:avLst/>
+          </a:prstGeom>
+          <a:noFill/>
+          <a:ln/>
+        </p:spPr>
+        <p:txBody>
+          <a:bodyPr wrap="square" lIns="0" tIns="0" rIns="0" bIns="0" rtlCol="0" anchor="t"/>
+          <a:lstStyle/>
+          <a:p>
+            <a:pPr indent="0" marL="0">
+              <a:lnSpc>
+                <a:spcPct val="96000"/>
+              </a:lnSpc>
+              <a:buNone/>
+            </a:pPr>
+            <a:r>
+              <a:rPr lang="en-US" sz="1300" b="1" dirty="0">
+                <a:solidFill>
+                  <a:srgbClr val="ECE9DF"/>
+                </a:solidFill>
+                <a:latin typeface="Century Gothic" pitchFamily="34" charset="0"/>
+                <a:ea typeface="Century Gothic" pitchFamily="34" charset="-122"/>
+                <a:cs typeface="Century Gothic" pitchFamily="34" charset="-120"/>
+              </a:rPr>
+              <a:t>AWS Lambda</a:t>
+            </a:r>
+            <a:endParaRPr lang="en-US" sz="1300" dirty="0"/>
+          </a:p>
+        </p:txBody>
+      </p:sp>
+      <p:sp>
+        <p:nvSpPr>
+          <p:cNvPr id="27" name="Text 25"/>
+          <p:cNvSpPr/>
+          <p:nvPr/>
+        </p:nvSpPr>
+        <p:spPr>
+          <a:xfrm>
+            <a:off x="6470752" y="4453128"/>
+            <a:ext cx="1099261" cy="365760"/>
+          </a:xfrm>
+          <a:prstGeom prst="rect">
+            <a:avLst/>
+          </a:prstGeom>
+          <a:noFill/>
+          <a:ln/>
+        </p:spPr>
+        <p:txBody>
+          <a:bodyPr wrap="square" lIns="0" tIns="0" rIns="0" bIns="0" rtlCol="0" anchor="ctr"/>
+          <a:lstStyle/>
+          <a:p>
+            <a:pPr indent="0" marL="0">
+              <a:buNone/>
+            </a:pPr>
+            <a:r>
+              <a:rPr lang="en-US" sz="900" dirty="0">
+                <a:solidFill>
+                  <a:srgbClr val="8B98A6"/>
                 </a:solidFill>
                 <a:latin typeface="Calibri" pitchFamily="34" charset="0"/>
                 <a:ea typeface="Calibri" pitchFamily="34" charset="-122"/>
                 <a:cs typeface="Calibri" pitchFamily="34" charset="-120"/>
               </a:rPr>
-              <a:t>Amazon SQS</a:t>
-            </a:r>
-            <a:endParaRPr lang="en-US" sz="1450" dirty="0"/>
-          </a:p>
-        </p:txBody>
-      </p:sp>
-      <p:sp>
-        <p:nvSpPr>
-          <p:cNvPr id="16" name="Text 14"/>
-          <p:cNvSpPr/>
-          <p:nvPr/>
-        </p:nvSpPr>
-        <p:spPr>
-          <a:xfrm>
-            <a:off x="9235440" y="2606040"/>
-            <a:ext cx="2286000" cy="411480"/>
+              <a:t>nodejs20 ingest</a:t>
+            </a:r>
+            <a:endParaRPr lang="en-US" sz="900" dirty="0"/>
+          </a:p>
+        </p:txBody>
+      </p:sp>
+      <p:sp>
+        <p:nvSpPr>
+          <p:cNvPr id="28" name="Shape 26"/>
+          <p:cNvSpPr/>
+          <p:nvPr/>
+        </p:nvSpPr>
+        <p:spPr>
+          <a:xfrm>
+            <a:off x="7789469" y="3845052"/>
+            <a:ext cx="310896" cy="219456"/>
+          </a:xfrm>
+          <a:prstGeom prst="rightArrow">
+            <a:avLst/>
+          </a:prstGeom>
+          <a:solidFill>
+            <a:srgbClr val="8B98A6"/>
+          </a:solidFill>
+          <a:ln/>
+        </p:spPr>
+      </p:sp>
+      <p:sp>
+        <p:nvSpPr>
+          <p:cNvPr id="29" name="Shape 27"/>
+          <p:cNvSpPr/>
+          <p:nvPr/>
+        </p:nvSpPr>
+        <p:spPr>
+          <a:xfrm>
+            <a:off x="8173517" y="2971800"/>
+            <a:ext cx="1391869" cy="1965960"/>
+          </a:xfrm>
+          <a:prstGeom prst="roundRect">
+            <a:avLst/>
+          </a:prstGeom>
+          <a:solidFill>
+            <a:srgbClr val="202226"/>
+          </a:solidFill>
+          <a:ln w="12700">
+            <a:solidFill>
+              <a:srgbClr val="34363A"/>
+            </a:solidFill>
+            <a:prstDash val="solid"/>
+          </a:ln>
+        </p:spPr>
+      </p:sp>
+      <p:sp>
+        <p:nvSpPr>
+          <p:cNvPr id="30" name="Text 28"/>
+          <p:cNvSpPr/>
+          <p:nvPr/>
+        </p:nvSpPr>
+        <p:spPr>
+          <a:xfrm>
+            <a:off x="8319821" y="3154680"/>
+            <a:ext cx="1099261" cy="320040"/>
+          </a:xfrm>
+          <a:prstGeom prst="rect">
+            <a:avLst/>
+          </a:prstGeom>
+          <a:noFill/>
+          <a:ln/>
+        </p:spPr>
+        <p:txBody>
+          <a:bodyPr wrap="square" lIns="0" tIns="0" rIns="0" bIns="0" rtlCol="0" anchor="ctr"/>
+          <a:lstStyle/>
+          <a:p>
+            <a:pPr indent="0" marL="0">
+              <a:buNone/>
+            </a:pPr>
+            <a:r>
+              <a:rPr lang="en-US" sz="1100" dirty="0">
+                <a:solidFill>
+                  <a:srgbClr val="FFCC00"/>
+                </a:solidFill>
+                <a:latin typeface="Consolas" pitchFamily="34" charset="0"/>
+                <a:ea typeface="Consolas" pitchFamily="34" charset="-122"/>
+                <a:cs typeface="Consolas" pitchFamily="34" charset="-120"/>
+              </a:rPr>
+              <a:t>05</a:t>
+            </a:r>
+            <a:endParaRPr lang="en-US" sz="1100" dirty="0"/>
+          </a:p>
+        </p:txBody>
+      </p:sp>
+      <p:sp>
+        <p:nvSpPr>
+          <p:cNvPr id="31" name="Text 29"/>
+          <p:cNvSpPr/>
+          <p:nvPr/>
+        </p:nvSpPr>
+        <p:spPr>
+          <a:xfrm>
+            <a:off x="8319821" y="3593592"/>
+            <a:ext cx="1099261" cy="868680"/>
           </a:xfrm>
           <a:prstGeom prst="rect">
             <a:avLst/>
@@ -1951,46 +2343,106 @@
           <a:bodyPr wrap="square" lIns="0" tIns="0" rIns="0" bIns="0" rtlCol="0" anchor="t"/>
           <a:lstStyle/>
           <a:p>
-            <a:pPr algn="ctr" indent="0" marL="0">
-              <a:buNone/>
-            </a:pPr>
-            <a:r>
-              <a:rPr lang="en-US" sz="1050" dirty="0">
-                <a:solidFill>
-                  <a:srgbClr val="626E78"/>
+            <a:pPr indent="0" marL="0">
+              <a:lnSpc>
+                <a:spcPct val="96000"/>
+              </a:lnSpc>
+              <a:buNone/>
+            </a:pPr>
+            <a:r>
+              <a:rPr lang="en-US" sz="1300" b="1" dirty="0">
+                <a:solidFill>
+                  <a:srgbClr val="ECE9DF"/>
+                </a:solidFill>
+                <a:latin typeface="Century Gothic" pitchFamily="34" charset="0"/>
+                <a:ea typeface="Century Gothic" pitchFamily="34" charset="-122"/>
+                <a:cs typeface="Century Gothic" pitchFamily="34" charset="-120"/>
+              </a:rPr>
+              <a:t>DynamoDB</a:t>
+            </a:r>
+            <a:endParaRPr lang="en-US" sz="1300" dirty="0"/>
+          </a:p>
+        </p:txBody>
+      </p:sp>
+      <p:sp>
+        <p:nvSpPr>
+          <p:cNvPr id="32" name="Text 30"/>
+          <p:cNvSpPr/>
+          <p:nvPr/>
+        </p:nvSpPr>
+        <p:spPr>
+          <a:xfrm>
+            <a:off x="8319821" y="4453128"/>
+            <a:ext cx="1099261" cy="365760"/>
+          </a:xfrm>
+          <a:prstGeom prst="rect">
+            <a:avLst/>
+          </a:prstGeom>
+          <a:noFill/>
+          <a:ln/>
+        </p:spPr>
+        <p:txBody>
+          <a:bodyPr wrap="square" lIns="0" tIns="0" rIns="0" bIns="0" rtlCol="0" anchor="ctr"/>
+          <a:lstStyle/>
+          <a:p>
+            <a:pPr indent="0" marL="0">
+              <a:buNone/>
+            </a:pPr>
+            <a:r>
+              <a:rPr lang="en-US" sz="900" dirty="0">
+                <a:solidFill>
+                  <a:srgbClr val="8B98A6"/>
                 </a:solidFill>
                 <a:latin typeface="Calibri" pitchFamily="34" charset="0"/>
                 <a:ea typeface="Calibri" pitchFamily="34" charset="-122"/>
                 <a:cs typeface="Calibri" pitchFamily="34" charset="-120"/>
               </a:rPr>
-              <a:t>aggregate queue</a:t>
-            </a:r>
-            <a:endParaRPr lang="en-US" sz="1050" dirty="0"/>
-          </a:p>
-        </p:txBody>
-      </p:sp>
-      <p:sp>
-        <p:nvSpPr>
-          <p:cNvPr id="17" name="Shape 15"/>
-          <p:cNvSpPr/>
-          <p:nvPr/>
-        </p:nvSpPr>
-        <p:spPr>
-          <a:xfrm>
-            <a:off x="9235440" y="3520440"/>
-            <a:ext cx="2286000" cy="1280160"/>
+              <a:t>window store</a:t>
+            </a:r>
+            <a:endParaRPr lang="en-US" sz="900" dirty="0"/>
+          </a:p>
+        </p:txBody>
+      </p:sp>
+      <p:sp>
+        <p:nvSpPr>
+          <p:cNvPr id="33" name="Shape 31"/>
+          <p:cNvSpPr/>
+          <p:nvPr/>
+        </p:nvSpPr>
+        <p:spPr>
+          <a:xfrm>
+            <a:off x="9638538" y="3845052"/>
+            <a:ext cx="310896" cy="219456"/>
+          </a:xfrm>
+          <a:prstGeom prst="rightArrow">
+            <a:avLst/>
+          </a:prstGeom>
+          <a:solidFill>
+            <a:srgbClr val="8B98A6"/>
+          </a:solidFill>
+          <a:ln/>
+        </p:spPr>
+      </p:sp>
+      <p:sp>
+        <p:nvSpPr>
+          <p:cNvPr id="34" name="Shape 32"/>
+          <p:cNvSpPr/>
+          <p:nvPr/>
+        </p:nvSpPr>
+        <p:spPr>
+          <a:xfrm>
+            <a:off x="10022586" y="2971800"/>
+            <a:ext cx="1391869" cy="1965960"/>
           </a:xfrm>
           <a:prstGeom prst="roundRect">
-            <a:avLst>
-              <a:gd name="adj" fmla="val 7143"/>
-            </a:avLst>
+            <a:avLst/>
           </a:prstGeom>
           <a:solidFill>
-            <a:srgbClr val="EFF2F4"/>
+            <a:srgbClr val="202226"/>
           </a:solidFill>
-          <a:ln w="19050">
+          <a:ln w="12700">
             <a:solidFill>
-              <a:srgbClr val="37474F"/>
+              <a:srgbClr val="34363A"/>
             </a:solidFill>
             <a:prstDash val="solid"/>
           </a:ln>
@@ -1998,34 +2450,14 @@
       </p:sp>
       <p:sp>
         <p:nvSpPr>
-          <p:cNvPr id="18" name="Shape 16"/>
-          <p:cNvSpPr/>
-          <p:nvPr/>
-        </p:nvSpPr>
-        <p:spPr>
-          <a:xfrm>
-            <a:off x="10287000" y="3685032"/>
-            <a:ext cx="182880" cy="182880"/>
-          </a:xfrm>
-          <a:prstGeom prst="ellipse">
-            <a:avLst/>
-          </a:prstGeom>
-          <a:solidFill>
-            <a:srgbClr val="37474F"/>
-          </a:solidFill>
-          <a:ln/>
-        </p:spPr>
-      </p:sp>
-      <p:sp>
-        <p:nvSpPr>
-          <p:cNvPr id="19" name="Text 17"/>
-          <p:cNvSpPr/>
-          <p:nvPr/>
-        </p:nvSpPr>
-        <p:spPr>
-          <a:xfrm>
-            <a:off x="9208008" y="3904488"/>
-            <a:ext cx="2340864" cy="365760"/>
+          <p:cNvPr id="35" name="Text 33"/>
+          <p:cNvSpPr/>
+          <p:nvPr/>
+        </p:nvSpPr>
+        <p:spPr>
+          <a:xfrm>
+            <a:off x="10168890" y="3154680"/>
+            <a:ext cx="1099261" cy="320040"/>
           </a:xfrm>
           <a:prstGeom prst="rect">
             <a:avLst/>
@@ -2037,423 +2469,102 @@
           <a:bodyPr wrap="square" lIns="0" tIns="0" rIns="0" bIns="0" rtlCol="0" anchor="ctr"/>
           <a:lstStyle/>
           <a:p>
-            <a:pPr algn="ctr" indent="0" marL="0">
-              <a:buNone/>
-            </a:pPr>
-            <a:r>
-              <a:rPr lang="en-US" sz="1450" b="1" dirty="0">
-                <a:solidFill>
-                  <a:srgbClr val="1F272D"/>
+            <a:pPr indent="0" marL="0">
+              <a:buNone/>
+            </a:pPr>
+            <a:r>
+              <a:rPr lang="en-US" sz="1100" dirty="0">
+                <a:solidFill>
+                  <a:srgbClr val="FFCC00"/>
+                </a:solidFill>
+                <a:latin typeface="Consolas" pitchFamily="34" charset="0"/>
+                <a:ea typeface="Consolas" pitchFamily="34" charset="-122"/>
+                <a:cs typeface="Consolas" pitchFamily="34" charset="-120"/>
+              </a:rPr>
+              <a:t>06</a:t>
+            </a:r>
+            <a:endParaRPr lang="en-US" sz="1100" dirty="0"/>
+          </a:p>
+        </p:txBody>
+      </p:sp>
+      <p:sp>
+        <p:nvSpPr>
+          <p:cNvPr id="36" name="Text 34"/>
+          <p:cNvSpPr/>
+          <p:nvPr/>
+        </p:nvSpPr>
+        <p:spPr>
+          <a:xfrm>
+            <a:off x="10168890" y="3593592"/>
+            <a:ext cx="1099261" cy="868680"/>
+          </a:xfrm>
+          <a:prstGeom prst="rect">
+            <a:avLst/>
+          </a:prstGeom>
+          <a:noFill/>
+          <a:ln/>
+        </p:spPr>
+        <p:txBody>
+          <a:bodyPr wrap="square" lIns="0" tIns="0" rIns="0" bIns="0" rtlCol="0" anchor="t"/>
+          <a:lstStyle/>
+          <a:p>
+            <a:pPr indent="0" marL="0">
+              <a:lnSpc>
+                <a:spcPct val="96000"/>
+              </a:lnSpc>
+              <a:buNone/>
+            </a:pPr>
+            <a:r>
+              <a:rPr lang="en-US" sz="1300" b="1" dirty="0">
+                <a:solidFill>
+                  <a:srgbClr val="ECE9DF"/>
+                </a:solidFill>
+                <a:latin typeface="Century Gothic" pitchFamily="34" charset="0"/>
+                <a:ea typeface="Century Gothic" pitchFamily="34" charset="-122"/>
+                <a:cs typeface="Century Gothic" pitchFamily="34" charset="-120"/>
+              </a:rPr>
+              <a:t>API GW + S3</a:t>
+            </a:r>
+            <a:endParaRPr lang="en-US" sz="1300" dirty="0"/>
+          </a:p>
+        </p:txBody>
+      </p:sp>
+      <p:sp>
+        <p:nvSpPr>
+          <p:cNvPr id="37" name="Text 35"/>
+          <p:cNvSpPr/>
+          <p:nvPr/>
+        </p:nvSpPr>
+        <p:spPr>
+          <a:xfrm>
+            <a:off x="10168890" y="4453128"/>
+            <a:ext cx="1099261" cy="365760"/>
+          </a:xfrm>
+          <a:prstGeom prst="rect">
+            <a:avLst/>
+          </a:prstGeom>
+          <a:noFill/>
+          <a:ln/>
+        </p:spPr>
+        <p:txBody>
+          <a:bodyPr wrap="square" lIns="0" tIns="0" rIns="0" bIns="0" rtlCol="0" anchor="ctr"/>
+          <a:lstStyle/>
+          <a:p>
+            <a:pPr indent="0" marL="0">
+              <a:buNone/>
+            </a:pPr>
+            <a:r>
+              <a:rPr lang="en-US" sz="900" dirty="0">
+                <a:solidFill>
+                  <a:srgbClr val="8B98A6"/>
                 </a:solidFill>
                 <a:latin typeface="Calibri" pitchFamily="34" charset="0"/>
                 <a:ea typeface="Calibri" pitchFamily="34" charset="-122"/>
                 <a:cs typeface="Calibri" pitchFamily="34" charset="-120"/>
               </a:rPr>
-              <a:t>AWS Lambda</a:t>
-            </a:r>
-            <a:endParaRPr lang="en-US" sz="1450" dirty="0"/>
-          </a:p>
-        </p:txBody>
-      </p:sp>
-      <p:sp>
-        <p:nvSpPr>
-          <p:cNvPr id="20" name="Text 18"/>
-          <p:cNvSpPr/>
-          <p:nvPr/>
-        </p:nvSpPr>
-        <p:spPr>
-          <a:xfrm>
-            <a:off x="9235440" y="4251960"/>
-            <a:ext cx="2286000" cy="411480"/>
-          </a:xfrm>
-          <a:prstGeom prst="rect">
-            <a:avLst/>
-          </a:prstGeom>
-          <a:noFill/>
-          <a:ln/>
-        </p:spPr>
-        <p:txBody>
-          <a:bodyPr wrap="square" lIns="0" tIns="0" rIns="0" bIns="0" rtlCol="0" anchor="t"/>
-          <a:lstStyle/>
-          <a:p>
-            <a:pPr algn="ctr" indent="0" marL="0">
-              <a:buNone/>
-            </a:pPr>
-            <a:r>
-              <a:rPr lang="en-US" sz="1050" dirty="0">
-                <a:solidFill>
-                  <a:srgbClr val="626E78"/>
-                </a:solidFill>
-                <a:latin typeface="Calibri" pitchFamily="34" charset="0"/>
-                <a:ea typeface="Calibri" pitchFamily="34" charset="-122"/>
-                <a:cs typeface="Calibri" pitchFamily="34" charset="-120"/>
-              </a:rPr>
-              <a:t>nodejs20 ingest</a:t>
-            </a:r>
-            <a:endParaRPr lang="en-US" sz="1050" dirty="0"/>
-          </a:p>
-        </p:txBody>
-      </p:sp>
-      <p:sp>
-        <p:nvSpPr>
-          <p:cNvPr id="21" name="Shape 19"/>
-          <p:cNvSpPr/>
-          <p:nvPr/>
-        </p:nvSpPr>
-        <p:spPr>
-          <a:xfrm>
-            <a:off x="7242048" y="4160520"/>
-            <a:ext cx="1975104" cy="0"/>
-          </a:xfrm>
-          <a:prstGeom prst="line">
-            <a:avLst/>
-          </a:prstGeom>
-          <a:noFill/>
-          <a:ln w="25400">
-            <a:solidFill>
-              <a:srgbClr val="74889A"/>
-            </a:solidFill>
-            <a:prstDash val="solid"/>
-            <a:headEnd type="triangle"/>
-            <a:tailEnd type="oval"/>
-          </a:ln>
-        </p:spPr>
-      </p:sp>
-      <p:sp>
-        <p:nvSpPr>
-          <p:cNvPr id="22" name="Shape 20"/>
-          <p:cNvSpPr/>
-          <p:nvPr/>
-        </p:nvSpPr>
-        <p:spPr>
-          <a:xfrm>
-            <a:off x="4937760" y="3520440"/>
-            <a:ext cx="2286000" cy="1280160"/>
-          </a:xfrm>
-          <a:prstGeom prst="roundRect">
-            <a:avLst>
-              <a:gd name="adj" fmla="val 7143"/>
-            </a:avLst>
-          </a:prstGeom>
-          <a:solidFill>
-            <a:srgbClr val="EFF2F4"/>
-          </a:solidFill>
-          <a:ln w="19050">
-            <a:solidFill>
-              <a:srgbClr val="37474F"/>
-            </a:solidFill>
-            <a:prstDash val="solid"/>
-          </a:ln>
-        </p:spPr>
-      </p:sp>
-      <p:sp>
-        <p:nvSpPr>
-          <p:cNvPr id="23" name="Shape 21"/>
-          <p:cNvSpPr/>
-          <p:nvPr/>
-        </p:nvSpPr>
-        <p:spPr>
-          <a:xfrm>
-            <a:off x="5989320" y="3685032"/>
-            <a:ext cx="182880" cy="182880"/>
-          </a:xfrm>
-          <a:prstGeom prst="ellipse">
-            <a:avLst/>
-          </a:prstGeom>
-          <a:solidFill>
-            <a:srgbClr val="37474F"/>
-          </a:solidFill>
-          <a:ln/>
-        </p:spPr>
-      </p:sp>
-      <p:sp>
-        <p:nvSpPr>
-          <p:cNvPr id="24" name="Text 22"/>
-          <p:cNvSpPr/>
-          <p:nvPr/>
-        </p:nvSpPr>
-        <p:spPr>
-          <a:xfrm>
-            <a:off x="4910328" y="3904488"/>
-            <a:ext cx="2340864" cy="365760"/>
-          </a:xfrm>
-          <a:prstGeom prst="rect">
-            <a:avLst/>
-          </a:prstGeom>
-          <a:noFill/>
-          <a:ln/>
-        </p:spPr>
-        <p:txBody>
-          <a:bodyPr wrap="square" lIns="0" tIns="0" rIns="0" bIns="0" rtlCol="0" anchor="ctr"/>
-          <a:lstStyle/>
-          <a:p>
-            <a:pPr algn="ctr" indent="0" marL="0">
-              <a:buNone/>
-            </a:pPr>
-            <a:r>
-              <a:rPr lang="en-US" sz="1450" b="1" dirty="0">
-                <a:solidFill>
-                  <a:srgbClr val="1F272D"/>
-                </a:solidFill>
-                <a:latin typeface="Calibri" pitchFamily="34" charset="0"/>
-                <a:ea typeface="Calibri" pitchFamily="34" charset="-122"/>
-                <a:cs typeface="Calibri" pitchFamily="34" charset="-120"/>
-              </a:rPr>
-              <a:t>DynamoDB</a:t>
-            </a:r>
-            <a:endParaRPr lang="en-US" sz="1450" dirty="0"/>
-          </a:p>
-        </p:txBody>
-      </p:sp>
-      <p:sp>
-        <p:nvSpPr>
-          <p:cNvPr id="25" name="Text 23"/>
-          <p:cNvSpPr/>
-          <p:nvPr/>
-        </p:nvSpPr>
-        <p:spPr>
-          <a:xfrm>
-            <a:off x="4937760" y="4251960"/>
-            <a:ext cx="2286000" cy="411480"/>
-          </a:xfrm>
-          <a:prstGeom prst="rect">
-            <a:avLst/>
-          </a:prstGeom>
-          <a:noFill/>
-          <a:ln/>
-        </p:spPr>
-        <p:txBody>
-          <a:bodyPr wrap="square" lIns="0" tIns="0" rIns="0" bIns="0" rtlCol="0" anchor="t"/>
-          <a:lstStyle/>
-          <a:p>
-            <a:pPr algn="ctr" indent="0" marL="0">
-              <a:buNone/>
-            </a:pPr>
-            <a:r>
-              <a:rPr lang="en-US" sz="1050" dirty="0">
-                <a:solidFill>
-                  <a:srgbClr val="626E78"/>
-                </a:solidFill>
-                <a:latin typeface="Calibri" pitchFamily="34" charset="0"/>
-                <a:ea typeface="Calibri" pitchFamily="34" charset="-122"/>
-                <a:cs typeface="Calibri" pitchFamily="34" charset="-120"/>
-              </a:rPr>
-              <a:t>window store</a:t>
-            </a:r>
-            <a:endParaRPr lang="en-US" sz="1050" dirty="0"/>
-          </a:p>
-        </p:txBody>
-      </p:sp>
-      <p:sp>
-        <p:nvSpPr>
-          <p:cNvPr id="26" name="Shape 24"/>
-          <p:cNvSpPr/>
-          <p:nvPr/>
-        </p:nvSpPr>
-        <p:spPr>
-          <a:xfrm>
-            <a:off x="2944368" y="4160520"/>
-            <a:ext cx="1975104" cy="0"/>
-          </a:xfrm>
-          <a:prstGeom prst="line">
-            <a:avLst/>
-          </a:prstGeom>
-          <a:noFill/>
-          <a:ln w="25400">
-            <a:solidFill>
-              <a:srgbClr val="74889A"/>
-            </a:solidFill>
-            <a:prstDash val="solid"/>
-            <a:headEnd type="triangle"/>
-            <a:tailEnd type="oval"/>
-          </a:ln>
-        </p:spPr>
-      </p:sp>
-      <p:sp>
-        <p:nvSpPr>
-          <p:cNvPr id="27" name="Shape 25"/>
-          <p:cNvSpPr/>
-          <p:nvPr/>
-        </p:nvSpPr>
-        <p:spPr>
-          <a:xfrm>
-            <a:off x="640080" y="3520440"/>
-            <a:ext cx="2286000" cy="1280160"/>
-          </a:xfrm>
-          <a:prstGeom prst="roundRect">
-            <a:avLst>
-              <a:gd name="adj" fmla="val 7143"/>
-            </a:avLst>
-          </a:prstGeom>
-          <a:solidFill>
-            <a:srgbClr val="EFF2F4"/>
-          </a:solidFill>
-          <a:ln w="19050">
-            <a:solidFill>
-              <a:srgbClr val="4E6270"/>
-            </a:solidFill>
-            <a:prstDash val="solid"/>
-          </a:ln>
-        </p:spPr>
-      </p:sp>
-      <p:sp>
-        <p:nvSpPr>
-          <p:cNvPr id="28" name="Shape 26"/>
-          <p:cNvSpPr/>
-          <p:nvPr/>
-        </p:nvSpPr>
-        <p:spPr>
-          <a:xfrm>
-            <a:off x="1691640" y="3685032"/>
-            <a:ext cx="182880" cy="182880"/>
-          </a:xfrm>
-          <a:prstGeom prst="ellipse">
-            <a:avLst/>
-          </a:prstGeom>
-          <a:solidFill>
-            <a:srgbClr val="4E6270"/>
-          </a:solidFill>
-          <a:ln/>
-        </p:spPr>
-      </p:sp>
-      <p:sp>
-        <p:nvSpPr>
-          <p:cNvPr id="29" name="Text 27"/>
-          <p:cNvSpPr/>
-          <p:nvPr/>
-        </p:nvSpPr>
-        <p:spPr>
-          <a:xfrm>
-            <a:off x="612648" y="3904488"/>
-            <a:ext cx="2340864" cy="365760"/>
-          </a:xfrm>
-          <a:prstGeom prst="rect">
-            <a:avLst/>
-          </a:prstGeom>
-          <a:noFill/>
-          <a:ln/>
-        </p:spPr>
-        <p:txBody>
-          <a:bodyPr wrap="square" lIns="0" tIns="0" rIns="0" bIns="0" rtlCol="0" anchor="ctr"/>
-          <a:lstStyle/>
-          <a:p>
-            <a:pPr algn="ctr" indent="0" marL="0">
-              <a:buNone/>
-            </a:pPr>
-            <a:r>
-              <a:rPr lang="en-US" sz="1450" b="1" dirty="0">
-                <a:solidFill>
-                  <a:srgbClr val="1F272D"/>
-                </a:solidFill>
-                <a:latin typeface="Calibri" pitchFamily="34" charset="0"/>
-                <a:ea typeface="Calibri" pitchFamily="34" charset="-122"/>
-                <a:cs typeface="Calibri" pitchFamily="34" charset="-120"/>
-              </a:rPr>
-              <a:t>API GW + S3</a:t>
-            </a:r>
-            <a:endParaRPr lang="en-US" sz="1450" dirty="0"/>
-          </a:p>
-        </p:txBody>
-      </p:sp>
-      <p:sp>
-        <p:nvSpPr>
-          <p:cNvPr id="30" name="Text 28"/>
-          <p:cNvSpPr/>
-          <p:nvPr/>
-        </p:nvSpPr>
-        <p:spPr>
-          <a:xfrm>
-            <a:off x="640080" y="4251960"/>
-            <a:ext cx="2286000" cy="411480"/>
-          </a:xfrm>
-          <a:prstGeom prst="rect">
-            <a:avLst/>
-          </a:prstGeom>
-          <a:noFill/>
-          <a:ln/>
-        </p:spPr>
-        <p:txBody>
-          <a:bodyPr wrap="square" lIns="0" tIns="0" rIns="0" bIns="0" rtlCol="0" anchor="t"/>
-          <a:lstStyle/>
-          <a:p>
-            <a:pPr algn="ctr" indent="0" marL="0">
-              <a:buNone/>
-            </a:pPr>
-            <a:r>
-              <a:rPr lang="en-US" sz="1050" dirty="0">
-                <a:solidFill>
-                  <a:srgbClr val="626E78"/>
-                </a:solidFill>
-                <a:latin typeface="Calibri" pitchFamily="34" charset="0"/>
-                <a:ea typeface="Calibri" pitchFamily="34" charset="-122"/>
-                <a:cs typeface="Calibri" pitchFamily="34" charset="-120"/>
-              </a:rPr>
               <a:t>fleet dashboard</a:t>
             </a:r>
-            <a:endParaRPr lang="en-US" sz="1050" dirty="0"/>
-          </a:p>
-        </p:txBody>
-      </p:sp>
-      <p:sp>
-        <p:nvSpPr>
-          <p:cNvPr id="31" name="Shape 29"/>
-          <p:cNvSpPr/>
-          <p:nvPr/>
-        </p:nvSpPr>
-        <p:spPr>
-          <a:xfrm>
-            <a:off x="10378440" y="3154680"/>
-            <a:ext cx="0" cy="365760"/>
-          </a:xfrm>
-          <a:prstGeom prst="line">
-            <a:avLst/>
-          </a:prstGeom>
-          <a:noFill/>
-          <a:ln w="25400">
-            <a:solidFill>
-              <a:srgbClr val="74889A"/>
-            </a:solidFill>
-            <a:prstDash val="solid"/>
-            <a:tailEnd type="triangle"/>
-          </a:ln>
-        </p:spPr>
-      </p:sp>
-      <p:sp>
-        <p:nvSpPr>
-          <p:cNvPr id="32" name="Text 30"/>
-          <p:cNvSpPr/>
-          <p:nvPr/>
-        </p:nvSpPr>
-        <p:spPr>
-          <a:xfrm>
-            <a:off x="640080" y="5257800"/>
-            <a:ext cx="10972800" cy="731520"/>
-          </a:xfrm>
-          <a:prstGeom prst="rect">
-            <a:avLst/>
-          </a:prstGeom>
-          <a:noFill/>
-          <a:ln/>
-        </p:spPr>
-        <p:txBody>
-          <a:bodyPr wrap="square" rtlCol="0" anchor="ctr"/>
-          <a:lstStyle/>
-          <a:p>
-            <a:pPr algn="ctr" indent="0" marL="0">
-              <a:buNone/>
-            </a:pPr>
-            <a:r>
-              <a:rPr lang="en-US" sz="1500" i="1" dirty="0">
-                <a:solidFill>
-                  <a:srgbClr val="37474F"/>
-                </a:solidFill>
-                <a:latin typeface="Calibri" pitchFamily="34" charset="0"/>
-                <a:ea typeface="Calibri" pitchFamily="34" charset="-122"/>
-                <a:cs typeface="Calibri" pitchFamily="34" charset="-120"/>
-              </a:rPr>
-              <a:t>Each rule reads the number its fault lives in — the drift faults read the window average, the single-instant overload reads the window maximum.</a:t>
-            </a:r>
-            <a:endParaRPr lang="en-US" sz="1500" dirty="0"/>
+            <a:endParaRPr lang="en-US" sz="900" dirty="0"/>
           </a:p>
         </p:txBody>
       </p:sp>
@@ -2471,7 +2582,7 @@
     <p:bg>
       <p:bgPr>
         <a:solidFill>
-          <a:srgbClr val="FFFFFF"/>
+          <a:srgbClr val="17181A"/>
         </a:solidFill>
       </p:bgPr>
     </p:bg>
@@ -2491,14 +2602,223 @@
       </p:grpSpPr>
       <p:sp>
         <p:nvSpPr>
-          <p:cNvPr id="2" name="Text 0"/>
-          <p:cNvSpPr/>
-          <p:nvPr/>
-        </p:nvSpPr>
-        <p:spPr>
-          <a:xfrm>
-            <a:off x="640080" y="457200"/>
-            <a:ext cx="7315200" cy="640080"/>
+          <p:cNvPr id="2" name="Shape 0"/>
+          <p:cNvSpPr/>
+          <p:nvPr/>
+        </p:nvSpPr>
+        <p:spPr>
+          <a:xfrm>
+            <a:off x="10911535" y="457200"/>
+            <a:ext cx="822960" cy="0"/>
+          </a:xfrm>
+          <a:prstGeom prst="line">
+            <a:avLst/>
+          </a:prstGeom>
+          <a:noFill/>
+          <a:ln w="25400">
+            <a:solidFill>
+              <a:srgbClr val="FFCC00"/>
+            </a:solidFill>
+            <a:prstDash val="solid"/>
+          </a:ln>
+        </p:spPr>
+      </p:sp>
+      <p:sp>
+        <p:nvSpPr>
+          <p:cNvPr id="3" name="Shape 1"/>
+          <p:cNvSpPr/>
+          <p:nvPr/>
+        </p:nvSpPr>
+        <p:spPr>
+          <a:xfrm>
+            <a:off x="11734495" y="457200"/>
+            <a:ext cx="0" cy="822960"/>
+          </a:xfrm>
+          <a:prstGeom prst="line">
+            <a:avLst/>
+          </a:prstGeom>
+          <a:noFill/>
+          <a:ln w="25400">
+            <a:solidFill>
+              <a:srgbClr val="FFCC00"/>
+            </a:solidFill>
+            <a:prstDash val="solid"/>
+          </a:ln>
+        </p:spPr>
+      </p:sp>
+      <p:sp>
+        <p:nvSpPr>
+          <p:cNvPr id="4" name="Shape 2"/>
+          <p:cNvSpPr/>
+          <p:nvPr/>
+        </p:nvSpPr>
+        <p:spPr>
+          <a:xfrm>
+            <a:off x="457200" y="6400800"/>
+            <a:ext cx="822960" cy="0"/>
+          </a:xfrm>
+          <a:prstGeom prst="line">
+            <a:avLst/>
+          </a:prstGeom>
+          <a:noFill/>
+          <a:ln w="25400">
+            <a:solidFill>
+              <a:srgbClr val="FFCC00"/>
+            </a:solidFill>
+            <a:prstDash val="solid"/>
+          </a:ln>
+        </p:spPr>
+      </p:sp>
+      <p:sp>
+        <p:nvSpPr>
+          <p:cNvPr id="5" name="Shape 3"/>
+          <p:cNvSpPr/>
+          <p:nvPr/>
+        </p:nvSpPr>
+        <p:spPr>
+          <a:xfrm>
+            <a:off x="457200" y="5577840"/>
+            <a:ext cx="0" cy="822960"/>
+          </a:xfrm>
+          <a:prstGeom prst="line">
+            <a:avLst/>
+          </a:prstGeom>
+          <a:noFill/>
+          <a:ln w="25400">
+            <a:solidFill>
+              <a:srgbClr val="FFCC00"/>
+            </a:solidFill>
+            <a:prstDash val="solid"/>
+          </a:ln>
+        </p:spPr>
+      </p:sp>
+      <p:sp>
+        <p:nvSpPr>
+          <p:cNvPr id="6" name="Text 4"/>
+          <p:cNvSpPr/>
+          <p:nvPr/>
+        </p:nvSpPr>
+        <p:spPr>
+          <a:xfrm>
+            <a:off x="777240" y="731520"/>
+            <a:ext cx="914400" cy="640080"/>
+          </a:xfrm>
+          <a:prstGeom prst="rect">
+            <a:avLst/>
+          </a:prstGeom>
+          <a:noFill/>
+          <a:ln/>
+        </p:spPr>
+        <p:txBody>
+          <a:bodyPr wrap="square" lIns="0" tIns="0" rIns="0" bIns="0" rtlCol="0" anchor="ctr"/>
+          <a:lstStyle/>
+          <a:p>
+            <a:pPr indent="0" marL="0">
+              <a:buNone/>
+            </a:pPr>
+            <a:r>
+              <a:rPr lang="en-US" sz="3000" b="1" dirty="0">
+                <a:solidFill>
+                  <a:srgbClr val="FFCC00"/>
+                </a:solidFill>
+                <a:latin typeface="Century Gothic" pitchFamily="34" charset="0"/>
+                <a:ea typeface="Century Gothic" pitchFamily="34" charset="-122"/>
+                <a:cs typeface="Century Gothic" pitchFamily="34" charset="-120"/>
+              </a:rPr>
+              <a:t>02</a:t>
+            </a:r>
+            <a:endParaRPr lang="en-US" sz="3000" dirty="0"/>
+          </a:p>
+        </p:txBody>
+      </p:sp>
+      <p:sp>
+        <p:nvSpPr>
+          <p:cNvPr id="7" name="Text 5"/>
+          <p:cNvSpPr/>
+          <p:nvPr/>
+        </p:nvSpPr>
+        <p:spPr>
+          <a:xfrm>
+            <a:off x="1645920" y="905256"/>
+            <a:ext cx="9768535" cy="274320"/>
+          </a:xfrm>
+          <a:prstGeom prst="rect">
+            <a:avLst/>
+          </a:prstGeom>
+          <a:noFill/>
+          <a:ln/>
+        </p:spPr>
+        <p:txBody>
+          <a:bodyPr wrap="square" lIns="0" tIns="0" rIns="0" bIns="0" rtlCol="0" anchor="ctr"/>
+          <a:lstStyle/>
+          <a:p>
+            <a:pPr indent="0" marL="0">
+              <a:buNone/>
+            </a:pPr>
+            <a:r>
+              <a:rPr lang="en-US" sz="1100" b="1" spc="200" kern="0" dirty="0">
+                <a:solidFill>
+                  <a:srgbClr val="8B98A6"/>
+                </a:solidFill>
+                <a:latin typeface="Calibri" pitchFamily="34" charset="0"/>
+                <a:ea typeface="Calibri" pitchFamily="34" charset="-122"/>
+                <a:cs typeface="Calibri" pitchFamily="34" charset="-120"/>
+              </a:rPr>
+              <a:t>LIVE DEMO</a:t>
+            </a:r>
+            <a:endParaRPr lang="en-US" sz="1100" dirty="0"/>
+          </a:p>
+        </p:txBody>
+      </p:sp>
+      <p:sp>
+        <p:nvSpPr>
+          <p:cNvPr id="8" name="Text 6"/>
+          <p:cNvSpPr/>
+          <p:nvPr/>
+        </p:nvSpPr>
+        <p:spPr>
+          <a:xfrm>
+            <a:off x="777240" y="1380744"/>
+            <a:ext cx="10637215" cy="640080"/>
+          </a:xfrm>
+          <a:prstGeom prst="rect">
+            <a:avLst/>
+          </a:prstGeom>
+          <a:noFill/>
+          <a:ln/>
+        </p:spPr>
+        <p:txBody>
+          <a:bodyPr wrap="square" lIns="0" tIns="0" rIns="0" bIns="0" rtlCol="0" anchor="ctr"/>
+          <a:lstStyle/>
+          <a:p>
+            <a:pPr indent="0" marL="0">
+              <a:buNone/>
+            </a:pPr>
+            <a:r>
+              <a:rPr lang="en-US" sz="2300" b="1" dirty="0">
+                <a:solidFill>
+                  <a:srgbClr val="ECE9DF"/>
+                </a:solidFill>
+                <a:latin typeface="Century Gothic" pitchFamily="34" charset="0"/>
+                <a:ea typeface="Century Gothic" pitchFamily="34" charset="-122"/>
+                <a:cs typeface="Century Gothic" pitchFamily="34" charset="-120"/>
+              </a:rPr>
+              <a:t>See it running on AWS</a:t>
+            </a:r>
+            <a:endParaRPr lang="en-US" sz="2300" dirty="0"/>
+          </a:p>
+        </p:txBody>
+      </p:sp>
+      <p:sp>
+        <p:nvSpPr>
+          <p:cNvPr id="9" name="Text 7"/>
+          <p:cNvSpPr/>
+          <p:nvPr/>
+        </p:nvSpPr>
+        <p:spPr>
+          <a:xfrm>
+            <a:off x="777240" y="1901952"/>
+            <a:ext cx="10637215" cy="274320"/>
           </a:xfrm>
           <a:prstGeom prst="rect">
             <a:avLst/>
@@ -2514,48 +2834,9 @@
               <a:buNone/>
             </a:pPr>
             <a:r>
-              <a:rPr lang="en-US" sz="3000" b="1" dirty="0">
-                <a:solidFill>
-                  <a:srgbClr val="1F272D"/>
-                </a:solidFill>
-                <a:latin typeface="Century Schoolbook" pitchFamily="34" charset="0"/>
-                <a:ea typeface="Century Schoolbook" pitchFamily="34" charset="-122"/>
-                <a:cs typeface="Century Schoolbook" pitchFamily="34" charset="-120"/>
-              </a:rPr>
-              <a:t>Live Demo</a:t>
-            </a:r>
-            <a:endParaRPr lang="en-US" sz="3000" dirty="0"/>
-          </a:p>
-        </p:txBody>
-      </p:sp>
-      <p:sp>
-        <p:nvSpPr>
-          <p:cNvPr id="3" name="Text 1"/>
-          <p:cNvSpPr/>
-          <p:nvPr/>
-        </p:nvSpPr>
-        <p:spPr>
-          <a:xfrm>
-            <a:off x="658368" y="1143000"/>
-            <a:ext cx="10972800" cy="365760"/>
-          </a:xfrm>
-          <a:prstGeom prst="rect">
-            <a:avLst/>
-          </a:prstGeom>
-          <a:noFill/>
-          <a:ln/>
-        </p:spPr>
-        <p:txBody>
-          <a:bodyPr wrap="square" rtlCol="0" anchor="ctr"/>
-          <a:lstStyle/>
-          <a:p>
-            <a:pPr indent="0" marL="0">
-              <a:buNone/>
-            </a:pPr>
-            <a:r>
-              <a:rPr lang="en-US" sz="1400" dirty="0">
-                <a:solidFill>
-                  <a:srgbClr val="4E6270"/>
+              <a:rPr lang="en-US" sz="1100" dirty="0">
+                <a:solidFill>
+                  <a:srgbClr val="FFCC00"/>
                 </a:solidFill>
                 <a:latin typeface="Consolas" pitchFamily="34" charset="0"/>
                 <a:ea typeface="Consolas" pitchFamily="34" charset="-122"/>
@@ -2563,32 +2844,30 @@
               </a:rPr>
               <a:t>eef-frontend-786504441742.s3.us-east-1.amazonaws.com</a:t>
             </a:r>
-            <a:endParaRPr lang="en-US" sz="1400" dirty="0"/>
-          </a:p>
-        </p:txBody>
-      </p:sp>
-      <p:sp>
-        <p:nvSpPr>
-          <p:cNvPr id="4" name="Shape 2"/>
-          <p:cNvSpPr/>
-          <p:nvPr/>
-        </p:nvSpPr>
-        <p:spPr>
-          <a:xfrm>
-            <a:off x="640080" y="1828800"/>
-            <a:ext cx="10881360" cy="1371600"/>
+            <a:endParaRPr lang="en-US" sz="1100" dirty="0"/>
+          </a:p>
+        </p:txBody>
+      </p:sp>
+      <p:sp>
+        <p:nvSpPr>
+          <p:cNvPr id="10" name="Shape 8"/>
+          <p:cNvSpPr/>
+          <p:nvPr/>
+        </p:nvSpPr>
+        <p:spPr>
+          <a:xfrm>
+            <a:off x="777240" y="2514600"/>
+            <a:ext cx="3301898" cy="3566160"/>
           </a:xfrm>
           <a:prstGeom prst="roundRect">
-            <a:avLst>
-              <a:gd name="adj" fmla="val 6667"/>
-            </a:avLst>
+            <a:avLst/>
           </a:prstGeom>
           <a:solidFill>
-            <a:srgbClr val="EFF2F4"/>
+            <a:srgbClr val="202226"/>
           </a:solidFill>
-          <a:ln w="15240">
+          <a:ln w="12700">
             <a:solidFill>
-              <a:srgbClr val="4E6270"/>
+              <a:srgbClr val="34363A"/>
             </a:solidFill>
             <a:prstDash val="solid"/>
           </a:ln>
@@ -2596,34 +2875,14 @@
       </p:sp>
       <p:sp>
         <p:nvSpPr>
-          <p:cNvPr id="5" name="Shape 3"/>
-          <p:cNvSpPr/>
-          <p:nvPr/>
-        </p:nvSpPr>
-        <p:spPr>
-          <a:xfrm>
-            <a:off x="960120" y="2203704"/>
-            <a:ext cx="621792" cy="621792"/>
-          </a:xfrm>
-          <a:prstGeom prst="ellipse">
-            <a:avLst/>
-          </a:prstGeom>
-          <a:solidFill>
-            <a:srgbClr val="37474F"/>
-          </a:solidFill>
-          <a:ln/>
-        </p:spPr>
-      </p:sp>
-      <p:sp>
-        <p:nvSpPr>
-          <p:cNvPr id="6" name="Text 4"/>
-          <p:cNvSpPr/>
-          <p:nvPr/>
-        </p:nvSpPr>
-        <p:spPr>
-          <a:xfrm>
-            <a:off x="960120" y="2203704"/>
-            <a:ext cx="621792" cy="621792"/>
+          <p:cNvPr id="11" name="Text 9"/>
+          <p:cNvSpPr/>
+          <p:nvPr/>
+        </p:nvSpPr>
+        <p:spPr>
+          <a:xfrm>
+            <a:off x="1051560" y="2752344"/>
+            <a:ext cx="1828800" cy="777240"/>
           </a:xfrm>
           <a:prstGeom prst="rect">
             <a:avLst/>
@@ -2635,34 +2894,76 @@
           <a:bodyPr wrap="square" lIns="0" tIns="0" rIns="0" bIns="0" rtlCol="0" anchor="ctr"/>
           <a:lstStyle/>
           <a:p>
-            <a:pPr algn="ctr" indent="0" marL="0">
-              <a:buNone/>
-            </a:pPr>
-            <a:r>
-              <a:rPr lang="en-US" sz="2200" b="1" dirty="0">
-                <a:solidFill>
-                  <a:srgbClr val="FFFFFF"/>
-                </a:solidFill>
-                <a:latin typeface="Century Schoolbook" pitchFamily="34" charset="0"/>
-                <a:ea typeface="Century Schoolbook" pitchFamily="34" charset="-122"/>
-                <a:cs typeface="Century Schoolbook" pitchFamily="34" charset="-120"/>
-              </a:rPr>
-              <a:t>1</a:t>
-            </a:r>
-            <a:endParaRPr lang="en-US" sz="2200" dirty="0"/>
-          </a:p>
-        </p:txBody>
-      </p:sp>
-      <p:sp>
-        <p:nvSpPr>
-          <p:cNvPr id="7" name="Text 5"/>
-          <p:cNvSpPr/>
-          <p:nvPr/>
-        </p:nvSpPr>
-        <p:spPr>
-          <a:xfrm>
-            <a:off x="1828800" y="2029968"/>
-            <a:ext cx="9418320" cy="411480"/>
+            <a:pPr indent="0" marL="0">
+              <a:buNone/>
+            </a:pPr>
+            <a:r>
+              <a:rPr lang="en-US" sz="3800" b="1" dirty="0">
+                <a:solidFill>
+                  <a:srgbClr val="FFCC00"/>
+                </a:solidFill>
+                <a:latin typeface="Century Gothic" pitchFamily="34" charset="0"/>
+                <a:ea typeface="Century Gothic" pitchFamily="34" charset="-122"/>
+                <a:cs typeface="Century Gothic" pitchFamily="34" charset="-120"/>
+              </a:rPr>
+              <a:t>01</a:t>
+            </a:r>
+            <a:endParaRPr lang="en-US" sz="3800" dirty="0"/>
+          </a:p>
+        </p:txBody>
+      </p:sp>
+      <p:sp>
+        <p:nvSpPr>
+          <p:cNvPr id="12" name="Text 10"/>
+          <p:cNvSpPr/>
+          <p:nvPr/>
+        </p:nvSpPr>
+        <p:spPr>
+          <a:xfrm>
+            <a:off x="1069848" y="3566160"/>
+            <a:ext cx="2753258" cy="868680"/>
+          </a:xfrm>
+          <a:prstGeom prst="rect">
+            <a:avLst/>
+          </a:prstGeom>
+          <a:noFill/>
+          <a:ln/>
+        </p:spPr>
+        <p:txBody>
+          <a:bodyPr wrap="square" lIns="0" tIns="0" rIns="0" bIns="0" rtlCol="0" anchor="t"/>
+          <a:lstStyle/>
+          <a:p>
+            <a:pPr indent="0" marL="0">
+              <a:lnSpc>
+                <a:spcPct val="100000"/>
+              </a:lnSpc>
+              <a:buNone/>
+            </a:pPr>
+            <a:r>
+              <a:rPr lang="en-US" sz="1550" b="1" dirty="0">
+                <a:solidFill>
+                  <a:srgbClr val="ECE9DF"/>
+                </a:solidFill>
+                <a:latin typeface="Century Gothic" pitchFamily="34" charset="0"/>
+                <a:ea typeface="Century Gothic" pitchFamily="34" charset="-122"/>
+                <a:cs typeface="Century Gothic" pitchFamily="34" charset="-120"/>
+              </a:rPr>
+              <a:t>A meter card per signal, per tower</a:t>
+            </a:r>
+            <a:endParaRPr lang="en-US" sz="1550" dirty="0"/>
+          </a:p>
+        </p:txBody>
+      </p:sp>
+      <p:sp>
+        <p:nvSpPr>
+          <p:cNvPr id="13" name="Text 11"/>
+          <p:cNvSpPr/>
+          <p:nvPr/>
+        </p:nvSpPr>
+        <p:spPr>
+          <a:xfrm>
+            <a:off x="1069848" y="4434840"/>
+            <a:ext cx="2753258" cy="1463040"/>
           </a:xfrm>
           <a:prstGeom prst="rect">
             <a:avLst/>
@@ -2675,33 +2976,61 @@
           <a:lstStyle/>
           <a:p>
             <a:pPr indent="0" marL="0">
-              <a:buNone/>
-            </a:pPr>
-            <a:r>
-              <a:rPr lang="en-US" sz="1700" b="1" dirty="0">
-                <a:solidFill>
-                  <a:srgbClr val="1F272D"/>
+              <a:lnSpc>
+                <a:spcPct val="120000"/>
+              </a:lnSpc>
+              <a:buNone/>
+            </a:pPr>
+            <a:r>
+              <a:rPr lang="en-US" sz="1200" dirty="0">
+                <a:solidFill>
+                  <a:srgbClr val="8B98A6"/>
                 </a:solidFill>
                 <a:latin typeface="Calibri" pitchFamily="34" charset="0"/>
                 <a:ea typeface="Calibri" pitchFamily="34" charset="-122"/>
                 <a:cs typeface="Calibri" pitchFamily="34" charset="-120"/>
               </a:rPr>
-              <a:t>A meter card per signal, per tower</a:t>
-            </a:r>
-            <a:endParaRPr lang="en-US" sz="1700" dirty="0"/>
-          </a:p>
-        </p:txBody>
-      </p:sp>
-      <p:sp>
-        <p:nvSpPr>
-          <p:cNvPr id="8" name="Text 6"/>
-          <p:cNvSpPr/>
-          <p:nvPr/>
-        </p:nvSpPr>
-        <p:spPr>
-          <a:xfrm>
-            <a:off x="1828800" y="2450592"/>
-            <a:ext cx="9418320" cy="594360"/>
+              <a:t>Motor temperature, door cycles, cab vibration, load weight and travel speed live for both towers with native meter bars.</a:t>
+            </a:r>
+            <a:endParaRPr lang="en-US" sz="1200" dirty="0"/>
+          </a:p>
+        </p:txBody>
+      </p:sp>
+      <p:sp>
+        <p:nvSpPr>
+          <p:cNvPr id="14" name="Shape 12"/>
+          <p:cNvSpPr/>
+          <p:nvPr/>
+        </p:nvSpPr>
+        <p:spPr>
+          <a:xfrm>
+            <a:off x="4444898" y="2514600"/>
+            <a:ext cx="3301898" cy="3566160"/>
+          </a:xfrm>
+          <a:prstGeom prst="roundRect">
+            <a:avLst/>
+          </a:prstGeom>
+          <a:solidFill>
+            <a:srgbClr val="202226"/>
+          </a:solidFill>
+          <a:ln w="12700">
+            <a:solidFill>
+              <a:srgbClr val="34363A"/>
+            </a:solidFill>
+            <a:prstDash val="solid"/>
+          </a:ln>
+        </p:spPr>
+      </p:sp>
+      <p:sp>
+        <p:nvSpPr>
+          <p:cNvPr id="15" name="Text 13"/>
+          <p:cNvSpPr/>
+          <p:nvPr/>
+        </p:nvSpPr>
+        <p:spPr>
+          <a:xfrm>
+            <a:off x="4719218" y="2752344"/>
+            <a:ext cx="1828800" cy="777240"/>
           </a:xfrm>
           <a:prstGeom prst="rect">
             <a:avLst/>
@@ -2714,48 +3043,127 @@
           <a:lstStyle/>
           <a:p>
             <a:pPr indent="0" marL="0">
+              <a:buNone/>
+            </a:pPr>
+            <a:r>
+              <a:rPr lang="en-US" sz="3800" b="1" dirty="0">
+                <a:solidFill>
+                  <a:srgbClr val="FFCC00"/>
+                </a:solidFill>
+                <a:latin typeface="Century Gothic" pitchFamily="34" charset="0"/>
+                <a:ea typeface="Century Gothic" pitchFamily="34" charset="-122"/>
+                <a:cs typeface="Century Gothic" pitchFamily="34" charset="-120"/>
+              </a:rPr>
+              <a:t>02</a:t>
+            </a:r>
+            <a:endParaRPr lang="en-US" sz="3800" dirty="0"/>
+          </a:p>
+        </p:txBody>
+      </p:sp>
+      <p:sp>
+        <p:nvSpPr>
+          <p:cNvPr id="16" name="Text 14"/>
+          <p:cNvSpPr/>
+          <p:nvPr/>
+        </p:nvSpPr>
+        <p:spPr>
+          <a:xfrm>
+            <a:off x="4737506" y="3566160"/>
+            <a:ext cx="2753258" cy="868680"/>
+          </a:xfrm>
+          <a:prstGeom prst="rect">
+            <a:avLst/>
+          </a:prstGeom>
+          <a:noFill/>
+          <a:ln/>
+        </p:spPr>
+        <p:txBody>
+          <a:bodyPr wrap="square" lIns="0" tIns="0" rIns="0" bIns="0" rtlCol="0" anchor="t"/>
+          <a:lstStyle/>
+          <a:p>
+            <a:pPr indent="0" marL="0">
               <a:lnSpc>
-                <a:spcPct val="105000"/>
+                <a:spcPct val="100000"/>
               </a:lnSpc>
               <a:buNone/>
             </a:pPr>
             <a:r>
-              <a:rPr lang="en-US" sz="1300" dirty="0">
-                <a:solidFill>
-                  <a:srgbClr val="626E78"/>
+              <a:rPr lang="en-US" sz="1550" b="1" dirty="0">
+                <a:solidFill>
+                  <a:srgbClr val="ECE9DF"/>
+                </a:solidFill>
+                <a:latin typeface="Century Gothic" pitchFamily="34" charset="0"/>
+                <a:ea typeface="Century Gothic" pitchFamily="34" charset="-122"/>
+                <a:cs typeface="Century Gothic" pitchFamily="34" charset="-120"/>
+              </a:rPr>
+              <a:t>Two faults at opposite ends of time</a:t>
+            </a:r>
+            <a:endParaRPr lang="en-US" sz="1550" dirty="0"/>
+          </a:p>
+        </p:txBody>
+      </p:sp>
+      <p:sp>
+        <p:nvSpPr>
+          <p:cNvPr id="17" name="Text 15"/>
+          <p:cNvSpPr/>
+          <p:nvPr/>
+        </p:nvSpPr>
+        <p:spPr>
+          <a:xfrm>
+            <a:off x="4737506" y="4434840"/>
+            <a:ext cx="2753258" cy="1463040"/>
+          </a:xfrm>
+          <a:prstGeom prst="rect">
+            <a:avLst/>
+          </a:prstGeom>
+          <a:noFill/>
+          <a:ln/>
+        </p:spPr>
+        <p:txBody>
+          <a:bodyPr wrap="square" lIns="0" tIns="0" rIns="0" bIns="0" rtlCol="0" anchor="ctr"/>
+          <a:lstStyle/>
+          <a:p>
+            <a:pPr indent="0" marL="0">
+              <a:lnSpc>
+                <a:spcPct val="120000"/>
+              </a:lnSpc>
+              <a:buNone/>
+            </a:pPr>
+            <a:r>
+              <a:rPr lang="en-US" sz="1200" dirty="0">
+                <a:solidFill>
+                  <a:srgbClr val="8B98A6"/>
                 </a:solidFill>
                 <a:latin typeface="Calibri" pitchFamily="34" charset="0"/>
                 <a:ea typeface="Calibri" pitchFamily="34" charset="-122"/>
                 <a:cs typeface="Calibri" pitchFamily="34" charset="-120"/>
               </a:rPr>
-              <a:t>Motor temperature, door cycles, cab vibration, load weight and travel speed live for both towers with native meter bars.</a:t>
-            </a:r>
-            <a:endParaRPr lang="en-US" sz="1300" dirty="0"/>
-          </a:p>
-        </p:txBody>
-      </p:sp>
-      <p:sp>
-        <p:nvSpPr>
-          <p:cNvPr id="9" name="Shape 7"/>
-          <p:cNvSpPr/>
-          <p:nvPr/>
-        </p:nvSpPr>
-        <p:spPr>
-          <a:xfrm>
-            <a:off x="640080" y="3401568"/>
-            <a:ext cx="5303520" cy="2606040"/>
+              <a:t>Tower-B is firing a ride-quality fault (a drift, read on the average) and an overload warning (an instant, read on the peak) at once.</a:t>
+            </a:r>
+            <a:endParaRPr lang="en-US" sz="1200" dirty="0"/>
+          </a:p>
+        </p:txBody>
+      </p:sp>
+      <p:sp>
+        <p:nvSpPr>
+          <p:cNvPr id="18" name="Shape 16"/>
+          <p:cNvSpPr/>
+          <p:nvPr/>
+        </p:nvSpPr>
+        <p:spPr>
+          <a:xfrm>
+            <a:off x="8112557" y="2514600"/>
+            <a:ext cx="3301898" cy="3566160"/>
           </a:xfrm>
           <a:prstGeom prst="roundRect">
-            <a:avLst>
-              <a:gd name="adj" fmla="val 3509"/>
-            </a:avLst>
+            <a:avLst/>
           </a:prstGeom>
           <a:solidFill>
-            <a:srgbClr val="EFF2F4"/>
+            <a:srgbClr val="202226"/>
           </a:solidFill>
-          <a:ln w="15240">
+          <a:ln w="12700">
             <a:solidFill>
-              <a:srgbClr val="4E6270"/>
+              <a:srgbClr val="34363A"/>
             </a:solidFill>
             <a:prstDash val="solid"/>
           </a:ln>
@@ -2763,34 +3171,14 @@
       </p:sp>
       <p:sp>
         <p:nvSpPr>
-          <p:cNvPr id="10" name="Shape 8"/>
-          <p:cNvSpPr/>
-          <p:nvPr/>
-        </p:nvSpPr>
-        <p:spPr>
-          <a:xfrm>
-            <a:off x="914400" y="3675888"/>
-            <a:ext cx="603504" cy="603504"/>
-          </a:xfrm>
-          <a:prstGeom prst="ellipse">
-            <a:avLst/>
-          </a:prstGeom>
-          <a:solidFill>
-            <a:srgbClr val="37474F"/>
-          </a:solidFill>
-          <a:ln/>
-        </p:spPr>
-      </p:sp>
-      <p:sp>
-        <p:nvSpPr>
-          <p:cNvPr id="11" name="Text 9"/>
-          <p:cNvSpPr/>
-          <p:nvPr/>
-        </p:nvSpPr>
-        <p:spPr>
-          <a:xfrm>
-            <a:off x="914400" y="3675888"/>
-            <a:ext cx="603504" cy="603504"/>
+          <p:cNvPr id="19" name="Text 17"/>
+          <p:cNvSpPr/>
+          <p:nvPr/>
+        </p:nvSpPr>
+        <p:spPr>
+          <a:xfrm>
+            <a:off x="8386877" y="2752344"/>
+            <a:ext cx="1828800" cy="777240"/>
           </a:xfrm>
           <a:prstGeom prst="rect">
             <a:avLst/>
@@ -2802,34 +3190,76 @@
           <a:bodyPr wrap="square" lIns="0" tIns="0" rIns="0" bIns="0" rtlCol="0" anchor="ctr"/>
           <a:lstStyle/>
           <a:p>
-            <a:pPr algn="ctr" indent="0" marL="0">
-              <a:buNone/>
-            </a:pPr>
-            <a:r>
-              <a:rPr lang="en-US" sz="2200" b="1" dirty="0">
-                <a:solidFill>
-                  <a:srgbClr val="FFFFFF"/>
-                </a:solidFill>
-                <a:latin typeface="Century Schoolbook" pitchFamily="34" charset="0"/>
-                <a:ea typeface="Century Schoolbook" pitchFamily="34" charset="-122"/>
-                <a:cs typeface="Century Schoolbook" pitchFamily="34" charset="-120"/>
-              </a:rPr>
-              <a:t>2</a:t>
-            </a:r>
-            <a:endParaRPr lang="en-US" sz="2200" dirty="0"/>
-          </a:p>
-        </p:txBody>
-      </p:sp>
-      <p:sp>
-        <p:nvSpPr>
-          <p:cNvPr id="12" name="Text 10"/>
-          <p:cNvSpPr/>
-          <p:nvPr/>
-        </p:nvSpPr>
-        <p:spPr>
-          <a:xfrm>
-            <a:off x="914400" y="4425696"/>
-            <a:ext cx="4754880" cy="777240"/>
+            <a:pPr indent="0" marL="0">
+              <a:buNone/>
+            </a:pPr>
+            <a:r>
+              <a:rPr lang="en-US" sz="3800" b="1" dirty="0">
+                <a:solidFill>
+                  <a:srgbClr val="FFCC00"/>
+                </a:solidFill>
+                <a:latin typeface="Century Gothic" pitchFamily="34" charset="0"/>
+                <a:ea typeface="Century Gothic" pitchFamily="34" charset="-122"/>
+                <a:cs typeface="Century Gothic" pitchFamily="34" charset="-120"/>
+              </a:rPr>
+              <a:t>03</a:t>
+            </a:r>
+            <a:endParaRPr lang="en-US" sz="3800" dirty="0"/>
+          </a:p>
+        </p:txBody>
+      </p:sp>
+      <p:sp>
+        <p:nvSpPr>
+          <p:cNvPr id="20" name="Text 18"/>
+          <p:cNvSpPr/>
+          <p:nvPr/>
+        </p:nvSpPr>
+        <p:spPr>
+          <a:xfrm>
+            <a:off x="8405165" y="3566160"/>
+            <a:ext cx="2753258" cy="868680"/>
+          </a:xfrm>
+          <a:prstGeom prst="rect">
+            <a:avLst/>
+          </a:prstGeom>
+          <a:noFill/>
+          <a:ln/>
+        </p:spPr>
+        <p:txBody>
+          <a:bodyPr wrap="square" lIns="0" tIns="0" rIns="0" bIns="0" rtlCol="0" anchor="t"/>
+          <a:lstStyle/>
+          <a:p>
+            <a:pPr indent="0" marL="0">
+              <a:lnSpc>
+                <a:spcPct val="100000"/>
+              </a:lnSpc>
+              <a:buNone/>
+            </a:pPr>
+            <a:r>
+              <a:rPr lang="en-US" sz="1550" b="1" dirty="0">
+                <a:solidFill>
+                  <a:srgbClr val="ECE9DF"/>
+                </a:solidFill>
+                <a:latin typeface="Century Gothic" pitchFamily="34" charset="0"/>
+                <a:ea typeface="Century Gothic" pitchFamily="34" charset="-122"/>
+                <a:cs typeface="Century Gothic" pitchFamily="34" charset="-120"/>
+              </a:rPr>
+              <a:t>Window-average trend charts</a:t>
+            </a:r>
+            <a:endParaRPr lang="en-US" sz="1550" dirty="0"/>
+          </a:p>
+        </p:txBody>
+      </p:sp>
+      <p:sp>
+        <p:nvSpPr>
+          <p:cNvPr id="21" name="Text 19"/>
+          <p:cNvSpPr/>
+          <p:nvPr/>
+        </p:nvSpPr>
+        <p:spPr>
+          <a:xfrm>
+            <a:off x="8405165" y="4434840"/>
+            <a:ext cx="2753258" cy="1463040"/>
           </a:xfrm>
           <a:prstGeom prst="rect">
             <a:avLst/>
@@ -2842,229 +3272,23 @@
           <a:lstStyle/>
           <a:p>
             <a:pPr indent="0" marL="0">
-              <a:buNone/>
-            </a:pPr>
-            <a:r>
-              <a:rPr lang="en-US" sz="1600" b="1" dirty="0">
-                <a:solidFill>
-                  <a:srgbClr val="1F272D"/>
+              <a:lnSpc>
+                <a:spcPct val="120000"/>
+              </a:lnSpc>
+              <a:buNone/>
+            </a:pPr>
+            <a:r>
+              <a:rPr lang="en-US" sz="1200" dirty="0">
+                <a:solidFill>
+                  <a:srgbClr val="8B98A6"/>
                 </a:solidFill>
                 <a:latin typeface="Calibri" pitchFamily="34" charset="0"/>
                 <a:ea typeface="Calibri" pitchFamily="34" charset="-122"/>
                 <a:cs typeface="Calibri" pitchFamily="34" charset="-120"/>
               </a:rPr>
-              <a:t>Two faults at opposite ends of time</a:t>
-            </a:r>
-            <a:endParaRPr lang="en-US" sz="1600" dirty="0"/>
-          </a:p>
-        </p:txBody>
-      </p:sp>
-      <p:sp>
-        <p:nvSpPr>
-          <p:cNvPr id="13" name="Text 11"/>
-          <p:cNvSpPr/>
-          <p:nvPr/>
-        </p:nvSpPr>
-        <p:spPr>
-          <a:xfrm>
-            <a:off x="914400" y="5184648"/>
-            <a:ext cx="4754880" cy="640080"/>
-          </a:xfrm>
-          <a:prstGeom prst="rect">
-            <a:avLst/>
-          </a:prstGeom>
-          <a:noFill/>
-          <a:ln/>
-        </p:spPr>
-        <p:txBody>
-          <a:bodyPr wrap="square" lIns="0" tIns="0" rIns="0" bIns="0" rtlCol="0" anchor="ctr"/>
-          <a:lstStyle/>
-          <a:p>
-            <a:pPr indent="0" marL="0">
-              <a:lnSpc>
-                <a:spcPct val="106000"/>
-              </a:lnSpc>
-              <a:buNone/>
-            </a:pPr>
-            <a:r>
-              <a:rPr lang="en-US" sz="1250" dirty="0">
-                <a:solidFill>
-                  <a:srgbClr val="626E78"/>
-                </a:solidFill>
-                <a:latin typeface="Calibri" pitchFamily="34" charset="0"/>
-                <a:ea typeface="Calibri" pitchFamily="34" charset="-122"/>
-                <a:cs typeface="Calibri" pitchFamily="34" charset="-120"/>
-              </a:rPr>
-              <a:t>Tower-B is firing a ride-quality fault (a drift, read on the average) and an overload warning (an instant, read on the peak) at once.</a:t>
-            </a:r>
-            <a:endParaRPr lang="en-US" sz="1250" dirty="0"/>
-          </a:p>
-        </p:txBody>
-      </p:sp>
-      <p:sp>
-        <p:nvSpPr>
-          <p:cNvPr id="14" name="Shape 12"/>
-          <p:cNvSpPr/>
-          <p:nvPr/>
-        </p:nvSpPr>
-        <p:spPr>
-          <a:xfrm>
-            <a:off x="6217920" y="3401568"/>
-            <a:ext cx="5303520" cy="2606040"/>
-          </a:xfrm>
-          <a:prstGeom prst="roundRect">
-            <a:avLst>
-              <a:gd name="adj" fmla="val 3509"/>
-            </a:avLst>
-          </a:prstGeom>
-          <a:solidFill>
-            <a:srgbClr val="EFF2F4"/>
-          </a:solidFill>
-          <a:ln w="15240">
-            <a:solidFill>
-              <a:srgbClr val="4E6270"/>
-            </a:solidFill>
-            <a:prstDash val="solid"/>
-          </a:ln>
-        </p:spPr>
-      </p:sp>
-      <p:sp>
-        <p:nvSpPr>
-          <p:cNvPr id="15" name="Shape 13"/>
-          <p:cNvSpPr/>
-          <p:nvPr/>
-        </p:nvSpPr>
-        <p:spPr>
-          <a:xfrm>
-            <a:off x="6492240" y="3675888"/>
-            <a:ext cx="603504" cy="603504"/>
-          </a:xfrm>
-          <a:prstGeom prst="ellipse">
-            <a:avLst/>
-          </a:prstGeom>
-          <a:solidFill>
-            <a:srgbClr val="37474F"/>
-          </a:solidFill>
-          <a:ln/>
-        </p:spPr>
-      </p:sp>
-      <p:sp>
-        <p:nvSpPr>
-          <p:cNvPr id="16" name="Text 14"/>
-          <p:cNvSpPr/>
-          <p:nvPr/>
-        </p:nvSpPr>
-        <p:spPr>
-          <a:xfrm>
-            <a:off x="6492240" y="3675888"/>
-            <a:ext cx="603504" cy="603504"/>
-          </a:xfrm>
-          <a:prstGeom prst="rect">
-            <a:avLst/>
-          </a:prstGeom>
-          <a:noFill/>
-          <a:ln/>
-        </p:spPr>
-        <p:txBody>
-          <a:bodyPr wrap="square" lIns="0" tIns="0" rIns="0" bIns="0" rtlCol="0" anchor="ctr"/>
-          <a:lstStyle/>
-          <a:p>
-            <a:pPr algn="ctr" indent="0" marL="0">
-              <a:buNone/>
-            </a:pPr>
-            <a:r>
-              <a:rPr lang="en-US" sz="2200" b="1" dirty="0">
-                <a:solidFill>
-                  <a:srgbClr val="FFFFFF"/>
-                </a:solidFill>
-                <a:latin typeface="Century Schoolbook" pitchFamily="34" charset="0"/>
-                <a:ea typeface="Century Schoolbook" pitchFamily="34" charset="-122"/>
-                <a:cs typeface="Century Schoolbook" pitchFamily="34" charset="-120"/>
-              </a:rPr>
-              <a:t>3</a:t>
-            </a:r>
-            <a:endParaRPr lang="en-US" sz="2200" dirty="0"/>
-          </a:p>
-        </p:txBody>
-      </p:sp>
-      <p:sp>
-        <p:nvSpPr>
-          <p:cNvPr id="17" name="Text 15"/>
-          <p:cNvSpPr/>
-          <p:nvPr/>
-        </p:nvSpPr>
-        <p:spPr>
-          <a:xfrm>
-            <a:off x="6492240" y="4425696"/>
-            <a:ext cx="4754880" cy="777240"/>
-          </a:xfrm>
-          <a:prstGeom prst="rect">
-            <a:avLst/>
-          </a:prstGeom>
-          <a:noFill/>
-          <a:ln/>
-        </p:spPr>
-        <p:txBody>
-          <a:bodyPr wrap="square" lIns="0" tIns="0" rIns="0" bIns="0" rtlCol="0" anchor="ctr"/>
-          <a:lstStyle/>
-          <a:p>
-            <a:pPr indent="0" marL="0">
-              <a:buNone/>
-            </a:pPr>
-            <a:r>
-              <a:rPr lang="en-US" sz="1600" b="1" dirty="0">
-                <a:solidFill>
-                  <a:srgbClr val="1F272D"/>
-                </a:solidFill>
-                <a:latin typeface="Calibri" pitchFamily="34" charset="0"/>
-                <a:ea typeface="Calibri" pitchFamily="34" charset="-122"/>
-                <a:cs typeface="Calibri" pitchFamily="34" charset="-120"/>
-              </a:rPr>
-              <a:t>Window-average trend charts</a:t>
-            </a:r>
-            <a:endParaRPr lang="en-US" sz="1600" dirty="0"/>
-          </a:p>
-        </p:txBody>
-      </p:sp>
-      <p:sp>
-        <p:nvSpPr>
-          <p:cNvPr id="18" name="Text 16"/>
-          <p:cNvSpPr/>
-          <p:nvPr/>
-        </p:nvSpPr>
-        <p:spPr>
-          <a:xfrm>
-            <a:off x="6492240" y="5184648"/>
-            <a:ext cx="4754880" cy="640080"/>
-          </a:xfrm>
-          <a:prstGeom prst="rect">
-            <a:avLst/>
-          </a:prstGeom>
-          <a:noFill/>
-          <a:ln/>
-        </p:spPr>
-        <p:txBody>
-          <a:bodyPr wrap="square" lIns="0" tIns="0" rIns="0" bIns="0" rtlCol="0" anchor="ctr"/>
-          <a:lstStyle/>
-          <a:p>
-            <a:pPr indent="0" marL="0">
-              <a:lnSpc>
-                <a:spcPct val="106000"/>
-              </a:lnSpc>
-              <a:buNone/>
-            </a:pPr>
-            <a:r>
-              <a:rPr lang="en-US" sz="1250" dirty="0">
-                <a:solidFill>
-                  <a:srgbClr val="626E78"/>
-                </a:solidFill>
-                <a:latin typeface="Calibri" pitchFamily="34" charset="0"/>
-                <a:ea typeface="Calibri" pitchFamily="34" charset="-122"/>
-                <a:cs typeface="Calibri" pitchFamily="34" charset="-120"/>
-              </a:rPr>
               <a:t>Five trend charts run per tower, so a slowly overheating motor is visible on the trend well before it alarms.</a:t>
             </a:r>
-            <a:endParaRPr lang="en-US" sz="1250" dirty="0"/>
+            <a:endParaRPr lang="en-US" sz="1200" dirty="0"/>
           </a:p>
         </p:txBody>
       </p:sp>
@@ -3082,7 +3306,7 @@
     <p:bg>
       <p:bgPr>
         <a:solidFill>
-          <a:srgbClr val="FFFFFF"/>
+          <a:srgbClr val="17181A"/>
         </a:solidFill>
       </p:bgPr>
     </p:bg>
@@ -3102,65 +3326,22 @@
       </p:grpSpPr>
       <p:sp>
         <p:nvSpPr>
-          <p:cNvPr id="2" name="Text 0"/>
-          <p:cNvSpPr/>
-          <p:nvPr/>
-        </p:nvSpPr>
-        <p:spPr>
-          <a:xfrm>
-            <a:off x="640080" y="502920"/>
-            <a:ext cx="10972800" cy="822960"/>
-          </a:xfrm>
-          <a:prstGeom prst="rect">
-            <a:avLst/>
-          </a:prstGeom>
-          <a:noFill/>
-          <a:ln/>
-        </p:spPr>
-        <p:txBody>
-          <a:bodyPr wrap="square" rtlCol="0" anchor="t"/>
-          <a:lstStyle/>
-          <a:p>
-            <a:pPr indent="0" marL="0">
-              <a:buNone/>
-            </a:pPr>
-            <a:r>
-              <a:rPr lang="en-US" sz="2800" b="1" dirty="0">
-                <a:solidFill>
-                  <a:srgbClr val="1F272D"/>
-                </a:solidFill>
-                <a:latin typeface="Century Schoolbook" pitchFamily="34" charset="0"/>
-                <a:ea typeface="Century Schoolbook" pitchFamily="34" charset="-122"/>
-                <a:cs typeface="Century Schoolbook" pitchFamily="34" charset="-120"/>
-              </a:rPr>
-              <a:t>Hardest Part — peak or trend</a:t>
-            </a:r>
-            <a:endParaRPr lang="en-US" sz="2800" dirty="0"/>
-          </a:p>
-        </p:txBody>
-      </p:sp>
-      <p:sp>
-        <p:nvSpPr>
-          <p:cNvPr id="3" name="Shape 1"/>
-          <p:cNvSpPr/>
-          <p:nvPr/>
-        </p:nvSpPr>
-        <p:spPr>
-          <a:xfrm>
-            <a:off x="640080" y="1874520"/>
-            <a:ext cx="4937760" cy="4160520"/>
-          </a:xfrm>
-          <a:prstGeom prst="roundRect">
-            <a:avLst>
-              <a:gd name="adj" fmla="val 2198"/>
-            </a:avLst>
-          </a:prstGeom>
-          <a:solidFill>
-            <a:srgbClr val="EFF2F4"/>
-          </a:solidFill>
-          <a:ln w="19050">
+          <p:cNvPr id="2" name="Shape 0"/>
+          <p:cNvSpPr/>
+          <p:nvPr/>
+        </p:nvSpPr>
+        <p:spPr>
+          <a:xfrm>
+            <a:off x="10911535" y="457200"/>
+            <a:ext cx="822960" cy="0"/>
+          </a:xfrm>
+          <a:prstGeom prst="line">
+            <a:avLst/>
+          </a:prstGeom>
+          <a:noFill/>
+          <a:ln w="25400">
             <a:solidFill>
-              <a:srgbClr val="F0A500"/>
+              <a:srgbClr val="FFCC00"/>
             </a:solidFill>
             <a:prstDash val="solid"/>
           </a:ln>
@@ -3168,14 +3349,83 @@
       </p:sp>
       <p:sp>
         <p:nvSpPr>
-          <p:cNvPr id="4" name="Text 2"/>
-          <p:cNvSpPr/>
-          <p:nvPr/>
-        </p:nvSpPr>
-        <p:spPr>
-          <a:xfrm>
-            <a:off x="960120" y="2103120"/>
-            <a:ext cx="3657600" cy="457200"/>
+          <p:cNvPr id="3" name="Shape 1"/>
+          <p:cNvSpPr/>
+          <p:nvPr/>
+        </p:nvSpPr>
+        <p:spPr>
+          <a:xfrm>
+            <a:off x="11734495" y="457200"/>
+            <a:ext cx="0" cy="822960"/>
+          </a:xfrm>
+          <a:prstGeom prst="line">
+            <a:avLst/>
+          </a:prstGeom>
+          <a:noFill/>
+          <a:ln w="25400">
+            <a:solidFill>
+              <a:srgbClr val="FFCC00"/>
+            </a:solidFill>
+            <a:prstDash val="solid"/>
+          </a:ln>
+        </p:spPr>
+      </p:sp>
+      <p:sp>
+        <p:nvSpPr>
+          <p:cNvPr id="4" name="Shape 2"/>
+          <p:cNvSpPr/>
+          <p:nvPr/>
+        </p:nvSpPr>
+        <p:spPr>
+          <a:xfrm>
+            <a:off x="457200" y="6400800"/>
+            <a:ext cx="822960" cy="0"/>
+          </a:xfrm>
+          <a:prstGeom prst="line">
+            <a:avLst/>
+          </a:prstGeom>
+          <a:noFill/>
+          <a:ln w="25400">
+            <a:solidFill>
+              <a:srgbClr val="FFCC00"/>
+            </a:solidFill>
+            <a:prstDash val="solid"/>
+          </a:ln>
+        </p:spPr>
+      </p:sp>
+      <p:sp>
+        <p:nvSpPr>
+          <p:cNvPr id="5" name="Shape 3"/>
+          <p:cNvSpPr/>
+          <p:nvPr/>
+        </p:nvSpPr>
+        <p:spPr>
+          <a:xfrm>
+            <a:off x="457200" y="5577840"/>
+            <a:ext cx="0" cy="822960"/>
+          </a:xfrm>
+          <a:prstGeom prst="line">
+            <a:avLst/>
+          </a:prstGeom>
+          <a:noFill/>
+          <a:ln w="25400">
+            <a:solidFill>
+              <a:srgbClr val="FFCC00"/>
+            </a:solidFill>
+            <a:prstDash val="solid"/>
+          </a:ln>
+        </p:spPr>
+      </p:sp>
+      <p:sp>
+        <p:nvSpPr>
+          <p:cNvPr id="6" name="Text 4"/>
+          <p:cNvSpPr/>
+          <p:nvPr/>
+        </p:nvSpPr>
+        <p:spPr>
+          <a:xfrm>
+            <a:off x="777240" y="731520"/>
+            <a:ext cx="914400" cy="640080"/>
           </a:xfrm>
           <a:prstGeom prst="rect">
             <a:avLst/>
@@ -3191,30 +3441,30 @@
               <a:buNone/>
             </a:pPr>
             <a:r>
-              <a:rPr lang="en-US" sz="1900" b="1" dirty="0">
-                <a:solidFill>
-                  <a:srgbClr val="F0A500"/>
-                </a:solidFill>
-                <a:latin typeface="Century Schoolbook" pitchFamily="34" charset="0"/>
-                <a:ea typeface="Century Schoolbook" pitchFamily="34" charset="-122"/>
-                <a:cs typeface="Century Schoolbook" pitchFamily="34" charset="-120"/>
-              </a:rPr>
-              <a:t>Problem</a:t>
-            </a:r>
-            <a:endParaRPr lang="en-US" sz="1900" dirty="0"/>
-          </a:p>
-        </p:txBody>
-      </p:sp>
-      <p:sp>
-        <p:nvSpPr>
-          <p:cNvPr id="5" name="Text 3"/>
-          <p:cNvSpPr/>
-          <p:nvPr/>
-        </p:nvSpPr>
-        <p:spPr>
-          <a:xfrm>
-            <a:off x="960120" y="2651760"/>
-            <a:ext cx="4343400" cy="3200400"/>
+              <a:rPr lang="en-US" sz="3000" b="1" dirty="0">
+                <a:solidFill>
+                  <a:srgbClr val="FFCC00"/>
+                </a:solidFill>
+                <a:latin typeface="Century Gothic" pitchFamily="34" charset="0"/>
+                <a:ea typeface="Century Gothic" pitchFamily="34" charset="-122"/>
+                <a:cs typeface="Century Gothic" pitchFamily="34" charset="-120"/>
+              </a:rPr>
+              <a:t>03</a:t>
+            </a:r>
+            <a:endParaRPr lang="en-US" sz="3000" dirty="0"/>
+          </a:p>
+        </p:txBody>
+      </p:sp>
+      <p:sp>
+        <p:nvSpPr>
+          <p:cNvPr id="7" name="Text 5"/>
+          <p:cNvSpPr/>
+          <p:nvPr/>
+        </p:nvSpPr>
+        <p:spPr>
+          <a:xfrm>
+            <a:off x="1645920" y="905256"/>
+            <a:ext cx="9768535" cy="274320"/>
           </a:xfrm>
           <a:prstGeom prst="rect">
             <a:avLst/>
@@ -3227,48 +3477,82 @@
           <a:lstStyle/>
           <a:p>
             <a:pPr indent="0" marL="0">
-              <a:lnSpc>
-                <a:spcPct val="112000"/>
-              </a:lnSpc>
-              <a:buNone/>
-            </a:pPr>
-            <a:r>
-              <a:rPr lang="en-US" sz="1350" dirty="0">
-                <a:solidFill>
-                  <a:srgbClr val="1F272D"/>
+              <a:buNone/>
+            </a:pPr>
+            <a:r>
+              <a:rPr lang="en-US" sz="1100" b="1" spc="200" kern="0" dirty="0">
+                <a:solidFill>
+                  <a:srgbClr val="8B98A6"/>
                 </a:solidFill>
                 <a:latin typeface="Calibri" pitchFamily="34" charset="0"/>
                 <a:ea typeface="Calibri" pitchFamily="34" charset="-122"/>
                 <a:cs typeface="Calibri" pitchFamily="34" charset="-120"/>
               </a:rPr>
-              <a:t>Every window becomes the same five numbers: count, min, max, average, latest. If every rule read the average, the overload would slip through — one overweight trip among nine ordinary ones averages out below the limit while the car is genuinely overloaded.</a:t>
-            </a:r>
-            <a:endParaRPr lang="en-US" sz="1350" dirty="0"/>
-          </a:p>
-        </p:txBody>
-      </p:sp>
-      <p:sp>
-        <p:nvSpPr>
-          <p:cNvPr id="6" name="Shape 4"/>
-          <p:cNvSpPr/>
-          <p:nvPr/>
-        </p:nvSpPr>
-        <p:spPr>
-          <a:xfrm>
-            <a:off x="6611112" y="1874520"/>
-            <a:ext cx="4937760" cy="4160520"/>
+              <a:t>CHALLENGE</a:t>
+            </a:r>
+            <a:endParaRPr lang="en-US" sz="1100" dirty="0"/>
+          </a:p>
+        </p:txBody>
+      </p:sp>
+      <p:sp>
+        <p:nvSpPr>
+          <p:cNvPr id="8" name="Text 6"/>
+          <p:cNvSpPr/>
+          <p:nvPr/>
+        </p:nvSpPr>
+        <p:spPr>
+          <a:xfrm>
+            <a:off x="777240" y="1380744"/>
+            <a:ext cx="10637215" cy="640080"/>
+          </a:xfrm>
+          <a:prstGeom prst="rect">
+            <a:avLst/>
+          </a:prstGeom>
+          <a:noFill/>
+          <a:ln/>
+        </p:spPr>
+        <p:txBody>
+          <a:bodyPr wrap="square" lIns="0" tIns="0" rIns="0" bIns="0" rtlCol="0" anchor="ctr"/>
+          <a:lstStyle/>
+          <a:p>
+            <a:pPr indent="0" marL="0">
+              <a:buNone/>
+            </a:pPr>
+            <a:r>
+              <a:rPr lang="en-US" sz="2300" b="1" dirty="0">
+                <a:solidFill>
+                  <a:srgbClr val="ECE9DF"/>
+                </a:solidFill>
+                <a:latin typeface="Century Gothic" pitchFamily="34" charset="0"/>
+                <a:ea typeface="Century Gothic" pitchFamily="34" charset="-122"/>
+                <a:cs typeface="Century Gothic" pitchFamily="34" charset="-120"/>
+              </a:rPr>
+              <a:t>peak or trend</a:t>
+            </a:r>
+            <a:endParaRPr lang="en-US" sz="2300" dirty="0"/>
+          </a:p>
+        </p:txBody>
+      </p:sp>
+      <p:sp>
+        <p:nvSpPr>
+          <p:cNvPr id="9" name="Shape 7"/>
+          <p:cNvSpPr/>
+          <p:nvPr/>
+        </p:nvSpPr>
+        <p:spPr>
+          <a:xfrm>
+            <a:off x="777240" y="2423160"/>
+            <a:ext cx="5090008" cy="3657600"/>
           </a:xfrm>
           <a:prstGeom prst="roundRect">
-            <a:avLst>
-              <a:gd name="adj" fmla="val 2198"/>
-            </a:avLst>
+            <a:avLst/>
           </a:prstGeom>
           <a:solidFill>
-            <a:srgbClr val="EFF2F4"/>
+            <a:srgbClr val="202226"/>
           </a:solidFill>
-          <a:ln w="19050">
+          <a:ln w="12700">
             <a:solidFill>
-              <a:srgbClr val="4E6270"/>
+              <a:srgbClr val="34363A"/>
             </a:solidFill>
             <a:prstDash val="solid"/>
           </a:ln>
@@ -3276,14 +3560,14 @@
       </p:sp>
       <p:sp>
         <p:nvSpPr>
-          <p:cNvPr id="7" name="Text 5"/>
-          <p:cNvSpPr/>
-          <p:nvPr/>
-        </p:nvSpPr>
-        <p:spPr>
-          <a:xfrm>
-            <a:off x="6931152" y="2103120"/>
-            <a:ext cx="3657600" cy="457200"/>
+          <p:cNvPr id="10" name="Text 8"/>
+          <p:cNvSpPr/>
+          <p:nvPr/>
+        </p:nvSpPr>
+        <p:spPr>
+          <a:xfrm>
+            <a:off x="1097280" y="2697480"/>
+            <a:ext cx="4449928" cy="320040"/>
           </a:xfrm>
           <a:prstGeom prst="rect">
             <a:avLst/>
@@ -3299,81 +3583,213 @@
               <a:buNone/>
             </a:pPr>
             <a:r>
-              <a:rPr lang="en-US" sz="1900" b="1" dirty="0">
-                <a:solidFill>
-                  <a:srgbClr val="4E6270"/>
-                </a:solidFill>
-                <a:latin typeface="Century Schoolbook" pitchFamily="34" charset="0"/>
-                <a:ea typeface="Century Schoolbook" pitchFamily="34" charset="-122"/>
-                <a:cs typeface="Century Schoolbook" pitchFamily="34" charset="-120"/>
-              </a:rPr>
-              <a:t>Solution</a:t>
-            </a:r>
-            <a:endParaRPr lang="en-US" sz="1900" dirty="0"/>
-          </a:p>
-        </p:txBody>
-      </p:sp>
-      <p:sp>
-        <p:nvSpPr>
-          <p:cNvPr id="8" name="Text 6"/>
-          <p:cNvSpPr/>
-          <p:nvPr/>
-        </p:nvSpPr>
-        <p:spPr>
-          <a:xfrm>
-            <a:off x="6931152" y="2651760"/>
-            <a:ext cx="4343400" cy="3200400"/>
-          </a:xfrm>
-          <a:prstGeom prst="rect">
-            <a:avLst/>
-          </a:prstGeom>
-          <a:noFill/>
-          <a:ln/>
-        </p:spPr>
-        <p:txBody>
-          <a:bodyPr wrap="square" lIns="0" tIns="0" rIns="0" bIns="0" rtlCol="0" anchor="ctr"/>
-          <a:lstStyle/>
-          <a:p>
-            <a:pPr indent="0" marL="0">
-              <a:lnSpc>
-                <a:spcPct val="112000"/>
-              </a:lnSpc>
-              <a:buNone/>
-            </a:pPr>
-            <a:r>
-              <a:rPr lang="en-US" sz="1350" dirty="0">
-                <a:solidFill>
-                  <a:srgbClr val="1F272D"/>
+              <a:rPr lang="en-US" sz="1200" b="1" spc="200" kern="0" dirty="0">
+                <a:solidFill>
+                  <a:srgbClr val="D1584E"/>
                 </a:solidFill>
                 <a:latin typeface="Calibri" pitchFamily="34" charset="0"/>
                 <a:ea typeface="Calibri" pitchFamily="34" charset="-122"/>
                 <a:cs typeface="Calibri" pitchFamily="34" charset="-120"/>
               </a:rPr>
+              <a:t>PROBLEM</a:t>
+            </a:r>
+            <a:endParaRPr lang="en-US" sz="1200" dirty="0"/>
+          </a:p>
+        </p:txBody>
+      </p:sp>
+      <p:sp>
+        <p:nvSpPr>
+          <p:cNvPr id="11" name="Shape 9"/>
+          <p:cNvSpPr/>
+          <p:nvPr/>
+        </p:nvSpPr>
+        <p:spPr>
+          <a:xfrm>
+            <a:off x="1097280" y="3081528"/>
+            <a:ext cx="4449928" cy="0"/>
+          </a:xfrm>
+          <a:prstGeom prst="line">
+            <a:avLst/>
+          </a:prstGeom>
+          <a:noFill/>
+          <a:ln w="19050">
+            <a:solidFill>
+              <a:srgbClr val="D1584E"/>
+            </a:solidFill>
+            <a:prstDash val="solid"/>
+          </a:ln>
+        </p:spPr>
+      </p:sp>
+      <p:sp>
+        <p:nvSpPr>
+          <p:cNvPr id="12" name="Text 10"/>
+          <p:cNvSpPr/>
+          <p:nvPr/>
+        </p:nvSpPr>
+        <p:spPr>
+          <a:xfrm>
+            <a:off x="1097280" y="3246120"/>
+            <a:ext cx="4449928" cy="2651760"/>
+          </a:xfrm>
+          <a:prstGeom prst="rect">
+            <a:avLst/>
+          </a:prstGeom>
+          <a:noFill/>
+          <a:ln/>
+        </p:spPr>
+        <p:txBody>
+          <a:bodyPr wrap="square" lIns="0" tIns="0" rIns="0" bIns="0" rtlCol="0" anchor="t"/>
+          <a:lstStyle/>
+          <a:p>
+            <a:pPr indent="0" marL="0">
+              <a:lnSpc>
+                <a:spcPct val="128000"/>
+              </a:lnSpc>
+              <a:buNone/>
+            </a:pPr>
+            <a:r>
+              <a:rPr lang="en-US" sz="1350" dirty="0">
+                <a:solidFill>
+                  <a:srgbClr val="ECE9DF"/>
+                </a:solidFill>
+                <a:latin typeface="Calibri" pitchFamily="34" charset="0"/>
+                <a:ea typeface="Calibri" pitchFamily="34" charset="-122"/>
+                <a:cs typeface="Calibri" pitchFamily="34" charset="-120"/>
+              </a:rPr>
+              <a:t>Every window becomes the same five numbers: count, min, max, average, latest. If every rule read the average, the overload would slip through — one overweight trip among nine ordinary ones averages out below the limit while the car is genuinely overloaded.</a:t>
+            </a:r>
+            <a:endParaRPr lang="en-US" sz="1350" dirty="0"/>
+          </a:p>
+        </p:txBody>
+      </p:sp>
+      <p:sp>
+        <p:nvSpPr>
+          <p:cNvPr id="13" name="Shape 11"/>
+          <p:cNvSpPr/>
+          <p:nvPr/>
+        </p:nvSpPr>
+        <p:spPr>
+          <a:xfrm>
+            <a:off x="6324448" y="2423160"/>
+            <a:ext cx="5090008" cy="3657600"/>
+          </a:xfrm>
+          <a:prstGeom prst="roundRect">
+            <a:avLst/>
+          </a:prstGeom>
+          <a:solidFill>
+            <a:srgbClr val="202226"/>
+          </a:solidFill>
+          <a:ln w="12700">
+            <a:solidFill>
+              <a:srgbClr val="34363A"/>
+            </a:solidFill>
+            <a:prstDash val="solid"/>
+          </a:ln>
+        </p:spPr>
+      </p:sp>
+      <p:sp>
+        <p:nvSpPr>
+          <p:cNvPr id="14" name="Text 12"/>
+          <p:cNvSpPr/>
+          <p:nvPr/>
+        </p:nvSpPr>
+        <p:spPr>
+          <a:xfrm>
+            <a:off x="6644488" y="2697480"/>
+            <a:ext cx="4449928" cy="320040"/>
+          </a:xfrm>
+          <a:prstGeom prst="rect">
+            <a:avLst/>
+          </a:prstGeom>
+          <a:noFill/>
+          <a:ln/>
+        </p:spPr>
+        <p:txBody>
+          <a:bodyPr wrap="square" lIns="0" tIns="0" rIns="0" bIns="0" rtlCol="0" anchor="ctr"/>
+          <a:lstStyle/>
+          <a:p>
+            <a:pPr indent="0" marL="0">
+              <a:buNone/>
+            </a:pPr>
+            <a:r>
+              <a:rPr lang="en-US" sz="1200" b="1" spc="200" kern="0" dirty="0">
+                <a:solidFill>
+                  <a:srgbClr val="35C98C"/>
+                </a:solidFill>
+                <a:latin typeface="Calibri" pitchFamily="34" charset="0"/>
+                <a:ea typeface="Calibri" pitchFamily="34" charset="-122"/>
+                <a:cs typeface="Calibri" pitchFamily="34" charset="-120"/>
+              </a:rPr>
+              <a:t>SOLUTION</a:t>
+            </a:r>
+            <a:endParaRPr lang="en-US" sz="1200" dirty="0"/>
+          </a:p>
+        </p:txBody>
+      </p:sp>
+      <p:sp>
+        <p:nvSpPr>
+          <p:cNvPr id="15" name="Shape 13"/>
+          <p:cNvSpPr/>
+          <p:nvPr/>
+        </p:nvSpPr>
+        <p:spPr>
+          <a:xfrm>
+            <a:off x="6644488" y="3081528"/>
+            <a:ext cx="4449928" cy="0"/>
+          </a:xfrm>
+          <a:prstGeom prst="line">
+            <a:avLst/>
+          </a:prstGeom>
+          <a:noFill/>
+          <a:ln w="19050">
+            <a:solidFill>
+              <a:srgbClr val="35C98C"/>
+            </a:solidFill>
+            <a:prstDash val="solid"/>
+          </a:ln>
+        </p:spPr>
+      </p:sp>
+      <p:sp>
+        <p:nvSpPr>
+          <p:cNvPr id="16" name="Text 14"/>
+          <p:cNvSpPr/>
+          <p:nvPr/>
+        </p:nvSpPr>
+        <p:spPr>
+          <a:xfrm>
+            <a:off x="6644488" y="3246120"/>
+            <a:ext cx="4449928" cy="2651760"/>
+          </a:xfrm>
+          <a:prstGeom prst="rect">
+            <a:avLst/>
+          </a:prstGeom>
+          <a:noFill/>
+          <a:ln/>
+        </p:spPr>
+        <p:txBody>
+          <a:bodyPr wrap="square" lIns="0" tIns="0" rIns="0" bIns="0" rtlCol="0" anchor="t"/>
+          <a:lstStyle/>
+          <a:p>
+            <a:pPr indent="0" marL="0">
+              <a:lnSpc>
+                <a:spcPct val="128000"/>
+              </a:lnSpc>
+              <a:buNone/>
+            </a:pPr>
+            <a:r>
+              <a:rPr lang="en-US" sz="1350" dirty="0">
+                <a:solidFill>
+                  <a:srgbClr val="ECE9DF"/>
+                </a:solidFill>
+                <a:latin typeface="Calibri" pitchFamily="34" charset="0"/>
+                <a:ea typeface="Calibri" pitchFamily="34" charset="-122"/>
+                <a:cs typeface="Calibri" pitchFamily="34" charset="-120"/>
+              </a:rPr>
               <a:t>Bind each rule to the number its fault lives in: overheating, rough riding and stalling are trends, so they read the window average; overload is a single instant, so it reads the window maximum. The samplers are drift-corrected so every window covers a like span of time and the peak that trips an overload is real, not a clock artefact. A unit test fires the overload on a peak the average leaves below the limit.</a:t>
             </a:r>
             <a:endParaRPr lang="en-US" sz="1350" dirty="0"/>
           </a:p>
         </p:txBody>
-      </p:sp>
-      <p:sp>
-        <p:nvSpPr>
-          <p:cNvPr id="9" name="Shape 7"/>
-          <p:cNvSpPr/>
-          <p:nvPr/>
-        </p:nvSpPr>
-        <p:spPr>
-          <a:xfrm>
-            <a:off x="5669280" y="3703320"/>
-            <a:ext cx="841248" cy="512064"/>
-          </a:xfrm>
-          <a:prstGeom prst="rightArrow">
-            <a:avLst/>
-          </a:prstGeom>
-          <a:solidFill>
-            <a:srgbClr val="37474F"/>
-          </a:solidFill>
-          <a:ln/>
-        </p:spPr>
       </p:sp>
     </p:spTree>
   </p:cSld>
